--- a/Project_KALM/MSP_Template.pptx
+++ b/Project_KALM/MSP_Template.pptx
@@ -5,10 +5,10 @@
     <p:sldMasterId id="2147483657" r:id="rId4"/>
   </p:sldMasterIdLst>
   <p:notesMasterIdLst>
-    <p:notesMasterId r:id="rId10"/>
+    <p:notesMasterId r:id="rId25"/>
   </p:notesMasterIdLst>
   <p:handoutMasterIdLst>
-    <p:handoutMasterId r:id="rId11"/>
+    <p:handoutMasterId r:id="rId26"/>
   </p:handoutMasterIdLst>
   <p:sldIdLst>
     <p:sldId id="2147472796" r:id="rId5"/>
@@ -16,6 +16,21 @@
     <p:sldId id="2147472670" r:id="rId7"/>
     <p:sldId id="301" r:id="rId8"/>
     <p:sldId id="292" r:id="rId9"/>
+    <p:sldId id="2147472797" r:id="rId10"/>
+    <p:sldId id="2147472799" r:id="rId11"/>
+    <p:sldId id="2147472798" r:id="rId12"/>
+    <p:sldId id="2147472800" r:id="rId13"/>
+    <p:sldId id="2147472801" r:id="rId14"/>
+    <p:sldId id="2147472802" r:id="rId15"/>
+    <p:sldId id="2147472803" r:id="rId16"/>
+    <p:sldId id="2147472807" r:id="rId17"/>
+    <p:sldId id="2147472812" r:id="rId18"/>
+    <p:sldId id="2147472813" r:id="rId19"/>
+    <p:sldId id="2147472804" r:id="rId20"/>
+    <p:sldId id="2147472805" r:id="rId21"/>
+    <p:sldId id="2147472808" r:id="rId22"/>
+    <p:sldId id="2147472810" r:id="rId23"/>
+    <p:sldId id="2147472806" r:id="rId24"/>
   </p:sldIdLst>
   <p:sldSz cx="12192000" cy="6858000"/>
   <p:notesSz cx="6858000" cy="9144000"/>
@@ -343,7 +358,7 @@
           <a:p>
             <a:fld id="{EEC665CA-D682-48EC-95D2-126FD6449D65}" type="datetime1">
               <a:rPr lang="de-CH" sz="900" smtClean="0"/>
-              <a:t>26.05.2025</a:t>
+              <a:t>07.07.2025</a:t>
             </a:fld>
             <a:endParaRPr lang="de-CH" sz="900"/>
           </a:p>
@@ -413,7 +428,7 @@
           <a:p>
             <a:fld id="{2CEDAA2C-602C-494B-9BFF-F0D7FF14E319}" type="slidenum">
               <a:rPr lang="de-CH" sz="900" smtClean="0"/>
-              <a:t>‹#›</a:t>
+              <a:t>‹Nr.›</a:t>
             </a:fld>
             <a:endParaRPr lang="de-CH" sz="900" dirty="0"/>
           </a:p>
@@ -566,7 +581,7 @@
             <a:fld id="{83C81C81-E364-4366-A610-2DB15FF98538}" type="slidenum">
               <a:rPr lang="de-CH" smtClean="0"/>
               <a:pPr/>
-              <a:t>‹#›</a:t>
+              <a:t>‹Nr.›</a:t>
             </a:fld>
             <a:endParaRPr lang="de-CH" dirty="0"/>
           </a:p>
@@ -661,7 +676,7 @@
           <a:p>
             <a:fld id="{A17AAF7D-4283-4014-80F4-26E915FEACF8}" type="datetime1">
               <a:rPr lang="de-CH" smtClean="0"/>
-              <a:t>26.05.2025</a:t>
+              <a:t>07.07.2025</a:t>
             </a:fld>
             <a:endParaRPr lang="de-CH" dirty="0"/>
           </a:p>
@@ -1036,7 +1051,7 @@
           <a:p>
             <a:fld id="{E471F87F-7CC2-488B-AD55-33485FC98B76}" type="datetime1">
               <a:rPr lang="de-DE" smtClean="0"/>
-              <a:t>26.05.2025</a:t>
+              <a:t>07.07.2025</a:t>
             </a:fld>
             <a:endParaRPr lang="de-CH" dirty="0"/>
           </a:p>
@@ -1124,7 +1139,7 @@
             <a:fld id="{442AD375-037F-43D0-B059-5172DA06796A}" type="slidenum">
               <a:rPr lang="de-CH" smtClean="0"/>
               <a:pPr/>
-              <a:t>‹#›</a:t>
+              <a:t>‹Nr.›</a:t>
             </a:fld>
             <a:endParaRPr lang="de-CH" dirty="0"/>
           </a:p>
@@ -1433,7 +1448,7 @@
           <a:p>
             <a:fld id="{C97BF1D7-D20B-4528-9E03-8B18AB702752}" type="datetime1">
               <a:rPr lang="de-DE" smtClean="0"/>
-              <a:t>26.05.2025</a:t>
+              <a:t>07.07.2025</a:t>
             </a:fld>
             <a:endParaRPr lang="de-CH" dirty="0"/>
           </a:p>
@@ -1500,7 +1515,7 @@
             <a:fld id="{442AD375-037F-43D0-B059-5172DA06796A}" type="slidenum">
               <a:rPr lang="de-CH" smtClean="0"/>
               <a:pPr/>
-              <a:t>‹#›</a:t>
+              <a:t>‹Nr.›</a:t>
             </a:fld>
             <a:endParaRPr lang="de-CH" dirty="0"/>
           </a:p>
@@ -2116,7 +2131,7 @@
           <a:p>
             <a:fld id="{B2DD1E4E-1107-499B-BB00-8AA0260A0EFB}" type="datetime1">
               <a:rPr lang="de-DE" smtClean="0"/>
-              <a:t>26.05.2025</a:t>
+              <a:t>07.07.2025</a:t>
             </a:fld>
             <a:endParaRPr lang="de-CH" dirty="0"/>
           </a:p>
@@ -2183,7 +2198,7 @@
             <a:fld id="{442AD375-037F-43D0-B059-5172DA06796A}" type="slidenum">
               <a:rPr lang="de-CH" smtClean="0"/>
               <a:pPr/>
-              <a:t>‹#›</a:t>
+              <a:t>‹Nr.›</a:t>
             </a:fld>
             <a:endParaRPr lang="de-CH" dirty="0"/>
           </a:p>
@@ -2338,7 +2353,7 @@
           <a:p>
             <a:fld id="{23907732-924E-43E9-B4C2-6CF127C307EB}" type="datetime1">
               <a:rPr lang="de-DE" smtClean="0"/>
-              <a:t>26.05.2025</a:t>
+              <a:t>07.07.2025</a:t>
             </a:fld>
             <a:endParaRPr lang="de-CH" dirty="0"/>
           </a:p>
@@ -2418,7 +2433,7 @@
             <a:fld id="{442AD375-037F-43D0-B059-5172DA06796A}" type="slidenum">
               <a:rPr lang="de-CH" smtClean="0"/>
               <a:pPr/>
-              <a:t>‹#›</a:t>
+              <a:t>‹Nr.›</a:t>
             </a:fld>
             <a:endParaRPr lang="de-CH" dirty="0"/>
           </a:p>
@@ -2589,7 +2604,7 @@
           <a:p>
             <a:fld id="{A6195A94-05D5-4DEC-81F7-6AB426E292F4}" type="datetime1">
               <a:rPr lang="de-DE" smtClean="0"/>
-              <a:t>26.05.2025</a:t>
+              <a:t>07.07.2025</a:t>
             </a:fld>
             <a:endParaRPr lang="de-CH" dirty="0"/>
           </a:p>
@@ -2656,7 +2671,7 @@
             <a:fld id="{442AD375-037F-43D0-B059-5172DA06796A}" type="slidenum">
               <a:rPr lang="de-CH" smtClean="0"/>
               <a:pPr/>
-              <a:t>‹#›</a:t>
+              <a:t>‹Nr.›</a:t>
             </a:fld>
             <a:endParaRPr lang="de-CH" dirty="0"/>
           </a:p>
@@ -2806,7 +2821,7 @@
           <a:p>
             <a:fld id="{052279FA-DBB5-4713-9CD9-90401A466906}" type="datetime1">
               <a:rPr lang="de-DE" smtClean="0"/>
-              <a:t>26.05.2025</a:t>
+              <a:t>07.07.2025</a:t>
             </a:fld>
             <a:endParaRPr lang="de-CH" dirty="0"/>
           </a:p>
@@ -2873,7 +2888,7 @@
             <a:fld id="{442AD375-037F-43D0-B059-5172DA06796A}" type="slidenum">
               <a:rPr lang="de-CH" smtClean="0"/>
               <a:pPr/>
-              <a:t>‹#›</a:t>
+              <a:t>‹Nr.›</a:t>
             </a:fld>
             <a:endParaRPr lang="de-CH" dirty="0"/>
           </a:p>
@@ -2991,7 +3006,7 @@
           <a:p>
             <a:fld id="{1A622A08-A377-47C6-B39F-B1E1F769F25A}" type="datetime1">
               <a:rPr lang="de-DE" smtClean="0"/>
-              <a:t>26.05.2025</a:t>
+              <a:t>07.07.2025</a:t>
             </a:fld>
             <a:endParaRPr lang="de-CH" dirty="0"/>
           </a:p>
@@ -3058,7 +3073,7 @@
             <a:fld id="{442AD375-037F-43D0-B059-5172DA06796A}" type="slidenum">
               <a:rPr lang="de-CH" smtClean="0"/>
               <a:pPr/>
-              <a:t>‹#›</a:t>
+              <a:t>‹Nr.›</a:t>
             </a:fld>
             <a:endParaRPr lang="de-CH" dirty="0"/>
           </a:p>
@@ -3269,7 +3284,7 @@
           <a:p>
             <a:fld id="{7A628CE2-D1EA-49D7-88A5-9921AB788BF8}" type="datetime1">
               <a:rPr lang="de-DE" smtClean="0"/>
-              <a:t>26.05.2025</a:t>
+              <a:t>07.07.2025</a:t>
             </a:fld>
             <a:endParaRPr lang="de-CH" dirty="0"/>
           </a:p>
@@ -3336,7 +3351,7 @@
             <a:fld id="{442AD375-037F-43D0-B059-5172DA06796A}" type="slidenum">
               <a:rPr lang="de-CH" smtClean="0"/>
               <a:pPr/>
-              <a:t>‹#›</a:t>
+              <a:t>‹Nr.›</a:t>
             </a:fld>
             <a:endParaRPr lang="de-CH" dirty="0"/>
           </a:p>
@@ -3488,7 +3503,7 @@
           <a:p>
             <a:fld id="{5B884AD1-A783-44E4-89C8-03B3CA1C81C1}" type="datetime1">
               <a:rPr lang="de-DE" smtClean="0"/>
-              <a:t>26.05.2025</a:t>
+              <a:t>07.07.2025</a:t>
             </a:fld>
             <a:endParaRPr lang="de-CH" dirty="0"/>
           </a:p>
@@ -3555,7 +3570,7 @@
             <a:fld id="{442AD375-037F-43D0-B059-5172DA06796A}" type="slidenum">
               <a:rPr lang="de-CH" smtClean="0"/>
               <a:pPr/>
-              <a:t>‹#›</a:t>
+              <a:t>‹Nr.›</a:t>
             </a:fld>
             <a:endParaRPr lang="de-CH" dirty="0"/>
           </a:p>
@@ -3727,7 +3742,7 @@
           <a:p>
             <a:fld id="{2E8A167D-93E7-43CF-ADB7-181D413D4773}" type="datetime1">
               <a:rPr lang="de-DE" smtClean="0"/>
-              <a:t>26.05.2025</a:t>
+              <a:t>07.07.2025</a:t>
             </a:fld>
             <a:endParaRPr lang="de-CH" dirty="0"/>
           </a:p>
@@ -3794,7 +3809,7 @@
             <a:fld id="{442AD375-037F-43D0-B059-5172DA06796A}" type="slidenum">
               <a:rPr lang="de-CH" smtClean="0"/>
               <a:pPr/>
-              <a:t>‹#›</a:t>
+              <a:t>‹Nr.›</a:t>
             </a:fld>
             <a:endParaRPr lang="de-CH" dirty="0"/>
           </a:p>
@@ -4006,7 +4021,7 @@
           <a:p>
             <a:fld id="{698FC4C5-3ADA-44FA-AF24-1DAFEB8AF652}" type="datetime1">
               <a:rPr lang="de-DE" smtClean="0"/>
-              <a:t>26.05.2025</a:t>
+              <a:t>07.07.2025</a:t>
             </a:fld>
             <a:endParaRPr lang="de-CH" dirty="0"/>
           </a:p>
@@ -4085,7 +4100,7 @@
             <a:fld id="{442AD375-037F-43D0-B059-5172DA06796A}" type="slidenum">
               <a:rPr lang="de-CH" smtClean="0"/>
               <a:pPr/>
-              <a:t>‹#›</a:t>
+              <a:t>‹Nr.›</a:t>
             </a:fld>
             <a:endParaRPr lang="de-CH" dirty="0"/>
           </a:p>
@@ -4577,7 +4592,7 @@
           <a:p>
             <a:fld id="{DE4FA439-CAC9-4573-B1B3-2D68157B76DD}" type="datetime3">
               <a:rPr lang="en-US" smtClean="0"/>
-              <a:t>26 May 2025</a:t>
+              <a:t>7 July 2025</a:t>
             </a:fld>
             <a:endParaRPr lang="de-CH"/>
           </a:p>
@@ -4844,14 +4859,6005 @@
   <p:clrMapOvr>
     <a:masterClrMapping/>
   </p:clrMapOvr>
-  <mc:AlternateContent xmlns:mc="http://schemas.openxmlformats.org/markup-compatibility/2006">
-    <mc:Choice xmlns:p14="http://schemas.microsoft.com/office/powerpoint/2010/main" Requires="p14">
+  <mc:AlternateContent xmlns:mc="http://schemas.openxmlformats.org/markup-compatibility/2006" xmlns:p14="http://schemas.microsoft.com/office/powerpoint/2010/main">
+    <mc:Choice Requires="p14">
       <p:transition spd="slow" p14:dur="2000" advClick="0" advTm="10000"/>
     </mc:Choice>
-    <mc:Fallback>
+    <mc:Fallback xmlns="">
       <p:transition spd="slow" advClick="0" advTm="10000"/>
     </mc:Fallback>
   </mc:AlternateContent>
+</p:sld>
+</file>
+
+<file path=ppt/slides/slide10.xml><?xml version="1.0" encoding="utf-8"?>
+<p:sld xmlns:a="http://schemas.openxmlformats.org/drawingml/2006/main" xmlns:r="http://schemas.openxmlformats.org/officeDocument/2006/relationships" xmlns:p="http://schemas.openxmlformats.org/presentationml/2006/main">
+  <p:cSld>
+    <p:spTree>
+      <p:nvGrpSpPr>
+        <p:cNvPr id="1" name="">
+          <a:extLst>
+            <a:ext uri="{FF2B5EF4-FFF2-40B4-BE49-F238E27FC236}">
+              <a16:creationId xmlns:a16="http://schemas.microsoft.com/office/drawing/2014/main" id="{D660B466-77E3-4FF4-A2CC-5CF0B67AB13A}"/>
+            </a:ext>
+          </a:extLst>
+        </p:cNvPr>
+        <p:cNvGrpSpPr/>
+        <p:nvPr/>
+      </p:nvGrpSpPr>
+      <p:grpSpPr>
+        <a:xfrm>
+          <a:off x="0" y="0"/>
+          <a:ext cx="0" cy="0"/>
+          <a:chOff x="0" y="0"/>
+          <a:chExt cx="0" cy="0"/>
+        </a:xfrm>
+      </p:grpSpPr>
+      <p:sp>
+        <p:nvSpPr>
+          <p:cNvPr id="2" name="Titel 1">
+            <a:extLst>
+              <a:ext uri="{FF2B5EF4-FFF2-40B4-BE49-F238E27FC236}">
+                <a16:creationId xmlns:a16="http://schemas.microsoft.com/office/drawing/2014/main" id="{04533FCC-ECB3-128F-97F7-8DA4EE1169AA}"/>
+              </a:ext>
+            </a:extLst>
+          </p:cNvPr>
+          <p:cNvSpPr>
+            <a:spLocks noGrp="1"/>
+          </p:cNvSpPr>
+          <p:nvPr>
+            <p:ph type="title"/>
+          </p:nvPr>
+        </p:nvSpPr>
+        <p:spPr/>
+        <p:txBody>
+          <a:bodyPr/>
+          <a:lstStyle/>
+          <a:p>
+            <a:r>
+              <a:rPr lang="en-GB" dirty="0"/>
+              <a:t>Kalman Filter: Convergence</a:t>
+            </a:r>
+            <a:endParaRPr lang="en-US" dirty="0"/>
+          </a:p>
+        </p:txBody>
+      </p:sp>
+      <p:sp>
+        <p:nvSpPr>
+          <p:cNvPr id="3" name="Inhaltsplatzhalter 2">
+            <a:extLst>
+              <a:ext uri="{FF2B5EF4-FFF2-40B4-BE49-F238E27FC236}">
+                <a16:creationId xmlns:a16="http://schemas.microsoft.com/office/drawing/2014/main" id="{AFA8A5AE-871F-FE0D-99B5-3ED66C2A6549}"/>
+              </a:ext>
+            </a:extLst>
+          </p:cNvPr>
+          <p:cNvSpPr>
+            <a:spLocks noGrp="1"/>
+          </p:cNvSpPr>
+          <p:nvPr>
+            <p:ph idx="1"/>
+          </p:nvPr>
+        </p:nvSpPr>
+        <p:spPr/>
+        <p:txBody>
+          <a:bodyPr/>
+          <a:lstStyle/>
+          <a:p>
+            <a:pPr marL="268287" lvl="2" indent="0">
+              <a:buNone/>
+            </a:pPr>
+            <a:r>
+              <a:rPr lang="en-US" dirty="0"/>
+              <a:t>How do you adjust your filter to the use case and improve convergence?</a:t>
+            </a:r>
+          </a:p>
+          <a:p>
+            <a:pPr lvl="3">
+              <a:buFont typeface="Symbol" panose="05050102010706020507" pitchFamily="18" charset="2"/>
+              <a:buChar char="-"/>
+            </a:pPr>
+            <a:r>
+              <a:rPr lang="en-US" dirty="0"/>
+              <a:t>Adjust key parameters strategically</a:t>
+            </a:r>
+          </a:p>
+          <a:p>
+            <a:pPr lvl="3">
+              <a:buFont typeface="Symbol" panose="05050102010706020507" pitchFamily="18" charset="2"/>
+              <a:buChar char="-"/>
+            </a:pPr>
+            <a:endParaRPr lang="en-US" dirty="0"/>
+          </a:p>
+          <a:p>
+            <a:pPr marL="540125" lvl="3" indent="0">
+              <a:buNone/>
+            </a:pPr>
+            <a:r>
+              <a:rPr lang="en-US" dirty="0"/>
+              <a:t>	1. Start with high Error Covariance(P₀) to let the filter adapt fast</a:t>
+            </a:r>
+          </a:p>
+          <a:p>
+            <a:pPr marL="540125" lvl="3" indent="0">
+              <a:buNone/>
+            </a:pPr>
+            <a:r>
+              <a:rPr lang="en-US" dirty="0"/>
+              <a:t>	2. Set </a:t>
+            </a:r>
+            <a:r>
+              <a:rPr lang="de-CH" dirty="0"/>
+              <a:t>Measurement Noise </a:t>
+            </a:r>
+            <a:r>
+              <a:rPr lang="de-CH" dirty="0" err="1"/>
+              <a:t>Covariance</a:t>
+            </a:r>
+            <a:r>
+              <a:rPr lang="de-CH" dirty="0"/>
+              <a:t> (</a:t>
+            </a:r>
+            <a:r>
+              <a:rPr lang="en-US" dirty="0"/>
+              <a:t>R) according to sensor specs</a:t>
+            </a:r>
+          </a:p>
+          <a:p>
+            <a:pPr marL="540125" lvl="3" indent="0">
+              <a:buNone/>
+            </a:pPr>
+            <a:r>
+              <a:rPr lang="en-US" dirty="0"/>
+              <a:t>	3. Start with small Process Noise </a:t>
+            </a:r>
+            <a:r>
+              <a:rPr lang="en-US" dirty="0" err="1"/>
+              <a:t>Covarince</a:t>
+            </a:r>
+            <a:r>
+              <a:rPr lang="en-US" dirty="0"/>
+              <a:t> (Q), increase until responsive but stable</a:t>
+            </a:r>
+          </a:p>
+          <a:p>
+            <a:pPr marL="540125" lvl="3" indent="0">
+              <a:buNone/>
+            </a:pPr>
+            <a:r>
+              <a:rPr lang="en-US" dirty="0"/>
+              <a:t>	4. Analyze convergence by observing how fast estimates stabilize</a:t>
+            </a:r>
+          </a:p>
+        </p:txBody>
+      </p:sp>
+      <p:sp>
+        <p:nvSpPr>
+          <p:cNvPr id="4" name="Datumsplatzhalter 3">
+            <a:extLst>
+              <a:ext uri="{FF2B5EF4-FFF2-40B4-BE49-F238E27FC236}">
+                <a16:creationId xmlns:a16="http://schemas.microsoft.com/office/drawing/2014/main" id="{9D73621F-5AB2-A332-107D-927699B7C0DD}"/>
+              </a:ext>
+            </a:extLst>
+          </p:cNvPr>
+          <p:cNvSpPr>
+            <a:spLocks noGrp="1"/>
+          </p:cNvSpPr>
+          <p:nvPr>
+            <p:ph type="dt" sz="half" idx="10"/>
+          </p:nvPr>
+        </p:nvSpPr>
+        <p:spPr/>
+        <p:txBody>
+          <a:bodyPr/>
+          <a:lstStyle/>
+          <a:p>
+            <a:fld id="{B2DD1E4E-1107-499B-BB00-8AA0260A0EFB}" type="datetime1">
+              <a:rPr lang="de-DE" smtClean="0"/>
+              <a:t>07.07.2025</a:t>
+            </a:fld>
+            <a:endParaRPr lang="de-CH" dirty="0"/>
+          </a:p>
+        </p:txBody>
+      </p:sp>
+      <p:sp>
+        <p:nvSpPr>
+          <p:cNvPr id="5" name="Fußzeilenplatzhalter 4">
+            <a:extLst>
+              <a:ext uri="{FF2B5EF4-FFF2-40B4-BE49-F238E27FC236}">
+                <a16:creationId xmlns:a16="http://schemas.microsoft.com/office/drawing/2014/main" id="{4DB3EF63-BB88-5D47-0168-717E913B2112}"/>
+              </a:ext>
+            </a:extLst>
+          </p:cNvPr>
+          <p:cNvSpPr>
+            <a:spLocks noGrp="1"/>
+          </p:cNvSpPr>
+          <p:nvPr>
+            <p:ph type="ftr" sz="quarter" idx="11"/>
+          </p:nvPr>
+        </p:nvSpPr>
+        <p:spPr/>
+        <p:txBody>
+          <a:bodyPr/>
+          <a:lstStyle/>
+          <a:p>
+            <a:r>
+              <a:rPr lang="en-US"/>
+              <a:t>Institute For Sensor and Electronics</a:t>
+            </a:r>
+            <a:endParaRPr lang="de-CH" dirty="0"/>
+          </a:p>
+        </p:txBody>
+      </p:sp>
+      <p:sp>
+        <p:nvSpPr>
+          <p:cNvPr id="6" name="Foliennummernplatzhalter 5">
+            <a:extLst>
+              <a:ext uri="{FF2B5EF4-FFF2-40B4-BE49-F238E27FC236}">
+                <a16:creationId xmlns:a16="http://schemas.microsoft.com/office/drawing/2014/main" id="{9646A41D-135B-9537-BC0F-21E20A315417}"/>
+              </a:ext>
+            </a:extLst>
+          </p:cNvPr>
+          <p:cNvSpPr>
+            <a:spLocks noGrp="1"/>
+          </p:cNvSpPr>
+          <p:nvPr>
+            <p:ph type="sldNum" sz="quarter" idx="12"/>
+          </p:nvPr>
+        </p:nvSpPr>
+        <p:spPr/>
+        <p:txBody>
+          <a:bodyPr/>
+          <a:lstStyle/>
+          <a:p>
+            <a:fld id="{442AD375-037F-43D0-B059-5172DA06796A}" type="slidenum">
+              <a:rPr lang="de-CH" smtClean="0"/>
+              <a:pPr/>
+              <a:t>10</a:t>
+            </a:fld>
+            <a:endParaRPr lang="de-CH" dirty="0"/>
+          </a:p>
+        </p:txBody>
+      </p:sp>
+    </p:spTree>
+    <p:extLst>
+      <p:ext uri="{BB962C8B-B14F-4D97-AF65-F5344CB8AC3E}">
+        <p14:creationId xmlns:p14="http://schemas.microsoft.com/office/powerpoint/2010/main" val="3352708429"/>
+      </p:ext>
+    </p:extLst>
+  </p:cSld>
+  <p:clrMapOvr>
+    <a:masterClrMapping/>
+  </p:clrMapOvr>
+</p:sld>
+</file>
+
+<file path=ppt/slides/slide11.xml><?xml version="1.0" encoding="utf-8"?>
+<p:sld xmlns:a="http://schemas.openxmlformats.org/drawingml/2006/main" xmlns:r="http://schemas.openxmlformats.org/officeDocument/2006/relationships" xmlns:p="http://schemas.openxmlformats.org/presentationml/2006/main">
+  <p:cSld>
+    <p:spTree>
+      <p:nvGrpSpPr>
+        <p:cNvPr id="1" name="">
+          <a:extLst>
+            <a:ext uri="{FF2B5EF4-FFF2-40B4-BE49-F238E27FC236}">
+              <a16:creationId xmlns:a16="http://schemas.microsoft.com/office/drawing/2014/main" id="{43D1D863-CB19-152D-3D9B-96C1524D78E0}"/>
+            </a:ext>
+          </a:extLst>
+        </p:cNvPr>
+        <p:cNvGrpSpPr/>
+        <p:nvPr/>
+      </p:nvGrpSpPr>
+      <p:grpSpPr>
+        <a:xfrm>
+          <a:off x="0" y="0"/>
+          <a:ext cx="0" cy="0"/>
+          <a:chOff x="0" y="0"/>
+          <a:chExt cx="0" cy="0"/>
+        </a:xfrm>
+      </p:grpSpPr>
+      <p:sp>
+        <p:nvSpPr>
+          <p:cNvPr id="7" name="Title 6">
+            <a:extLst>
+              <a:ext uri="{FF2B5EF4-FFF2-40B4-BE49-F238E27FC236}">
+                <a16:creationId xmlns:a16="http://schemas.microsoft.com/office/drawing/2014/main" id="{C15C7CE6-2846-4183-76DD-14B814A589C2}"/>
+              </a:ext>
+            </a:extLst>
+          </p:cNvPr>
+          <p:cNvSpPr>
+            <a:spLocks noGrp="1"/>
+          </p:cNvSpPr>
+          <p:nvPr>
+            <p:ph type="title"/>
+          </p:nvPr>
+        </p:nvSpPr>
+        <p:spPr/>
+        <p:txBody>
+          <a:bodyPr/>
+          <a:lstStyle/>
+          <a:p>
+            <a:r>
+              <a:rPr lang="en-GB" dirty="0"/>
+              <a:t>Practical Application</a:t>
+            </a:r>
+          </a:p>
+        </p:txBody>
+      </p:sp>
+      <p:sp>
+        <p:nvSpPr>
+          <p:cNvPr id="4" name="Date Placeholder 3">
+            <a:extLst>
+              <a:ext uri="{FF2B5EF4-FFF2-40B4-BE49-F238E27FC236}">
+                <a16:creationId xmlns:a16="http://schemas.microsoft.com/office/drawing/2014/main" id="{FAF31B73-F393-DEA6-CE94-B9FA8FC4BC00}"/>
+              </a:ext>
+            </a:extLst>
+          </p:cNvPr>
+          <p:cNvSpPr>
+            <a:spLocks noGrp="1"/>
+          </p:cNvSpPr>
+          <p:nvPr>
+            <p:ph type="dt" sz="half" idx="10"/>
+          </p:nvPr>
+        </p:nvSpPr>
+        <p:spPr/>
+        <p:txBody>
+          <a:bodyPr/>
+          <a:lstStyle/>
+          <a:p>
+            <a:fld id="{3CAC52EE-1A92-4CB4-BCAA-EDE3CF50CF3F}" type="datetime1">
+              <a:rPr lang="de-DE" smtClean="0"/>
+              <a:t>07.07.2025</a:t>
+            </a:fld>
+            <a:endParaRPr lang="de-CH" dirty="0"/>
+          </a:p>
+        </p:txBody>
+      </p:sp>
+      <p:sp>
+        <p:nvSpPr>
+          <p:cNvPr id="5" name="Footer Placeholder 4">
+            <a:extLst>
+              <a:ext uri="{FF2B5EF4-FFF2-40B4-BE49-F238E27FC236}">
+                <a16:creationId xmlns:a16="http://schemas.microsoft.com/office/drawing/2014/main" id="{7EB3638B-148C-7BE4-EF86-7CE35839F20E}"/>
+              </a:ext>
+            </a:extLst>
+          </p:cNvPr>
+          <p:cNvSpPr>
+            <a:spLocks noGrp="1"/>
+          </p:cNvSpPr>
+          <p:nvPr>
+            <p:ph type="ftr" sz="quarter" idx="11"/>
+          </p:nvPr>
+        </p:nvSpPr>
+        <p:spPr/>
+        <p:txBody>
+          <a:bodyPr/>
+          <a:lstStyle/>
+          <a:p>
+            <a:r>
+              <a:rPr lang="en-US"/>
+              <a:t>Institute For Sensor and Electronics</a:t>
+            </a:r>
+            <a:endParaRPr lang="de-CH" dirty="0"/>
+          </a:p>
+        </p:txBody>
+      </p:sp>
+      <p:sp>
+        <p:nvSpPr>
+          <p:cNvPr id="6" name="Slide Number Placeholder 5">
+            <a:extLst>
+              <a:ext uri="{FF2B5EF4-FFF2-40B4-BE49-F238E27FC236}">
+                <a16:creationId xmlns:a16="http://schemas.microsoft.com/office/drawing/2014/main" id="{02EE9652-FE3E-6095-DA26-6CF2205A94FD}"/>
+              </a:ext>
+            </a:extLst>
+          </p:cNvPr>
+          <p:cNvSpPr>
+            <a:spLocks noGrp="1"/>
+          </p:cNvSpPr>
+          <p:nvPr>
+            <p:ph type="sldNum" sz="quarter" idx="12"/>
+          </p:nvPr>
+        </p:nvSpPr>
+        <p:spPr/>
+        <p:txBody>
+          <a:bodyPr/>
+          <a:lstStyle/>
+          <a:p>
+            <a:fld id="{442AD375-037F-43D0-B059-5172DA06796A}" type="slidenum">
+              <a:rPr lang="de-CH" smtClean="0"/>
+              <a:pPr/>
+              <a:t>11</a:t>
+            </a:fld>
+            <a:endParaRPr lang="de-CH" dirty="0"/>
+          </a:p>
+        </p:txBody>
+      </p:sp>
+    </p:spTree>
+    <p:extLst>
+      <p:ext uri="{BB962C8B-B14F-4D97-AF65-F5344CB8AC3E}">
+        <p14:creationId xmlns:p14="http://schemas.microsoft.com/office/powerpoint/2010/main" val="536308909"/>
+      </p:ext>
+    </p:extLst>
+  </p:cSld>
+  <p:clrMapOvr>
+    <a:masterClrMapping/>
+  </p:clrMapOvr>
+</p:sld>
+</file>
+
+<file path=ppt/slides/slide12.xml><?xml version="1.0" encoding="utf-8"?>
+<p:sld xmlns:a="http://schemas.openxmlformats.org/drawingml/2006/main" xmlns:r="http://schemas.openxmlformats.org/officeDocument/2006/relationships" xmlns:p="http://schemas.openxmlformats.org/presentationml/2006/main">
+  <p:cSld>
+    <p:spTree>
+      <p:nvGrpSpPr>
+        <p:cNvPr id="1" name="">
+          <a:extLst>
+            <a:ext uri="{FF2B5EF4-FFF2-40B4-BE49-F238E27FC236}">
+              <a16:creationId xmlns:a16="http://schemas.microsoft.com/office/drawing/2014/main" id="{B6A067FB-471E-5C5F-DA45-27260C2AB836}"/>
+            </a:ext>
+          </a:extLst>
+        </p:cNvPr>
+        <p:cNvGrpSpPr/>
+        <p:nvPr/>
+      </p:nvGrpSpPr>
+      <p:grpSpPr>
+        <a:xfrm>
+          <a:off x="0" y="0"/>
+          <a:ext cx="0" cy="0"/>
+          <a:chOff x="0" y="0"/>
+          <a:chExt cx="0" cy="0"/>
+        </a:xfrm>
+      </p:grpSpPr>
+      <p:sp>
+        <p:nvSpPr>
+          <p:cNvPr id="2" name="Titel 1">
+            <a:extLst>
+              <a:ext uri="{FF2B5EF4-FFF2-40B4-BE49-F238E27FC236}">
+                <a16:creationId xmlns:a16="http://schemas.microsoft.com/office/drawing/2014/main" id="{691A3001-7A37-FFB6-08A8-4932B91E7686}"/>
+              </a:ext>
+            </a:extLst>
+          </p:cNvPr>
+          <p:cNvSpPr>
+            <a:spLocks noGrp="1"/>
+          </p:cNvSpPr>
+          <p:nvPr>
+            <p:ph type="title"/>
+          </p:nvPr>
+        </p:nvSpPr>
+        <p:spPr>
+          <a:xfrm>
+            <a:off x="408076" y="1170372"/>
+            <a:ext cx="11012400" cy="1477328"/>
+          </a:xfrm>
+        </p:spPr>
+        <p:txBody>
+          <a:bodyPr/>
+          <a:lstStyle/>
+          <a:p>
+            <a:r>
+              <a:rPr lang="en-US" dirty="0"/>
+              <a:t>The tracking of a moving car</a:t>
+            </a:r>
+            <a:br>
+              <a:rPr lang="en-US" dirty="0"/>
+            </a:br>
+            <a:br>
+              <a:rPr lang="en-GB" i="1" dirty="0">
+                <a:solidFill>
+                  <a:schemeClr val="bg1">
+                    <a:lumMod val="50000"/>
+                  </a:schemeClr>
+                </a:solidFill>
+              </a:rPr>
+            </a:br>
+            <a:endParaRPr lang="en-US" dirty="0"/>
+          </a:p>
+        </p:txBody>
+      </p:sp>
+      <p:sp>
+        <p:nvSpPr>
+          <p:cNvPr id="4" name="Datumsplatzhalter 3">
+            <a:extLst>
+              <a:ext uri="{FF2B5EF4-FFF2-40B4-BE49-F238E27FC236}">
+                <a16:creationId xmlns:a16="http://schemas.microsoft.com/office/drawing/2014/main" id="{BC35E22B-9BA6-1B05-AEF4-9FB72D6CE727}"/>
+              </a:ext>
+            </a:extLst>
+          </p:cNvPr>
+          <p:cNvSpPr>
+            <a:spLocks noGrp="1"/>
+          </p:cNvSpPr>
+          <p:nvPr>
+            <p:ph type="dt" sz="half" idx="10"/>
+          </p:nvPr>
+        </p:nvSpPr>
+        <p:spPr/>
+        <p:txBody>
+          <a:bodyPr/>
+          <a:lstStyle/>
+          <a:p>
+            <a:fld id="{B2DD1E4E-1107-499B-BB00-8AA0260A0EFB}" type="datetime1">
+              <a:rPr lang="de-DE" smtClean="0"/>
+              <a:t>07.07.2025</a:t>
+            </a:fld>
+            <a:endParaRPr lang="de-CH" dirty="0"/>
+          </a:p>
+        </p:txBody>
+      </p:sp>
+      <p:sp>
+        <p:nvSpPr>
+          <p:cNvPr id="5" name="Fußzeilenplatzhalter 4">
+            <a:extLst>
+              <a:ext uri="{FF2B5EF4-FFF2-40B4-BE49-F238E27FC236}">
+                <a16:creationId xmlns:a16="http://schemas.microsoft.com/office/drawing/2014/main" id="{E2950976-4830-F01D-180E-830E7ED4F1EC}"/>
+              </a:ext>
+            </a:extLst>
+          </p:cNvPr>
+          <p:cNvSpPr>
+            <a:spLocks noGrp="1"/>
+          </p:cNvSpPr>
+          <p:nvPr>
+            <p:ph type="ftr" sz="quarter" idx="11"/>
+          </p:nvPr>
+        </p:nvSpPr>
+        <p:spPr/>
+        <p:txBody>
+          <a:bodyPr/>
+          <a:lstStyle/>
+          <a:p>
+            <a:r>
+              <a:rPr lang="en-US"/>
+              <a:t>Institute For Sensor and Electronics</a:t>
+            </a:r>
+            <a:endParaRPr lang="de-CH" dirty="0"/>
+          </a:p>
+        </p:txBody>
+      </p:sp>
+      <p:sp>
+        <p:nvSpPr>
+          <p:cNvPr id="6" name="Foliennummernplatzhalter 5">
+            <a:extLst>
+              <a:ext uri="{FF2B5EF4-FFF2-40B4-BE49-F238E27FC236}">
+                <a16:creationId xmlns:a16="http://schemas.microsoft.com/office/drawing/2014/main" id="{94589C2F-A998-8719-E529-4C816C7EDDC4}"/>
+              </a:ext>
+            </a:extLst>
+          </p:cNvPr>
+          <p:cNvSpPr>
+            <a:spLocks noGrp="1"/>
+          </p:cNvSpPr>
+          <p:nvPr>
+            <p:ph type="sldNum" sz="quarter" idx="12"/>
+          </p:nvPr>
+        </p:nvSpPr>
+        <p:spPr/>
+        <p:txBody>
+          <a:bodyPr/>
+          <a:lstStyle/>
+          <a:p>
+            <a:fld id="{442AD375-037F-43D0-B059-5172DA06796A}" type="slidenum">
+              <a:rPr lang="de-CH" smtClean="0"/>
+              <a:pPr/>
+              <a:t>12</a:t>
+            </a:fld>
+            <a:endParaRPr lang="de-CH" dirty="0"/>
+          </a:p>
+        </p:txBody>
+      </p:sp>
+      <p:sp>
+        <p:nvSpPr>
+          <p:cNvPr id="8" name="Inhaltsplatzhalter 7">
+            <a:extLst>
+              <a:ext uri="{FF2B5EF4-FFF2-40B4-BE49-F238E27FC236}">
+                <a16:creationId xmlns:a16="http://schemas.microsoft.com/office/drawing/2014/main" id="{09A94A04-B7EF-88C3-C9F5-61B67B52C40F}"/>
+              </a:ext>
+            </a:extLst>
+          </p:cNvPr>
+          <p:cNvSpPr>
+            <a:spLocks noGrp="1"/>
+          </p:cNvSpPr>
+          <p:nvPr>
+            <p:ph idx="1"/>
+          </p:nvPr>
+        </p:nvSpPr>
+        <p:spPr/>
+        <p:txBody>
+          <a:bodyPr/>
+          <a:lstStyle/>
+          <a:p>
+            <a:pPr>
+              <a:buFontTx/>
+              <a:buChar char="-"/>
+            </a:pPr>
+            <a:r>
+              <a:rPr lang="en-US" dirty="0"/>
+              <a:t>The tracking of a moving car by GPS sensor was simulated and filtered with a Kalman filter</a:t>
+            </a:r>
+          </a:p>
+          <a:p>
+            <a:pPr marL="0" indent="0">
+              <a:buNone/>
+            </a:pPr>
+            <a:endParaRPr lang="en-US" dirty="0"/>
+          </a:p>
+          <a:p>
+            <a:pPr marL="0" indent="0">
+              <a:buNone/>
+            </a:pPr>
+            <a:endParaRPr lang="en-US" dirty="0"/>
+          </a:p>
+          <a:p>
+            <a:pPr marL="0" indent="0">
+              <a:buNone/>
+            </a:pPr>
+            <a:endParaRPr lang="en-US" dirty="0"/>
+          </a:p>
+          <a:p>
+            <a:pPr marL="0" indent="0">
+              <a:buNone/>
+            </a:pPr>
+            <a:r>
+              <a:rPr lang="en-US" sz="6000" dirty="0"/>
+              <a:t>Code showcase</a:t>
+            </a:r>
+          </a:p>
+        </p:txBody>
+      </p:sp>
+    </p:spTree>
+    <p:extLst>
+      <p:ext uri="{BB962C8B-B14F-4D97-AF65-F5344CB8AC3E}">
+        <p14:creationId xmlns:p14="http://schemas.microsoft.com/office/powerpoint/2010/main" val="2518527075"/>
+      </p:ext>
+    </p:extLst>
+  </p:cSld>
+  <p:clrMapOvr>
+    <a:masterClrMapping/>
+  </p:clrMapOvr>
+</p:sld>
+</file>
+
+<file path=ppt/slides/slide13.xml><?xml version="1.0" encoding="utf-8"?>
+<p:sld xmlns:a="http://schemas.openxmlformats.org/drawingml/2006/main" xmlns:r="http://schemas.openxmlformats.org/officeDocument/2006/relationships" xmlns:p="http://schemas.openxmlformats.org/presentationml/2006/main">
+  <p:cSld>
+    <p:spTree>
+      <p:nvGrpSpPr>
+        <p:cNvPr id="1" name=""/>
+        <p:cNvGrpSpPr/>
+        <p:nvPr/>
+      </p:nvGrpSpPr>
+      <p:grpSpPr>
+        <a:xfrm>
+          <a:off x="0" y="0"/>
+          <a:ext cx="0" cy="0"/>
+          <a:chOff x="0" y="0"/>
+          <a:chExt cx="0" cy="0"/>
+        </a:xfrm>
+      </p:grpSpPr>
+      <p:sp>
+        <p:nvSpPr>
+          <p:cNvPr id="2" name="Titel 1">
+            <a:extLst>
+              <a:ext uri="{FF2B5EF4-FFF2-40B4-BE49-F238E27FC236}">
+                <a16:creationId xmlns:a16="http://schemas.microsoft.com/office/drawing/2014/main" id="{09EAFAB4-43BF-5CFD-A8CD-1EEFFDBB5510}"/>
+              </a:ext>
+            </a:extLst>
+          </p:cNvPr>
+          <p:cNvSpPr>
+            <a:spLocks noGrp="1"/>
+          </p:cNvSpPr>
+          <p:nvPr>
+            <p:ph type="title"/>
+          </p:nvPr>
+        </p:nvSpPr>
+        <p:spPr>
+          <a:xfrm>
+            <a:off x="408076" y="1170372"/>
+            <a:ext cx="11012400" cy="1477328"/>
+          </a:xfrm>
+        </p:spPr>
+        <p:txBody>
+          <a:bodyPr/>
+          <a:lstStyle/>
+          <a:p>
+            <a:r>
+              <a:rPr lang="en-GB" dirty="0"/>
+              <a:t>The effects of convergence parameters</a:t>
+            </a:r>
+            <a:br>
+              <a:rPr lang="en-GB" dirty="0"/>
+            </a:br>
+            <a:r>
+              <a:rPr lang="en-GB" dirty="0"/>
+              <a:t>Balanced: Q=1e-4 R=0.01</a:t>
+            </a:r>
+            <a:br>
+              <a:rPr lang="en-GB" i="1" dirty="0">
+                <a:solidFill>
+                  <a:schemeClr val="bg1">
+                    <a:lumMod val="50000"/>
+                  </a:schemeClr>
+                </a:solidFill>
+              </a:rPr>
+            </a:br>
+            <a:endParaRPr lang="en-US" dirty="0"/>
+          </a:p>
+        </p:txBody>
+      </p:sp>
+      <p:sp>
+        <p:nvSpPr>
+          <p:cNvPr id="4" name="Datumsplatzhalter 3">
+            <a:extLst>
+              <a:ext uri="{FF2B5EF4-FFF2-40B4-BE49-F238E27FC236}">
+                <a16:creationId xmlns:a16="http://schemas.microsoft.com/office/drawing/2014/main" id="{FF8D6817-A817-E40D-BFBC-3AE470FD1850}"/>
+              </a:ext>
+            </a:extLst>
+          </p:cNvPr>
+          <p:cNvSpPr>
+            <a:spLocks noGrp="1"/>
+          </p:cNvSpPr>
+          <p:nvPr>
+            <p:ph type="dt" sz="half" idx="10"/>
+          </p:nvPr>
+        </p:nvSpPr>
+        <p:spPr/>
+        <p:txBody>
+          <a:bodyPr/>
+          <a:lstStyle/>
+          <a:p>
+            <a:fld id="{B2DD1E4E-1107-499B-BB00-8AA0260A0EFB}" type="datetime1">
+              <a:rPr lang="de-DE" smtClean="0"/>
+              <a:t>07.07.2025</a:t>
+            </a:fld>
+            <a:endParaRPr lang="de-CH" dirty="0"/>
+          </a:p>
+        </p:txBody>
+      </p:sp>
+      <p:sp>
+        <p:nvSpPr>
+          <p:cNvPr id="5" name="Fußzeilenplatzhalter 4">
+            <a:extLst>
+              <a:ext uri="{FF2B5EF4-FFF2-40B4-BE49-F238E27FC236}">
+                <a16:creationId xmlns:a16="http://schemas.microsoft.com/office/drawing/2014/main" id="{9CE6D928-AA25-E6A1-BFD7-2A87DCA542A3}"/>
+              </a:ext>
+            </a:extLst>
+          </p:cNvPr>
+          <p:cNvSpPr>
+            <a:spLocks noGrp="1"/>
+          </p:cNvSpPr>
+          <p:nvPr>
+            <p:ph type="ftr" sz="quarter" idx="11"/>
+          </p:nvPr>
+        </p:nvSpPr>
+        <p:spPr/>
+        <p:txBody>
+          <a:bodyPr/>
+          <a:lstStyle/>
+          <a:p>
+            <a:r>
+              <a:rPr lang="en-US"/>
+              <a:t>Institute For Sensor and Electronics</a:t>
+            </a:r>
+            <a:endParaRPr lang="de-CH" dirty="0"/>
+          </a:p>
+        </p:txBody>
+      </p:sp>
+      <p:sp>
+        <p:nvSpPr>
+          <p:cNvPr id="6" name="Foliennummernplatzhalter 5">
+            <a:extLst>
+              <a:ext uri="{FF2B5EF4-FFF2-40B4-BE49-F238E27FC236}">
+                <a16:creationId xmlns:a16="http://schemas.microsoft.com/office/drawing/2014/main" id="{5357C1D9-B6AF-9A64-18D0-AE2C619347D8}"/>
+              </a:ext>
+            </a:extLst>
+          </p:cNvPr>
+          <p:cNvSpPr>
+            <a:spLocks noGrp="1"/>
+          </p:cNvSpPr>
+          <p:nvPr>
+            <p:ph type="sldNum" sz="quarter" idx="12"/>
+          </p:nvPr>
+        </p:nvSpPr>
+        <p:spPr/>
+        <p:txBody>
+          <a:bodyPr/>
+          <a:lstStyle/>
+          <a:p>
+            <a:fld id="{442AD375-037F-43D0-B059-5172DA06796A}" type="slidenum">
+              <a:rPr lang="de-CH" smtClean="0"/>
+              <a:pPr/>
+              <a:t>13</a:t>
+            </a:fld>
+            <a:endParaRPr lang="de-CH" dirty="0"/>
+          </a:p>
+        </p:txBody>
+      </p:sp>
+      <p:sp>
+        <p:nvSpPr>
+          <p:cNvPr id="7" name="Rectangle 3">
+            <a:extLst>
+              <a:ext uri="{FF2B5EF4-FFF2-40B4-BE49-F238E27FC236}">
+                <a16:creationId xmlns:a16="http://schemas.microsoft.com/office/drawing/2014/main" id="{3A61AE5C-F56B-2005-3BA1-E493108C9148}"/>
+              </a:ext>
+            </a:extLst>
+          </p:cNvPr>
+          <p:cNvSpPr>
+            <a:spLocks noChangeArrowheads="1"/>
+          </p:cNvSpPr>
+          <p:nvPr/>
+        </p:nvSpPr>
+        <p:spPr bwMode="auto">
+          <a:xfrm>
+            <a:off x="152400" y="152400"/>
+            <a:ext cx="12192000" cy="0"/>
+          </a:xfrm>
+          <a:prstGeom prst="rect">
+            <a:avLst/>
+          </a:prstGeom>
+          <a:noFill/>
+          <a:ln>
+            <a:noFill/>
+          </a:ln>
+          <a:effectLst/>
+          <a:extLst>
+            <a:ext uri="{909E8E84-426E-40DD-AFC4-6F175D3DCCD1}">
+              <a14:hiddenFill xmlns:a14="http://schemas.microsoft.com/office/drawing/2010/main">
+                <a:solidFill>
+                  <a:schemeClr val="accent1"/>
+                </a:solidFill>
+              </a14:hiddenFill>
+            </a:ext>
+            <a:ext uri="{91240B29-F687-4F45-9708-019B960494DF}">
+              <a14:hiddenLine xmlns:a14="http://schemas.microsoft.com/office/drawing/2010/main" w="9525">
+                <a:solidFill>
+                  <a:schemeClr val="tx1"/>
+                </a:solidFill>
+                <a:miter lim="800000"/>
+                <a:headEnd/>
+                <a:tailEnd/>
+              </a14:hiddenLine>
+            </a:ext>
+            <a:ext uri="{AF507438-7753-43E0-B8FC-AC1667EBCBE1}">
+              <a14:hiddenEffects xmlns:a14="http://schemas.microsoft.com/office/drawing/2010/main">
+                <a:effectLst>
+                  <a:outerShdw dist="35921" dir="2700000" algn="ctr" rotWithShape="0">
+                    <a:schemeClr val="bg2"/>
+                  </a:outerShdw>
+                </a:effectLst>
+              </a14:hiddenEffects>
+            </a:ext>
+          </a:extLst>
+        </p:spPr>
+        <p:txBody>
+          <a:bodyPr vert="horz" wrap="none" lIns="0" tIns="0" rIns="0" bIns="0" numCol="1" anchor="ctr" anchorCtr="0" compatLnSpc="1">
+            <a:prstTxWarp prst="textNoShape">
+              <a:avLst/>
+            </a:prstTxWarp>
+            <a:spAutoFit/>
+          </a:bodyPr>
+          <a:lstStyle>
+            <a:lvl1pPr eaLnBrk="0" fontAlgn="base" hangingPunct="0">
+              <a:spcBef>
+                <a:spcPct val="0"/>
+              </a:spcBef>
+              <a:spcAft>
+                <a:spcPct val="0"/>
+              </a:spcAft>
+              <a:defRPr>
+                <a:solidFill>
+                  <a:schemeClr val="tx1"/>
+                </a:solidFill>
+                <a:latin typeface="Arial" panose="020B0604020202020204" pitchFamily="34" charset="0"/>
+              </a:defRPr>
+            </a:lvl1pPr>
+            <a:lvl2pPr eaLnBrk="0" fontAlgn="base" hangingPunct="0">
+              <a:spcBef>
+                <a:spcPct val="0"/>
+              </a:spcBef>
+              <a:spcAft>
+                <a:spcPct val="0"/>
+              </a:spcAft>
+              <a:defRPr>
+                <a:solidFill>
+                  <a:schemeClr val="tx1"/>
+                </a:solidFill>
+                <a:latin typeface="Arial" panose="020B0604020202020204" pitchFamily="34" charset="0"/>
+              </a:defRPr>
+            </a:lvl2pPr>
+            <a:lvl3pPr eaLnBrk="0" fontAlgn="base" hangingPunct="0">
+              <a:spcBef>
+                <a:spcPct val="0"/>
+              </a:spcBef>
+              <a:spcAft>
+                <a:spcPct val="0"/>
+              </a:spcAft>
+              <a:defRPr>
+                <a:solidFill>
+                  <a:schemeClr val="tx1"/>
+                </a:solidFill>
+                <a:latin typeface="Arial" panose="020B0604020202020204" pitchFamily="34" charset="0"/>
+              </a:defRPr>
+            </a:lvl3pPr>
+            <a:lvl4pPr eaLnBrk="0" fontAlgn="base" hangingPunct="0">
+              <a:spcBef>
+                <a:spcPct val="0"/>
+              </a:spcBef>
+              <a:spcAft>
+                <a:spcPct val="0"/>
+              </a:spcAft>
+              <a:defRPr>
+                <a:solidFill>
+                  <a:schemeClr val="tx1"/>
+                </a:solidFill>
+                <a:latin typeface="Arial" panose="020B0604020202020204" pitchFamily="34" charset="0"/>
+              </a:defRPr>
+            </a:lvl4pPr>
+            <a:lvl5pPr eaLnBrk="0" fontAlgn="base" hangingPunct="0">
+              <a:spcBef>
+                <a:spcPct val="0"/>
+              </a:spcBef>
+              <a:spcAft>
+                <a:spcPct val="0"/>
+              </a:spcAft>
+              <a:defRPr>
+                <a:solidFill>
+                  <a:schemeClr val="tx1"/>
+                </a:solidFill>
+                <a:latin typeface="Arial" panose="020B0604020202020204" pitchFamily="34" charset="0"/>
+              </a:defRPr>
+            </a:lvl5pPr>
+            <a:lvl6pPr eaLnBrk="0" fontAlgn="base" hangingPunct="0">
+              <a:spcBef>
+                <a:spcPct val="0"/>
+              </a:spcBef>
+              <a:spcAft>
+                <a:spcPct val="0"/>
+              </a:spcAft>
+              <a:defRPr>
+                <a:solidFill>
+                  <a:schemeClr val="tx1"/>
+                </a:solidFill>
+                <a:latin typeface="Arial" panose="020B0604020202020204" pitchFamily="34" charset="0"/>
+              </a:defRPr>
+            </a:lvl6pPr>
+            <a:lvl7pPr eaLnBrk="0" fontAlgn="base" hangingPunct="0">
+              <a:spcBef>
+                <a:spcPct val="0"/>
+              </a:spcBef>
+              <a:spcAft>
+                <a:spcPct val="0"/>
+              </a:spcAft>
+              <a:defRPr>
+                <a:solidFill>
+                  <a:schemeClr val="tx1"/>
+                </a:solidFill>
+                <a:latin typeface="Arial" panose="020B0604020202020204" pitchFamily="34" charset="0"/>
+              </a:defRPr>
+            </a:lvl7pPr>
+            <a:lvl8pPr eaLnBrk="0" fontAlgn="base" hangingPunct="0">
+              <a:spcBef>
+                <a:spcPct val="0"/>
+              </a:spcBef>
+              <a:spcAft>
+                <a:spcPct val="0"/>
+              </a:spcAft>
+              <a:defRPr>
+                <a:solidFill>
+                  <a:schemeClr val="tx1"/>
+                </a:solidFill>
+                <a:latin typeface="Arial" panose="020B0604020202020204" pitchFamily="34" charset="0"/>
+              </a:defRPr>
+            </a:lvl8pPr>
+            <a:lvl9pPr eaLnBrk="0" fontAlgn="base" hangingPunct="0">
+              <a:spcBef>
+                <a:spcPct val="0"/>
+              </a:spcBef>
+              <a:spcAft>
+                <a:spcPct val="0"/>
+              </a:spcAft>
+              <a:defRPr>
+                <a:solidFill>
+                  <a:schemeClr val="tx1"/>
+                </a:solidFill>
+                <a:latin typeface="Arial" panose="020B0604020202020204" pitchFamily="34" charset="0"/>
+              </a:defRPr>
+            </a:lvl9pPr>
+          </a:lstStyle>
+          <a:p>
+            <a:pPr marL="0" marR="0" lvl="0" indent="0" algn="l" defTabSz="914400" rtl="0" eaLnBrk="0" fontAlgn="base" latinLnBrk="0" hangingPunct="0">
+              <a:lnSpc>
+                <a:spcPct val="100000"/>
+              </a:lnSpc>
+              <a:spcBef>
+                <a:spcPct val="0"/>
+              </a:spcBef>
+              <a:spcAft>
+                <a:spcPct val="0"/>
+              </a:spcAft>
+              <a:buClrTx/>
+              <a:buSzTx/>
+              <a:buFontTx/>
+              <a:buAutoNum type="arabicPeriod" startAt="2"/>
+              <a:tabLst/>
+            </a:pPr>
+            <a:r>
+              <a:rPr kumimoji="0" lang="de-DE" altLang="de-DE" sz="1200" b="0" i="0" u="none" strike="noStrike" cap="none" normalizeH="0" baseline="0">
+                <a:ln>
+                  <a:noFill/>
+                </a:ln>
+                <a:solidFill>
+                  <a:schemeClr val="tx1"/>
+                </a:solidFill>
+                <a:effectLst/>
+                <a:latin typeface="Arial" panose="020B0604020202020204" pitchFamily="34" charset="0"/>
+                <a:ea typeface="inherit"/>
+              </a:rPr>
+              <a:t>[12:07]</a:t>
+            </a:r>
+          </a:p>
+          <a:p>
+            <a:pPr marL="0" marR="0" lvl="0" indent="0" algn="l" defTabSz="914400" rtl="0" eaLnBrk="0" fontAlgn="base" latinLnBrk="0" hangingPunct="0">
+              <a:lnSpc>
+                <a:spcPct val="100000"/>
+              </a:lnSpc>
+              <a:spcBef>
+                <a:spcPct val="0"/>
+              </a:spcBef>
+              <a:spcAft>
+                <a:spcPct val="0"/>
+              </a:spcAft>
+              <a:buClrTx/>
+              <a:buSzTx/>
+              <a:buFontTx/>
+              <a:buNone/>
+              <a:tabLst/>
+            </a:pPr>
+            <a:r>
+              <a:rPr kumimoji="0" lang="de-DE" altLang="de-DE" sz="1200" b="0" i="0" u="none" strike="noStrike" cap="none" normalizeH="0" baseline="0">
+                <a:ln>
+                  <a:noFill/>
+                </a:ln>
+                <a:solidFill>
+                  <a:schemeClr val="tx1"/>
+                </a:solidFill>
+                <a:effectLst/>
+                <a:latin typeface="Arial" panose="020B0604020202020204" pitchFamily="34" charset="0"/>
+                <a:ea typeface="inherit"/>
+              </a:rPr>
+              <a:t>  </a:t>
+            </a:r>
+            <a:r>
+              <a:rPr kumimoji="0" lang="de-DE" altLang="de-DE" sz="1900" b="0" i="0" u="none" strike="noStrike" cap="none" normalizeH="0" baseline="0">
+                <a:ln>
+                  <a:noFill/>
+                </a:ln>
+                <a:solidFill>
+                  <a:schemeClr val="tx1"/>
+                </a:solidFill>
+                <a:effectLst/>
+                <a:latin typeface="Arial" panose="020B0604020202020204" pitchFamily="34" charset="0"/>
+                <a:ea typeface="inherit"/>
+              </a:rPr>
+              <a:t>     </a:t>
+            </a:r>
+            <a:endParaRPr kumimoji="0" lang="de-DE" altLang="de-DE" sz="1200" b="0" i="0" u="none" strike="noStrike" cap="none" normalizeH="0" baseline="0">
+              <a:ln>
+                <a:noFill/>
+              </a:ln>
+              <a:solidFill>
+                <a:schemeClr val="tx1"/>
+              </a:solidFill>
+              <a:effectLst/>
+              <a:latin typeface="Arial" panose="020B0604020202020204" pitchFamily="34" charset="0"/>
+              <a:ea typeface="inherit"/>
+            </a:endParaRPr>
+          </a:p>
+          <a:p>
+            <a:pPr marL="0" marR="0" lvl="0" indent="0" algn="l" defTabSz="914400" rtl="0" eaLnBrk="0" fontAlgn="base" latinLnBrk="0" hangingPunct="0">
+              <a:lnSpc>
+                <a:spcPct val="100000"/>
+              </a:lnSpc>
+              <a:spcBef>
+                <a:spcPct val="0"/>
+              </a:spcBef>
+              <a:spcAft>
+                <a:spcPct val="0"/>
+              </a:spcAft>
+              <a:buClrTx/>
+              <a:buSzTx/>
+              <a:buFontTx/>
+              <a:buNone/>
+              <a:tabLst/>
+            </a:pPr>
+            <a:endParaRPr kumimoji="0" lang="de-DE" altLang="de-DE" sz="1800" b="0" i="0" u="none" strike="noStrike" cap="none" normalizeH="0" baseline="0">
+              <a:ln>
+                <a:noFill/>
+              </a:ln>
+              <a:solidFill>
+                <a:schemeClr val="tx1"/>
+              </a:solidFill>
+              <a:effectLst/>
+              <a:latin typeface="Arial" panose="020B0604020202020204" pitchFamily="34" charset="0"/>
+            </a:endParaRPr>
+          </a:p>
+        </p:txBody>
+      </p:sp>
+      <p:sp>
+        <p:nvSpPr>
+          <p:cNvPr id="8" name="Rectangle 5">
+            <a:extLst>
+              <a:ext uri="{FF2B5EF4-FFF2-40B4-BE49-F238E27FC236}">
+                <a16:creationId xmlns:a16="http://schemas.microsoft.com/office/drawing/2014/main" id="{63CD848E-79DD-E9B8-A308-A316A9874A6E}"/>
+              </a:ext>
+            </a:extLst>
+          </p:cNvPr>
+          <p:cNvSpPr>
+            <a:spLocks noChangeArrowheads="1"/>
+          </p:cNvSpPr>
+          <p:nvPr/>
+        </p:nvSpPr>
+        <p:spPr bwMode="auto">
+          <a:xfrm>
+            <a:off x="152400" y="152400"/>
+            <a:ext cx="12192000" cy="0"/>
+          </a:xfrm>
+          <a:prstGeom prst="rect">
+            <a:avLst/>
+          </a:prstGeom>
+          <a:noFill/>
+          <a:ln>
+            <a:noFill/>
+          </a:ln>
+          <a:effectLst/>
+          <a:extLst>
+            <a:ext uri="{909E8E84-426E-40DD-AFC4-6F175D3DCCD1}">
+              <a14:hiddenFill xmlns:a14="http://schemas.microsoft.com/office/drawing/2010/main">
+                <a:solidFill>
+                  <a:schemeClr val="accent1"/>
+                </a:solidFill>
+              </a14:hiddenFill>
+            </a:ext>
+            <a:ext uri="{91240B29-F687-4F45-9708-019B960494DF}">
+              <a14:hiddenLine xmlns:a14="http://schemas.microsoft.com/office/drawing/2010/main" w="9525">
+                <a:solidFill>
+                  <a:schemeClr val="tx1"/>
+                </a:solidFill>
+                <a:miter lim="800000"/>
+                <a:headEnd/>
+                <a:tailEnd/>
+              </a14:hiddenLine>
+            </a:ext>
+            <a:ext uri="{AF507438-7753-43E0-B8FC-AC1667EBCBE1}">
+              <a14:hiddenEffects xmlns:a14="http://schemas.microsoft.com/office/drawing/2010/main">
+                <a:effectLst>
+                  <a:outerShdw dist="35921" dir="2700000" algn="ctr" rotWithShape="0">
+                    <a:schemeClr val="bg2"/>
+                  </a:outerShdw>
+                </a:effectLst>
+              </a14:hiddenEffects>
+            </a:ext>
+          </a:extLst>
+        </p:spPr>
+        <p:txBody>
+          <a:bodyPr vert="horz" wrap="none" lIns="0" tIns="0" rIns="0" bIns="0" numCol="1" anchor="ctr" anchorCtr="0" compatLnSpc="1">
+            <a:prstTxWarp prst="textNoShape">
+              <a:avLst/>
+            </a:prstTxWarp>
+            <a:spAutoFit/>
+          </a:bodyPr>
+          <a:lstStyle>
+            <a:lvl1pPr eaLnBrk="0" fontAlgn="base" hangingPunct="0">
+              <a:spcBef>
+                <a:spcPct val="0"/>
+              </a:spcBef>
+              <a:spcAft>
+                <a:spcPct val="0"/>
+              </a:spcAft>
+              <a:defRPr>
+                <a:solidFill>
+                  <a:schemeClr val="tx1"/>
+                </a:solidFill>
+                <a:latin typeface="Arial" panose="020B0604020202020204" pitchFamily="34" charset="0"/>
+              </a:defRPr>
+            </a:lvl1pPr>
+            <a:lvl2pPr eaLnBrk="0" fontAlgn="base" hangingPunct="0">
+              <a:spcBef>
+                <a:spcPct val="0"/>
+              </a:spcBef>
+              <a:spcAft>
+                <a:spcPct val="0"/>
+              </a:spcAft>
+              <a:defRPr>
+                <a:solidFill>
+                  <a:schemeClr val="tx1"/>
+                </a:solidFill>
+                <a:latin typeface="Arial" panose="020B0604020202020204" pitchFamily="34" charset="0"/>
+              </a:defRPr>
+            </a:lvl2pPr>
+            <a:lvl3pPr eaLnBrk="0" fontAlgn="base" hangingPunct="0">
+              <a:spcBef>
+                <a:spcPct val="0"/>
+              </a:spcBef>
+              <a:spcAft>
+                <a:spcPct val="0"/>
+              </a:spcAft>
+              <a:defRPr>
+                <a:solidFill>
+                  <a:schemeClr val="tx1"/>
+                </a:solidFill>
+                <a:latin typeface="Arial" panose="020B0604020202020204" pitchFamily="34" charset="0"/>
+              </a:defRPr>
+            </a:lvl3pPr>
+            <a:lvl4pPr eaLnBrk="0" fontAlgn="base" hangingPunct="0">
+              <a:spcBef>
+                <a:spcPct val="0"/>
+              </a:spcBef>
+              <a:spcAft>
+                <a:spcPct val="0"/>
+              </a:spcAft>
+              <a:defRPr>
+                <a:solidFill>
+                  <a:schemeClr val="tx1"/>
+                </a:solidFill>
+                <a:latin typeface="Arial" panose="020B0604020202020204" pitchFamily="34" charset="0"/>
+              </a:defRPr>
+            </a:lvl4pPr>
+            <a:lvl5pPr eaLnBrk="0" fontAlgn="base" hangingPunct="0">
+              <a:spcBef>
+                <a:spcPct val="0"/>
+              </a:spcBef>
+              <a:spcAft>
+                <a:spcPct val="0"/>
+              </a:spcAft>
+              <a:defRPr>
+                <a:solidFill>
+                  <a:schemeClr val="tx1"/>
+                </a:solidFill>
+                <a:latin typeface="Arial" panose="020B0604020202020204" pitchFamily="34" charset="0"/>
+              </a:defRPr>
+            </a:lvl5pPr>
+            <a:lvl6pPr eaLnBrk="0" fontAlgn="base" hangingPunct="0">
+              <a:spcBef>
+                <a:spcPct val="0"/>
+              </a:spcBef>
+              <a:spcAft>
+                <a:spcPct val="0"/>
+              </a:spcAft>
+              <a:defRPr>
+                <a:solidFill>
+                  <a:schemeClr val="tx1"/>
+                </a:solidFill>
+                <a:latin typeface="Arial" panose="020B0604020202020204" pitchFamily="34" charset="0"/>
+              </a:defRPr>
+            </a:lvl6pPr>
+            <a:lvl7pPr eaLnBrk="0" fontAlgn="base" hangingPunct="0">
+              <a:spcBef>
+                <a:spcPct val="0"/>
+              </a:spcBef>
+              <a:spcAft>
+                <a:spcPct val="0"/>
+              </a:spcAft>
+              <a:defRPr>
+                <a:solidFill>
+                  <a:schemeClr val="tx1"/>
+                </a:solidFill>
+                <a:latin typeface="Arial" panose="020B0604020202020204" pitchFamily="34" charset="0"/>
+              </a:defRPr>
+            </a:lvl7pPr>
+            <a:lvl8pPr eaLnBrk="0" fontAlgn="base" hangingPunct="0">
+              <a:spcBef>
+                <a:spcPct val="0"/>
+              </a:spcBef>
+              <a:spcAft>
+                <a:spcPct val="0"/>
+              </a:spcAft>
+              <a:defRPr>
+                <a:solidFill>
+                  <a:schemeClr val="tx1"/>
+                </a:solidFill>
+                <a:latin typeface="Arial" panose="020B0604020202020204" pitchFamily="34" charset="0"/>
+              </a:defRPr>
+            </a:lvl8pPr>
+            <a:lvl9pPr eaLnBrk="0" fontAlgn="base" hangingPunct="0">
+              <a:spcBef>
+                <a:spcPct val="0"/>
+              </a:spcBef>
+              <a:spcAft>
+                <a:spcPct val="0"/>
+              </a:spcAft>
+              <a:defRPr>
+                <a:solidFill>
+                  <a:schemeClr val="tx1"/>
+                </a:solidFill>
+                <a:latin typeface="Arial" panose="020B0604020202020204" pitchFamily="34" charset="0"/>
+              </a:defRPr>
+            </a:lvl9pPr>
+          </a:lstStyle>
+          <a:p>
+            <a:pPr marL="0" marR="0" lvl="0" indent="0" algn="l" defTabSz="914400" rtl="0" eaLnBrk="0" fontAlgn="base" latinLnBrk="0" hangingPunct="0">
+              <a:lnSpc>
+                <a:spcPct val="100000"/>
+              </a:lnSpc>
+              <a:spcBef>
+                <a:spcPct val="0"/>
+              </a:spcBef>
+              <a:spcAft>
+                <a:spcPct val="0"/>
+              </a:spcAft>
+              <a:buClrTx/>
+              <a:buSzTx/>
+              <a:buFontTx/>
+              <a:buAutoNum type="arabicPeriod" startAt="3"/>
+              <a:tabLst/>
+            </a:pPr>
+            <a:r>
+              <a:rPr kumimoji="0" lang="de-DE" altLang="de-DE" sz="1200" b="0" i="0" u="none" strike="noStrike" cap="none" normalizeH="0" baseline="0">
+                <a:ln>
+                  <a:noFill/>
+                </a:ln>
+                <a:solidFill>
+                  <a:schemeClr val="tx1"/>
+                </a:solidFill>
+                <a:effectLst/>
+                <a:latin typeface="Arial" panose="020B0604020202020204" pitchFamily="34" charset="0"/>
+                <a:ea typeface="inherit"/>
+              </a:rPr>
+              <a:t>[12:07]</a:t>
+            </a:r>
+          </a:p>
+          <a:p>
+            <a:pPr marL="0" marR="0" lvl="0" indent="0" algn="l" defTabSz="914400" rtl="0" eaLnBrk="0" fontAlgn="base" latinLnBrk="0" hangingPunct="0">
+              <a:lnSpc>
+                <a:spcPct val="100000"/>
+              </a:lnSpc>
+              <a:spcBef>
+                <a:spcPct val="0"/>
+              </a:spcBef>
+              <a:spcAft>
+                <a:spcPct val="0"/>
+              </a:spcAft>
+              <a:buClrTx/>
+              <a:buSzTx/>
+              <a:buFontTx/>
+              <a:buNone/>
+              <a:tabLst/>
+            </a:pPr>
+            <a:r>
+              <a:rPr kumimoji="0" lang="de-DE" altLang="de-DE" sz="1200" b="0" i="0" u="none" strike="noStrike" cap="none" normalizeH="0" baseline="0">
+                <a:ln>
+                  <a:noFill/>
+                </a:ln>
+                <a:solidFill>
+                  <a:schemeClr val="tx1"/>
+                </a:solidFill>
+                <a:effectLst/>
+                <a:latin typeface="Arial" panose="020B0604020202020204" pitchFamily="34" charset="0"/>
+                <a:ea typeface="inherit"/>
+              </a:rPr>
+              <a:t>  </a:t>
+            </a:r>
+            <a:r>
+              <a:rPr kumimoji="0" lang="de-DE" altLang="de-DE" sz="1900" b="0" i="0" u="none" strike="noStrike" cap="none" normalizeH="0" baseline="0">
+                <a:ln>
+                  <a:noFill/>
+                </a:ln>
+                <a:solidFill>
+                  <a:schemeClr val="tx1"/>
+                </a:solidFill>
+                <a:effectLst/>
+                <a:latin typeface="Arial" panose="020B0604020202020204" pitchFamily="34" charset="0"/>
+                <a:ea typeface="inherit"/>
+              </a:rPr>
+              <a:t>     </a:t>
+            </a:r>
+            <a:endParaRPr kumimoji="0" lang="de-DE" altLang="de-DE" sz="1200" b="0" i="0" u="none" strike="noStrike" cap="none" normalizeH="0" baseline="0">
+              <a:ln>
+                <a:noFill/>
+              </a:ln>
+              <a:solidFill>
+                <a:schemeClr val="tx1"/>
+              </a:solidFill>
+              <a:effectLst/>
+              <a:latin typeface="Arial" panose="020B0604020202020204" pitchFamily="34" charset="0"/>
+              <a:ea typeface="inherit"/>
+            </a:endParaRPr>
+          </a:p>
+          <a:p>
+            <a:pPr marL="0" marR="0" lvl="0" indent="0" algn="l" defTabSz="914400" rtl="0" eaLnBrk="0" fontAlgn="base" latinLnBrk="0" hangingPunct="0">
+              <a:lnSpc>
+                <a:spcPct val="100000"/>
+              </a:lnSpc>
+              <a:spcBef>
+                <a:spcPct val="0"/>
+              </a:spcBef>
+              <a:spcAft>
+                <a:spcPct val="0"/>
+              </a:spcAft>
+              <a:buClrTx/>
+              <a:buSzTx/>
+              <a:buFontTx/>
+              <a:buNone/>
+              <a:tabLst/>
+            </a:pPr>
+            <a:endParaRPr kumimoji="0" lang="de-DE" altLang="de-DE" sz="1800" b="0" i="0" u="none" strike="noStrike" cap="none" normalizeH="0" baseline="0">
+              <a:ln>
+                <a:noFill/>
+              </a:ln>
+              <a:solidFill>
+                <a:schemeClr val="tx1"/>
+              </a:solidFill>
+              <a:effectLst/>
+              <a:latin typeface="Arial" panose="020B0604020202020204" pitchFamily="34" charset="0"/>
+            </a:endParaRPr>
+          </a:p>
+        </p:txBody>
+      </p:sp>
+      <p:sp>
+        <p:nvSpPr>
+          <p:cNvPr id="9" name="Rectangle 7">
+            <a:extLst>
+              <a:ext uri="{FF2B5EF4-FFF2-40B4-BE49-F238E27FC236}">
+                <a16:creationId xmlns:a16="http://schemas.microsoft.com/office/drawing/2014/main" id="{6749391F-1201-78F6-6D42-42B92E0DB9C0}"/>
+              </a:ext>
+            </a:extLst>
+          </p:cNvPr>
+          <p:cNvSpPr>
+            <a:spLocks noChangeArrowheads="1"/>
+          </p:cNvSpPr>
+          <p:nvPr/>
+        </p:nvSpPr>
+        <p:spPr bwMode="auto">
+          <a:xfrm>
+            <a:off x="152400" y="152400"/>
+            <a:ext cx="12192000" cy="0"/>
+          </a:xfrm>
+          <a:prstGeom prst="rect">
+            <a:avLst/>
+          </a:prstGeom>
+          <a:noFill/>
+          <a:ln>
+            <a:noFill/>
+          </a:ln>
+          <a:effectLst/>
+          <a:extLst>
+            <a:ext uri="{909E8E84-426E-40DD-AFC4-6F175D3DCCD1}">
+              <a14:hiddenFill xmlns:a14="http://schemas.microsoft.com/office/drawing/2010/main">
+                <a:solidFill>
+                  <a:schemeClr val="accent1"/>
+                </a:solidFill>
+              </a14:hiddenFill>
+            </a:ext>
+            <a:ext uri="{91240B29-F687-4F45-9708-019B960494DF}">
+              <a14:hiddenLine xmlns:a14="http://schemas.microsoft.com/office/drawing/2010/main" w="9525">
+                <a:solidFill>
+                  <a:schemeClr val="tx1"/>
+                </a:solidFill>
+                <a:miter lim="800000"/>
+                <a:headEnd/>
+                <a:tailEnd/>
+              </a14:hiddenLine>
+            </a:ext>
+            <a:ext uri="{AF507438-7753-43E0-B8FC-AC1667EBCBE1}">
+              <a14:hiddenEffects xmlns:a14="http://schemas.microsoft.com/office/drawing/2010/main">
+                <a:effectLst>
+                  <a:outerShdw dist="35921" dir="2700000" algn="ctr" rotWithShape="0">
+                    <a:schemeClr val="bg2"/>
+                  </a:outerShdw>
+                </a:effectLst>
+              </a14:hiddenEffects>
+            </a:ext>
+          </a:extLst>
+        </p:spPr>
+        <p:txBody>
+          <a:bodyPr vert="horz" wrap="none" lIns="0" tIns="0" rIns="0" bIns="0" numCol="1" anchor="ctr" anchorCtr="0" compatLnSpc="1">
+            <a:prstTxWarp prst="textNoShape">
+              <a:avLst/>
+            </a:prstTxWarp>
+            <a:spAutoFit/>
+          </a:bodyPr>
+          <a:lstStyle>
+            <a:lvl1pPr eaLnBrk="0" fontAlgn="base" hangingPunct="0">
+              <a:spcBef>
+                <a:spcPct val="0"/>
+              </a:spcBef>
+              <a:spcAft>
+                <a:spcPct val="0"/>
+              </a:spcAft>
+              <a:defRPr>
+                <a:solidFill>
+                  <a:schemeClr val="tx1"/>
+                </a:solidFill>
+                <a:latin typeface="Arial" panose="020B0604020202020204" pitchFamily="34" charset="0"/>
+              </a:defRPr>
+            </a:lvl1pPr>
+            <a:lvl2pPr eaLnBrk="0" fontAlgn="base" hangingPunct="0">
+              <a:spcBef>
+                <a:spcPct val="0"/>
+              </a:spcBef>
+              <a:spcAft>
+                <a:spcPct val="0"/>
+              </a:spcAft>
+              <a:defRPr>
+                <a:solidFill>
+                  <a:schemeClr val="tx1"/>
+                </a:solidFill>
+                <a:latin typeface="Arial" panose="020B0604020202020204" pitchFamily="34" charset="0"/>
+              </a:defRPr>
+            </a:lvl2pPr>
+            <a:lvl3pPr eaLnBrk="0" fontAlgn="base" hangingPunct="0">
+              <a:spcBef>
+                <a:spcPct val="0"/>
+              </a:spcBef>
+              <a:spcAft>
+                <a:spcPct val="0"/>
+              </a:spcAft>
+              <a:defRPr>
+                <a:solidFill>
+                  <a:schemeClr val="tx1"/>
+                </a:solidFill>
+                <a:latin typeface="Arial" panose="020B0604020202020204" pitchFamily="34" charset="0"/>
+              </a:defRPr>
+            </a:lvl3pPr>
+            <a:lvl4pPr eaLnBrk="0" fontAlgn="base" hangingPunct="0">
+              <a:spcBef>
+                <a:spcPct val="0"/>
+              </a:spcBef>
+              <a:spcAft>
+                <a:spcPct val="0"/>
+              </a:spcAft>
+              <a:defRPr>
+                <a:solidFill>
+                  <a:schemeClr val="tx1"/>
+                </a:solidFill>
+                <a:latin typeface="Arial" panose="020B0604020202020204" pitchFamily="34" charset="0"/>
+              </a:defRPr>
+            </a:lvl4pPr>
+            <a:lvl5pPr eaLnBrk="0" fontAlgn="base" hangingPunct="0">
+              <a:spcBef>
+                <a:spcPct val="0"/>
+              </a:spcBef>
+              <a:spcAft>
+                <a:spcPct val="0"/>
+              </a:spcAft>
+              <a:defRPr>
+                <a:solidFill>
+                  <a:schemeClr val="tx1"/>
+                </a:solidFill>
+                <a:latin typeface="Arial" panose="020B0604020202020204" pitchFamily="34" charset="0"/>
+              </a:defRPr>
+            </a:lvl5pPr>
+            <a:lvl6pPr eaLnBrk="0" fontAlgn="base" hangingPunct="0">
+              <a:spcBef>
+                <a:spcPct val="0"/>
+              </a:spcBef>
+              <a:spcAft>
+                <a:spcPct val="0"/>
+              </a:spcAft>
+              <a:defRPr>
+                <a:solidFill>
+                  <a:schemeClr val="tx1"/>
+                </a:solidFill>
+                <a:latin typeface="Arial" panose="020B0604020202020204" pitchFamily="34" charset="0"/>
+              </a:defRPr>
+            </a:lvl6pPr>
+            <a:lvl7pPr eaLnBrk="0" fontAlgn="base" hangingPunct="0">
+              <a:spcBef>
+                <a:spcPct val="0"/>
+              </a:spcBef>
+              <a:spcAft>
+                <a:spcPct val="0"/>
+              </a:spcAft>
+              <a:defRPr>
+                <a:solidFill>
+                  <a:schemeClr val="tx1"/>
+                </a:solidFill>
+                <a:latin typeface="Arial" panose="020B0604020202020204" pitchFamily="34" charset="0"/>
+              </a:defRPr>
+            </a:lvl7pPr>
+            <a:lvl8pPr eaLnBrk="0" fontAlgn="base" hangingPunct="0">
+              <a:spcBef>
+                <a:spcPct val="0"/>
+              </a:spcBef>
+              <a:spcAft>
+                <a:spcPct val="0"/>
+              </a:spcAft>
+              <a:defRPr>
+                <a:solidFill>
+                  <a:schemeClr val="tx1"/>
+                </a:solidFill>
+                <a:latin typeface="Arial" panose="020B0604020202020204" pitchFamily="34" charset="0"/>
+              </a:defRPr>
+            </a:lvl8pPr>
+            <a:lvl9pPr eaLnBrk="0" fontAlgn="base" hangingPunct="0">
+              <a:spcBef>
+                <a:spcPct val="0"/>
+              </a:spcBef>
+              <a:spcAft>
+                <a:spcPct val="0"/>
+              </a:spcAft>
+              <a:defRPr>
+                <a:solidFill>
+                  <a:schemeClr val="tx1"/>
+                </a:solidFill>
+                <a:latin typeface="Arial" panose="020B0604020202020204" pitchFamily="34" charset="0"/>
+              </a:defRPr>
+            </a:lvl9pPr>
+          </a:lstStyle>
+          <a:p>
+            <a:pPr marL="0" marR="0" lvl="0" indent="0" algn="l" defTabSz="914400" rtl="0" eaLnBrk="0" fontAlgn="base" latinLnBrk="0" hangingPunct="0">
+              <a:lnSpc>
+                <a:spcPct val="100000"/>
+              </a:lnSpc>
+              <a:spcBef>
+                <a:spcPct val="0"/>
+              </a:spcBef>
+              <a:spcAft>
+                <a:spcPct val="0"/>
+              </a:spcAft>
+              <a:buClrTx/>
+              <a:buSzTx/>
+              <a:buFontTx/>
+              <a:buAutoNum type="arabicPeriod" startAt="4"/>
+              <a:tabLst/>
+            </a:pPr>
+            <a:r>
+              <a:rPr kumimoji="0" lang="de-DE" altLang="de-DE" sz="1200" b="0" i="0" u="none" strike="noStrike" cap="none" normalizeH="0" baseline="0">
+                <a:ln>
+                  <a:noFill/>
+                </a:ln>
+                <a:solidFill>
+                  <a:schemeClr val="tx1"/>
+                </a:solidFill>
+                <a:effectLst/>
+                <a:latin typeface="Arial" panose="020B0604020202020204" pitchFamily="34" charset="0"/>
+                <a:ea typeface="inherit"/>
+              </a:rPr>
+              <a:t>[12:07]</a:t>
+            </a:r>
+          </a:p>
+          <a:p>
+            <a:pPr marL="0" marR="0" lvl="0" indent="0" algn="l" defTabSz="914400" rtl="0" eaLnBrk="0" fontAlgn="base" latinLnBrk="0" hangingPunct="0">
+              <a:lnSpc>
+                <a:spcPct val="100000"/>
+              </a:lnSpc>
+              <a:spcBef>
+                <a:spcPct val="0"/>
+              </a:spcBef>
+              <a:spcAft>
+                <a:spcPct val="0"/>
+              </a:spcAft>
+              <a:buClrTx/>
+              <a:buSzTx/>
+              <a:buFontTx/>
+              <a:buNone/>
+              <a:tabLst/>
+            </a:pPr>
+            <a:r>
+              <a:rPr kumimoji="0" lang="de-DE" altLang="de-DE" sz="1200" b="0" i="0" u="none" strike="noStrike" cap="none" normalizeH="0" baseline="0">
+                <a:ln>
+                  <a:noFill/>
+                </a:ln>
+                <a:solidFill>
+                  <a:schemeClr val="tx1"/>
+                </a:solidFill>
+                <a:effectLst/>
+                <a:latin typeface="Arial" panose="020B0604020202020204" pitchFamily="34" charset="0"/>
+                <a:ea typeface="inherit"/>
+              </a:rPr>
+              <a:t>  </a:t>
+            </a:r>
+            <a:r>
+              <a:rPr kumimoji="0" lang="de-DE" altLang="de-DE" sz="1900" b="0" i="0" u="none" strike="noStrike" cap="none" normalizeH="0" baseline="0">
+                <a:ln>
+                  <a:noFill/>
+                </a:ln>
+                <a:solidFill>
+                  <a:schemeClr val="tx1"/>
+                </a:solidFill>
+                <a:effectLst/>
+                <a:latin typeface="Arial" panose="020B0604020202020204" pitchFamily="34" charset="0"/>
+                <a:ea typeface="inherit"/>
+              </a:rPr>
+              <a:t>     </a:t>
+            </a:r>
+            <a:endParaRPr kumimoji="0" lang="de-DE" altLang="de-DE" sz="1200" b="0" i="0" u="none" strike="noStrike" cap="none" normalizeH="0" baseline="0">
+              <a:ln>
+                <a:noFill/>
+              </a:ln>
+              <a:solidFill>
+                <a:schemeClr val="tx1"/>
+              </a:solidFill>
+              <a:effectLst/>
+              <a:latin typeface="Arial" panose="020B0604020202020204" pitchFamily="34" charset="0"/>
+              <a:ea typeface="gg sans"/>
+            </a:endParaRPr>
+          </a:p>
+          <a:p>
+            <a:pPr marL="0" marR="0" lvl="0" indent="0" algn="l" defTabSz="914400" rtl="0" eaLnBrk="0" fontAlgn="base" latinLnBrk="0" hangingPunct="0">
+              <a:lnSpc>
+                <a:spcPct val="100000"/>
+              </a:lnSpc>
+              <a:spcBef>
+                <a:spcPct val="0"/>
+              </a:spcBef>
+              <a:spcAft>
+                <a:spcPct val="0"/>
+              </a:spcAft>
+              <a:buClrTx/>
+              <a:buSzTx/>
+              <a:buFontTx/>
+              <a:buNone/>
+              <a:tabLst/>
+            </a:pPr>
+            <a:endParaRPr kumimoji="0" lang="de-DE" altLang="de-DE" sz="1800" b="0" i="0" u="none" strike="noStrike" cap="none" normalizeH="0" baseline="0">
+              <a:ln>
+                <a:noFill/>
+              </a:ln>
+              <a:solidFill>
+                <a:schemeClr val="tx1"/>
+              </a:solidFill>
+              <a:effectLst/>
+              <a:latin typeface="Arial" panose="020B0604020202020204" pitchFamily="34" charset="0"/>
+            </a:endParaRPr>
+          </a:p>
+        </p:txBody>
+      </p:sp>
+      <p:sp>
+        <p:nvSpPr>
+          <p:cNvPr id="10" name="AutoShape 8" descr="Bild">
+            <a:extLst>
+              <a:ext uri="{FF2B5EF4-FFF2-40B4-BE49-F238E27FC236}">
+                <a16:creationId xmlns:a16="http://schemas.microsoft.com/office/drawing/2014/main" id="{5BEE20D4-B1AB-47E2-A6DB-ADAF8301644F}"/>
+              </a:ext>
+            </a:extLst>
+          </p:cNvPr>
+          <p:cNvSpPr>
+            <a:spLocks noChangeAspect="1" noChangeArrowheads="1"/>
+          </p:cNvSpPr>
+          <p:nvPr/>
+        </p:nvSpPr>
+        <p:spPr bwMode="auto">
+          <a:xfrm>
+            <a:off x="238125" y="-38100"/>
+            <a:ext cx="304800" cy="304800"/>
+          </a:xfrm>
+          <a:prstGeom prst="rect">
+            <a:avLst/>
+          </a:prstGeom>
+          <a:noFill/>
+          <a:extLst>
+            <a:ext uri="{909E8E84-426E-40DD-AFC4-6F175D3DCCD1}">
+              <a14:hiddenFill xmlns:a14="http://schemas.microsoft.com/office/drawing/2010/main">
+                <a:solidFill>
+                  <a:srgbClr val="FFFFFF"/>
+                </a:solidFill>
+              </a14:hiddenFill>
+            </a:ext>
+          </a:extLst>
+        </p:spPr>
+        <p:txBody>
+          <a:bodyPr vert="horz" wrap="square" lIns="91440" tIns="45720" rIns="91440" bIns="45720" numCol="1" anchor="t" anchorCtr="0" compatLnSpc="1">
+            <a:prstTxWarp prst="textNoShape">
+              <a:avLst/>
+            </a:prstTxWarp>
+          </a:bodyPr>
+          <a:lstStyle/>
+          <a:p>
+            <a:endParaRPr lang="en-US"/>
+          </a:p>
+        </p:txBody>
+      </p:sp>
+      <p:sp>
+        <p:nvSpPr>
+          <p:cNvPr id="11" name="AutoShape 4" descr="Bild">
+            <a:extLst>
+              <a:ext uri="{FF2B5EF4-FFF2-40B4-BE49-F238E27FC236}">
+                <a16:creationId xmlns:a16="http://schemas.microsoft.com/office/drawing/2014/main" id="{A1D0A69A-CC9C-31CF-C04C-01B2A0547AA0}"/>
+              </a:ext>
+            </a:extLst>
+          </p:cNvPr>
+          <p:cNvSpPr>
+            <a:spLocks noChangeAspect="1" noChangeArrowheads="1"/>
+          </p:cNvSpPr>
+          <p:nvPr/>
+        </p:nvSpPr>
+        <p:spPr bwMode="auto">
+          <a:xfrm>
+            <a:off x="238125" y="-38100"/>
+            <a:ext cx="304800" cy="304800"/>
+          </a:xfrm>
+          <a:prstGeom prst="rect">
+            <a:avLst/>
+          </a:prstGeom>
+          <a:noFill/>
+          <a:extLst>
+            <a:ext uri="{909E8E84-426E-40DD-AFC4-6F175D3DCCD1}">
+              <a14:hiddenFill xmlns:a14="http://schemas.microsoft.com/office/drawing/2010/main">
+                <a:solidFill>
+                  <a:srgbClr val="FFFFFF"/>
+                </a:solidFill>
+              </a14:hiddenFill>
+            </a:ext>
+          </a:extLst>
+        </p:spPr>
+        <p:txBody>
+          <a:bodyPr vert="horz" wrap="square" lIns="91440" tIns="45720" rIns="91440" bIns="45720" numCol="1" anchor="t" anchorCtr="0" compatLnSpc="1">
+            <a:prstTxWarp prst="textNoShape">
+              <a:avLst/>
+            </a:prstTxWarp>
+          </a:bodyPr>
+          <a:lstStyle/>
+          <a:p>
+            <a:endParaRPr lang="en-US"/>
+          </a:p>
+        </p:txBody>
+      </p:sp>
+      <p:sp>
+        <p:nvSpPr>
+          <p:cNvPr id="12" name="AutoShape 2" descr="Bild">
+            <a:extLst>
+              <a:ext uri="{FF2B5EF4-FFF2-40B4-BE49-F238E27FC236}">
+                <a16:creationId xmlns:a16="http://schemas.microsoft.com/office/drawing/2014/main" id="{8F12CB25-8F4C-6B98-A1E5-6E64A131158B}"/>
+              </a:ext>
+            </a:extLst>
+          </p:cNvPr>
+          <p:cNvSpPr>
+            <a:spLocks noChangeAspect="1" noChangeArrowheads="1"/>
+          </p:cNvSpPr>
+          <p:nvPr/>
+        </p:nvSpPr>
+        <p:spPr bwMode="auto">
+          <a:xfrm>
+            <a:off x="238125" y="98425"/>
+            <a:ext cx="304800" cy="304800"/>
+          </a:xfrm>
+          <a:prstGeom prst="rect">
+            <a:avLst/>
+          </a:prstGeom>
+          <a:noFill/>
+          <a:extLst>
+            <a:ext uri="{909E8E84-426E-40DD-AFC4-6F175D3DCCD1}">
+              <a14:hiddenFill xmlns:a14="http://schemas.microsoft.com/office/drawing/2010/main">
+                <a:solidFill>
+                  <a:srgbClr val="FFFFFF"/>
+                </a:solidFill>
+              </a14:hiddenFill>
+            </a:ext>
+          </a:extLst>
+        </p:spPr>
+        <p:txBody>
+          <a:bodyPr vert="horz" wrap="square" lIns="91440" tIns="45720" rIns="91440" bIns="45720" numCol="1" anchor="t" anchorCtr="0" compatLnSpc="1">
+            <a:prstTxWarp prst="textNoShape">
+              <a:avLst/>
+            </a:prstTxWarp>
+          </a:bodyPr>
+          <a:lstStyle/>
+          <a:p>
+            <a:endParaRPr lang="en-US"/>
+          </a:p>
+        </p:txBody>
+      </p:sp>
+      <p:sp>
+        <p:nvSpPr>
+          <p:cNvPr id="13" name="AutoShape 6" descr="Bild">
+            <a:extLst>
+              <a:ext uri="{FF2B5EF4-FFF2-40B4-BE49-F238E27FC236}">
+                <a16:creationId xmlns:a16="http://schemas.microsoft.com/office/drawing/2014/main" id="{FD8A572C-F069-7FA6-0962-541258F18DC9}"/>
+              </a:ext>
+            </a:extLst>
+          </p:cNvPr>
+          <p:cNvSpPr>
+            <a:spLocks noChangeAspect="1" noChangeArrowheads="1"/>
+          </p:cNvSpPr>
+          <p:nvPr/>
+        </p:nvSpPr>
+        <p:spPr bwMode="auto">
+          <a:xfrm>
+            <a:off x="238125" y="-38100"/>
+            <a:ext cx="304800" cy="304800"/>
+          </a:xfrm>
+          <a:prstGeom prst="rect">
+            <a:avLst/>
+          </a:prstGeom>
+          <a:noFill/>
+          <a:extLst>
+            <a:ext uri="{909E8E84-426E-40DD-AFC4-6F175D3DCCD1}">
+              <a14:hiddenFill xmlns:a14="http://schemas.microsoft.com/office/drawing/2010/main">
+                <a:solidFill>
+                  <a:srgbClr val="FFFFFF"/>
+                </a:solidFill>
+              </a14:hiddenFill>
+            </a:ext>
+          </a:extLst>
+        </p:spPr>
+        <p:txBody>
+          <a:bodyPr vert="horz" wrap="square" lIns="91440" tIns="45720" rIns="91440" bIns="45720" numCol="1" anchor="t" anchorCtr="0" compatLnSpc="1">
+            <a:prstTxWarp prst="textNoShape">
+              <a:avLst/>
+            </a:prstTxWarp>
+          </a:bodyPr>
+          <a:lstStyle/>
+          <a:p>
+            <a:endParaRPr lang="en-US"/>
+          </a:p>
+        </p:txBody>
+      </p:sp>
+      <p:pic>
+        <p:nvPicPr>
+          <p:cNvPr id="15" name="Inhaltsplatzhalter 14">
+            <a:extLst>
+              <a:ext uri="{FF2B5EF4-FFF2-40B4-BE49-F238E27FC236}">
+                <a16:creationId xmlns:a16="http://schemas.microsoft.com/office/drawing/2014/main" id="{391A07AC-197B-B186-8DA0-A5217CD1F52E}"/>
+              </a:ext>
+            </a:extLst>
+          </p:cNvPr>
+          <p:cNvPicPr>
+            <a:picLocks noGrp="1" noChangeAspect="1"/>
+          </p:cNvPicPr>
+          <p:nvPr>
+            <p:ph idx="1"/>
+          </p:nvPr>
+        </p:nvPicPr>
+        <p:blipFill>
+          <a:blip r:embed="rId2"/>
+          <a:stretch>
+            <a:fillRect/>
+          </a:stretch>
+        </p:blipFill>
+        <p:spPr>
+          <a:xfrm>
+            <a:off x="555044" y="2343107"/>
+            <a:ext cx="4690724" cy="1822462"/>
+          </a:xfrm>
+          <a:prstGeom prst="rect">
+            <a:avLst/>
+          </a:prstGeom>
+        </p:spPr>
+      </p:pic>
+      <p:sp>
+        <p:nvSpPr>
+          <p:cNvPr id="16" name="AutoShape 12">
+            <a:extLst>
+              <a:ext uri="{FF2B5EF4-FFF2-40B4-BE49-F238E27FC236}">
+                <a16:creationId xmlns:a16="http://schemas.microsoft.com/office/drawing/2014/main" id="{9D0D62D9-51AA-E3D3-E766-56E2EA580BED}"/>
+              </a:ext>
+            </a:extLst>
+          </p:cNvPr>
+          <p:cNvSpPr>
+            <a:spLocks noChangeAspect="1" noChangeArrowheads="1"/>
+          </p:cNvSpPr>
+          <p:nvPr/>
+        </p:nvSpPr>
+        <p:spPr bwMode="auto">
+          <a:xfrm>
+            <a:off x="5943600" y="3276600"/>
+            <a:ext cx="304800" cy="304800"/>
+          </a:xfrm>
+          <a:prstGeom prst="rect">
+            <a:avLst/>
+          </a:prstGeom>
+          <a:noFill/>
+          <a:extLst>
+            <a:ext uri="{909E8E84-426E-40DD-AFC4-6F175D3DCCD1}">
+              <a14:hiddenFill xmlns:a14="http://schemas.microsoft.com/office/drawing/2010/main">
+                <a:solidFill>
+                  <a:srgbClr val="FFFFFF"/>
+                </a:solidFill>
+              </a14:hiddenFill>
+            </a:ext>
+          </a:extLst>
+        </p:spPr>
+        <p:txBody>
+          <a:bodyPr vert="horz" wrap="square" lIns="91440" tIns="45720" rIns="91440" bIns="45720" numCol="1" anchor="t" anchorCtr="0" compatLnSpc="1">
+            <a:prstTxWarp prst="textNoShape">
+              <a:avLst/>
+            </a:prstTxWarp>
+          </a:bodyPr>
+          <a:lstStyle/>
+          <a:p>
+            <a:endParaRPr lang="en-US"/>
+          </a:p>
+        </p:txBody>
+      </p:sp>
+      <p:pic>
+        <p:nvPicPr>
+          <p:cNvPr id="17" name="Grafik 16">
+            <a:extLst>
+              <a:ext uri="{FF2B5EF4-FFF2-40B4-BE49-F238E27FC236}">
+                <a16:creationId xmlns:a16="http://schemas.microsoft.com/office/drawing/2014/main" id="{F2526D67-9BDE-42C5-B686-83C42C526A79}"/>
+              </a:ext>
+            </a:extLst>
+          </p:cNvPr>
+          <p:cNvPicPr>
+            <a:picLocks noChangeAspect="1"/>
+          </p:cNvPicPr>
+          <p:nvPr/>
+        </p:nvPicPr>
+        <p:blipFill>
+          <a:blip r:embed="rId3"/>
+          <a:stretch>
+            <a:fillRect/>
+          </a:stretch>
+        </p:blipFill>
+        <p:spPr>
+          <a:xfrm>
+            <a:off x="5677260" y="1966139"/>
+            <a:ext cx="6092132" cy="2369994"/>
+          </a:xfrm>
+          <a:prstGeom prst="rect">
+            <a:avLst/>
+          </a:prstGeom>
+        </p:spPr>
+      </p:pic>
+      <p:pic>
+        <p:nvPicPr>
+          <p:cNvPr id="18" name="Grafik 17">
+            <a:extLst>
+              <a:ext uri="{FF2B5EF4-FFF2-40B4-BE49-F238E27FC236}">
+                <a16:creationId xmlns:a16="http://schemas.microsoft.com/office/drawing/2014/main" id="{6BF51747-0EAD-A440-2C09-B33F9FB4BAD8}"/>
+              </a:ext>
+            </a:extLst>
+          </p:cNvPr>
+          <p:cNvPicPr>
+            <a:picLocks noChangeAspect="1"/>
+          </p:cNvPicPr>
+          <p:nvPr/>
+        </p:nvPicPr>
+        <p:blipFill>
+          <a:blip r:embed="rId4"/>
+          <a:stretch>
+            <a:fillRect/>
+          </a:stretch>
+        </p:blipFill>
+        <p:spPr>
+          <a:xfrm>
+            <a:off x="334284" y="4384352"/>
+            <a:ext cx="5104515" cy="1959098"/>
+          </a:xfrm>
+          <a:prstGeom prst="rect">
+            <a:avLst/>
+          </a:prstGeom>
+        </p:spPr>
+      </p:pic>
+      <p:sp>
+        <p:nvSpPr>
+          <p:cNvPr id="19" name="AutoShape 14">
+            <a:extLst>
+              <a:ext uri="{FF2B5EF4-FFF2-40B4-BE49-F238E27FC236}">
+                <a16:creationId xmlns:a16="http://schemas.microsoft.com/office/drawing/2014/main" id="{F917EF4B-48E4-FB60-CE40-D2B96D682B0A}"/>
+              </a:ext>
+            </a:extLst>
+          </p:cNvPr>
+          <p:cNvSpPr>
+            <a:spLocks noChangeAspect="1" noChangeArrowheads="1"/>
+          </p:cNvSpPr>
+          <p:nvPr/>
+        </p:nvSpPr>
+        <p:spPr bwMode="auto">
+          <a:xfrm>
+            <a:off x="6096000" y="3429000"/>
+            <a:ext cx="304800" cy="304800"/>
+          </a:xfrm>
+          <a:prstGeom prst="rect">
+            <a:avLst/>
+          </a:prstGeom>
+          <a:noFill/>
+          <a:extLst>
+            <a:ext uri="{909E8E84-426E-40DD-AFC4-6F175D3DCCD1}">
+              <a14:hiddenFill xmlns:a14="http://schemas.microsoft.com/office/drawing/2010/main">
+                <a:solidFill>
+                  <a:srgbClr val="FFFFFF"/>
+                </a:solidFill>
+              </a14:hiddenFill>
+            </a:ext>
+          </a:extLst>
+        </p:spPr>
+        <p:txBody>
+          <a:bodyPr vert="horz" wrap="square" lIns="91440" tIns="45720" rIns="91440" bIns="45720" numCol="1" anchor="t" anchorCtr="0" compatLnSpc="1">
+            <a:prstTxWarp prst="textNoShape">
+              <a:avLst/>
+            </a:prstTxWarp>
+          </a:bodyPr>
+          <a:lstStyle/>
+          <a:p>
+            <a:endParaRPr lang="en-US"/>
+          </a:p>
+        </p:txBody>
+      </p:sp>
+      <p:pic>
+        <p:nvPicPr>
+          <p:cNvPr id="20" name="Grafik 19">
+            <a:extLst>
+              <a:ext uri="{FF2B5EF4-FFF2-40B4-BE49-F238E27FC236}">
+                <a16:creationId xmlns:a16="http://schemas.microsoft.com/office/drawing/2014/main" id="{CD833911-9A60-1C0B-A55F-660A846E6EDA}"/>
+              </a:ext>
+            </a:extLst>
+          </p:cNvPr>
+          <p:cNvPicPr>
+            <a:picLocks noChangeAspect="1"/>
+          </p:cNvPicPr>
+          <p:nvPr/>
+        </p:nvPicPr>
+        <p:blipFill>
+          <a:blip r:embed="rId5"/>
+          <a:stretch>
+            <a:fillRect/>
+          </a:stretch>
+        </p:blipFill>
+        <p:spPr>
+          <a:xfrm>
+            <a:off x="5883971" y="4336133"/>
+            <a:ext cx="5536505" cy="2145792"/>
+          </a:xfrm>
+          <a:prstGeom prst="rect">
+            <a:avLst/>
+          </a:prstGeom>
+        </p:spPr>
+      </p:pic>
+    </p:spTree>
+    <p:extLst>
+      <p:ext uri="{BB962C8B-B14F-4D97-AF65-F5344CB8AC3E}">
+        <p14:creationId xmlns:p14="http://schemas.microsoft.com/office/powerpoint/2010/main" val="3775306058"/>
+      </p:ext>
+    </p:extLst>
+  </p:cSld>
+  <p:clrMapOvr>
+    <a:masterClrMapping/>
+  </p:clrMapOvr>
+</p:sld>
+</file>
+
+<file path=ppt/slides/slide14.xml><?xml version="1.0" encoding="utf-8"?>
+<p:sld xmlns:a="http://schemas.openxmlformats.org/drawingml/2006/main" xmlns:r="http://schemas.openxmlformats.org/officeDocument/2006/relationships" xmlns:p="http://schemas.openxmlformats.org/presentationml/2006/main">
+  <p:cSld>
+    <p:spTree>
+      <p:nvGrpSpPr>
+        <p:cNvPr id="1" name="">
+          <a:extLst>
+            <a:ext uri="{FF2B5EF4-FFF2-40B4-BE49-F238E27FC236}">
+              <a16:creationId xmlns:a16="http://schemas.microsoft.com/office/drawing/2014/main" id="{43688A24-0095-41A3-4259-CF919853F552}"/>
+            </a:ext>
+          </a:extLst>
+        </p:cNvPr>
+        <p:cNvGrpSpPr/>
+        <p:nvPr/>
+      </p:nvGrpSpPr>
+      <p:grpSpPr>
+        <a:xfrm>
+          <a:off x="0" y="0"/>
+          <a:ext cx="0" cy="0"/>
+          <a:chOff x="0" y="0"/>
+          <a:chExt cx="0" cy="0"/>
+        </a:xfrm>
+      </p:grpSpPr>
+      <p:sp>
+        <p:nvSpPr>
+          <p:cNvPr id="2" name="Titel 1">
+            <a:extLst>
+              <a:ext uri="{FF2B5EF4-FFF2-40B4-BE49-F238E27FC236}">
+                <a16:creationId xmlns:a16="http://schemas.microsoft.com/office/drawing/2014/main" id="{6F9D5D48-815B-183B-FA13-DB5F8D1D5B72}"/>
+              </a:ext>
+            </a:extLst>
+          </p:cNvPr>
+          <p:cNvSpPr>
+            <a:spLocks noGrp="1"/>
+          </p:cNvSpPr>
+          <p:nvPr>
+            <p:ph type="title"/>
+          </p:nvPr>
+        </p:nvSpPr>
+        <p:spPr>
+          <a:xfrm>
+            <a:off x="408076" y="1170372"/>
+            <a:ext cx="11012400" cy="1477328"/>
+          </a:xfrm>
+        </p:spPr>
+        <p:txBody>
+          <a:bodyPr/>
+          <a:lstStyle/>
+          <a:p>
+            <a:r>
+              <a:rPr lang="en-GB" dirty="0"/>
+              <a:t>The effects of convergence parameters</a:t>
+            </a:r>
+            <a:br>
+              <a:rPr lang="en-GB" dirty="0"/>
+            </a:br>
+            <a:r>
+              <a:rPr lang="en-GB" dirty="0"/>
+              <a:t>Trust Model More: Q=1e-5 R=0.01</a:t>
+            </a:r>
+            <a:br>
+              <a:rPr lang="en-GB" i="1" dirty="0">
+                <a:solidFill>
+                  <a:schemeClr val="bg1">
+                    <a:lumMod val="50000"/>
+                  </a:schemeClr>
+                </a:solidFill>
+              </a:rPr>
+            </a:br>
+            <a:endParaRPr lang="en-US" dirty="0"/>
+          </a:p>
+        </p:txBody>
+      </p:sp>
+      <p:sp>
+        <p:nvSpPr>
+          <p:cNvPr id="4" name="Datumsplatzhalter 3">
+            <a:extLst>
+              <a:ext uri="{FF2B5EF4-FFF2-40B4-BE49-F238E27FC236}">
+                <a16:creationId xmlns:a16="http://schemas.microsoft.com/office/drawing/2014/main" id="{8A28C546-A0C8-1EF1-F9F7-55D843C6650A}"/>
+              </a:ext>
+            </a:extLst>
+          </p:cNvPr>
+          <p:cNvSpPr>
+            <a:spLocks noGrp="1"/>
+          </p:cNvSpPr>
+          <p:nvPr>
+            <p:ph type="dt" sz="half" idx="10"/>
+          </p:nvPr>
+        </p:nvSpPr>
+        <p:spPr/>
+        <p:txBody>
+          <a:bodyPr/>
+          <a:lstStyle/>
+          <a:p>
+            <a:fld id="{B2DD1E4E-1107-499B-BB00-8AA0260A0EFB}" type="datetime1">
+              <a:rPr lang="de-DE" smtClean="0"/>
+              <a:t>07.07.2025</a:t>
+            </a:fld>
+            <a:endParaRPr lang="de-CH" dirty="0"/>
+          </a:p>
+        </p:txBody>
+      </p:sp>
+      <p:sp>
+        <p:nvSpPr>
+          <p:cNvPr id="5" name="Fußzeilenplatzhalter 4">
+            <a:extLst>
+              <a:ext uri="{FF2B5EF4-FFF2-40B4-BE49-F238E27FC236}">
+                <a16:creationId xmlns:a16="http://schemas.microsoft.com/office/drawing/2014/main" id="{A90B8A07-3149-878B-D522-182AB1039233}"/>
+              </a:ext>
+            </a:extLst>
+          </p:cNvPr>
+          <p:cNvSpPr>
+            <a:spLocks noGrp="1"/>
+          </p:cNvSpPr>
+          <p:nvPr>
+            <p:ph type="ftr" sz="quarter" idx="11"/>
+          </p:nvPr>
+        </p:nvSpPr>
+        <p:spPr/>
+        <p:txBody>
+          <a:bodyPr/>
+          <a:lstStyle/>
+          <a:p>
+            <a:r>
+              <a:rPr lang="en-US"/>
+              <a:t>Institute For Sensor and Electronics</a:t>
+            </a:r>
+            <a:endParaRPr lang="de-CH" dirty="0"/>
+          </a:p>
+        </p:txBody>
+      </p:sp>
+      <p:sp>
+        <p:nvSpPr>
+          <p:cNvPr id="6" name="Foliennummernplatzhalter 5">
+            <a:extLst>
+              <a:ext uri="{FF2B5EF4-FFF2-40B4-BE49-F238E27FC236}">
+                <a16:creationId xmlns:a16="http://schemas.microsoft.com/office/drawing/2014/main" id="{E9F7260B-6DAF-80B2-7B0F-2617420302E9}"/>
+              </a:ext>
+            </a:extLst>
+          </p:cNvPr>
+          <p:cNvSpPr>
+            <a:spLocks noGrp="1"/>
+          </p:cNvSpPr>
+          <p:nvPr>
+            <p:ph type="sldNum" sz="quarter" idx="12"/>
+          </p:nvPr>
+        </p:nvSpPr>
+        <p:spPr/>
+        <p:txBody>
+          <a:bodyPr/>
+          <a:lstStyle/>
+          <a:p>
+            <a:fld id="{442AD375-037F-43D0-B059-5172DA06796A}" type="slidenum">
+              <a:rPr lang="de-CH" smtClean="0"/>
+              <a:pPr/>
+              <a:t>14</a:t>
+            </a:fld>
+            <a:endParaRPr lang="de-CH" dirty="0"/>
+          </a:p>
+        </p:txBody>
+      </p:sp>
+      <p:sp>
+        <p:nvSpPr>
+          <p:cNvPr id="7" name="Rectangle 3">
+            <a:extLst>
+              <a:ext uri="{FF2B5EF4-FFF2-40B4-BE49-F238E27FC236}">
+                <a16:creationId xmlns:a16="http://schemas.microsoft.com/office/drawing/2014/main" id="{13A2CD13-7ACD-0648-EBDC-A1112DEB1556}"/>
+              </a:ext>
+            </a:extLst>
+          </p:cNvPr>
+          <p:cNvSpPr>
+            <a:spLocks noChangeArrowheads="1"/>
+          </p:cNvSpPr>
+          <p:nvPr/>
+        </p:nvSpPr>
+        <p:spPr bwMode="auto">
+          <a:xfrm>
+            <a:off x="152400" y="152400"/>
+            <a:ext cx="12192000" cy="0"/>
+          </a:xfrm>
+          <a:prstGeom prst="rect">
+            <a:avLst/>
+          </a:prstGeom>
+          <a:noFill/>
+          <a:ln>
+            <a:noFill/>
+          </a:ln>
+          <a:effectLst/>
+          <a:extLst>
+            <a:ext uri="{909E8E84-426E-40DD-AFC4-6F175D3DCCD1}">
+              <a14:hiddenFill xmlns:a14="http://schemas.microsoft.com/office/drawing/2010/main">
+                <a:solidFill>
+                  <a:schemeClr val="accent1"/>
+                </a:solidFill>
+              </a14:hiddenFill>
+            </a:ext>
+            <a:ext uri="{91240B29-F687-4F45-9708-019B960494DF}">
+              <a14:hiddenLine xmlns:a14="http://schemas.microsoft.com/office/drawing/2010/main" w="9525">
+                <a:solidFill>
+                  <a:schemeClr val="tx1"/>
+                </a:solidFill>
+                <a:miter lim="800000"/>
+                <a:headEnd/>
+                <a:tailEnd/>
+              </a14:hiddenLine>
+            </a:ext>
+            <a:ext uri="{AF507438-7753-43E0-B8FC-AC1667EBCBE1}">
+              <a14:hiddenEffects xmlns:a14="http://schemas.microsoft.com/office/drawing/2010/main">
+                <a:effectLst>
+                  <a:outerShdw dist="35921" dir="2700000" algn="ctr" rotWithShape="0">
+                    <a:schemeClr val="bg2"/>
+                  </a:outerShdw>
+                </a:effectLst>
+              </a14:hiddenEffects>
+            </a:ext>
+          </a:extLst>
+        </p:spPr>
+        <p:txBody>
+          <a:bodyPr vert="horz" wrap="none" lIns="0" tIns="0" rIns="0" bIns="0" numCol="1" anchor="ctr" anchorCtr="0" compatLnSpc="1">
+            <a:prstTxWarp prst="textNoShape">
+              <a:avLst/>
+            </a:prstTxWarp>
+            <a:spAutoFit/>
+          </a:bodyPr>
+          <a:lstStyle>
+            <a:lvl1pPr eaLnBrk="0" fontAlgn="base" hangingPunct="0">
+              <a:spcBef>
+                <a:spcPct val="0"/>
+              </a:spcBef>
+              <a:spcAft>
+                <a:spcPct val="0"/>
+              </a:spcAft>
+              <a:defRPr>
+                <a:solidFill>
+                  <a:schemeClr val="tx1"/>
+                </a:solidFill>
+                <a:latin typeface="Arial" panose="020B0604020202020204" pitchFamily="34" charset="0"/>
+              </a:defRPr>
+            </a:lvl1pPr>
+            <a:lvl2pPr eaLnBrk="0" fontAlgn="base" hangingPunct="0">
+              <a:spcBef>
+                <a:spcPct val="0"/>
+              </a:spcBef>
+              <a:spcAft>
+                <a:spcPct val="0"/>
+              </a:spcAft>
+              <a:defRPr>
+                <a:solidFill>
+                  <a:schemeClr val="tx1"/>
+                </a:solidFill>
+                <a:latin typeface="Arial" panose="020B0604020202020204" pitchFamily="34" charset="0"/>
+              </a:defRPr>
+            </a:lvl2pPr>
+            <a:lvl3pPr eaLnBrk="0" fontAlgn="base" hangingPunct="0">
+              <a:spcBef>
+                <a:spcPct val="0"/>
+              </a:spcBef>
+              <a:spcAft>
+                <a:spcPct val="0"/>
+              </a:spcAft>
+              <a:defRPr>
+                <a:solidFill>
+                  <a:schemeClr val="tx1"/>
+                </a:solidFill>
+                <a:latin typeface="Arial" panose="020B0604020202020204" pitchFamily="34" charset="0"/>
+              </a:defRPr>
+            </a:lvl3pPr>
+            <a:lvl4pPr eaLnBrk="0" fontAlgn="base" hangingPunct="0">
+              <a:spcBef>
+                <a:spcPct val="0"/>
+              </a:spcBef>
+              <a:spcAft>
+                <a:spcPct val="0"/>
+              </a:spcAft>
+              <a:defRPr>
+                <a:solidFill>
+                  <a:schemeClr val="tx1"/>
+                </a:solidFill>
+                <a:latin typeface="Arial" panose="020B0604020202020204" pitchFamily="34" charset="0"/>
+              </a:defRPr>
+            </a:lvl4pPr>
+            <a:lvl5pPr eaLnBrk="0" fontAlgn="base" hangingPunct="0">
+              <a:spcBef>
+                <a:spcPct val="0"/>
+              </a:spcBef>
+              <a:spcAft>
+                <a:spcPct val="0"/>
+              </a:spcAft>
+              <a:defRPr>
+                <a:solidFill>
+                  <a:schemeClr val="tx1"/>
+                </a:solidFill>
+                <a:latin typeface="Arial" panose="020B0604020202020204" pitchFamily="34" charset="0"/>
+              </a:defRPr>
+            </a:lvl5pPr>
+            <a:lvl6pPr eaLnBrk="0" fontAlgn="base" hangingPunct="0">
+              <a:spcBef>
+                <a:spcPct val="0"/>
+              </a:spcBef>
+              <a:spcAft>
+                <a:spcPct val="0"/>
+              </a:spcAft>
+              <a:defRPr>
+                <a:solidFill>
+                  <a:schemeClr val="tx1"/>
+                </a:solidFill>
+                <a:latin typeface="Arial" panose="020B0604020202020204" pitchFamily="34" charset="0"/>
+              </a:defRPr>
+            </a:lvl6pPr>
+            <a:lvl7pPr eaLnBrk="0" fontAlgn="base" hangingPunct="0">
+              <a:spcBef>
+                <a:spcPct val="0"/>
+              </a:spcBef>
+              <a:spcAft>
+                <a:spcPct val="0"/>
+              </a:spcAft>
+              <a:defRPr>
+                <a:solidFill>
+                  <a:schemeClr val="tx1"/>
+                </a:solidFill>
+                <a:latin typeface="Arial" panose="020B0604020202020204" pitchFamily="34" charset="0"/>
+              </a:defRPr>
+            </a:lvl7pPr>
+            <a:lvl8pPr eaLnBrk="0" fontAlgn="base" hangingPunct="0">
+              <a:spcBef>
+                <a:spcPct val="0"/>
+              </a:spcBef>
+              <a:spcAft>
+                <a:spcPct val="0"/>
+              </a:spcAft>
+              <a:defRPr>
+                <a:solidFill>
+                  <a:schemeClr val="tx1"/>
+                </a:solidFill>
+                <a:latin typeface="Arial" panose="020B0604020202020204" pitchFamily="34" charset="0"/>
+              </a:defRPr>
+            </a:lvl8pPr>
+            <a:lvl9pPr eaLnBrk="0" fontAlgn="base" hangingPunct="0">
+              <a:spcBef>
+                <a:spcPct val="0"/>
+              </a:spcBef>
+              <a:spcAft>
+                <a:spcPct val="0"/>
+              </a:spcAft>
+              <a:defRPr>
+                <a:solidFill>
+                  <a:schemeClr val="tx1"/>
+                </a:solidFill>
+                <a:latin typeface="Arial" panose="020B0604020202020204" pitchFamily="34" charset="0"/>
+              </a:defRPr>
+            </a:lvl9pPr>
+          </a:lstStyle>
+          <a:p>
+            <a:pPr marL="0" marR="0" lvl="0" indent="0" algn="l" defTabSz="914400" rtl="0" eaLnBrk="0" fontAlgn="base" latinLnBrk="0" hangingPunct="0">
+              <a:lnSpc>
+                <a:spcPct val="100000"/>
+              </a:lnSpc>
+              <a:spcBef>
+                <a:spcPct val="0"/>
+              </a:spcBef>
+              <a:spcAft>
+                <a:spcPct val="0"/>
+              </a:spcAft>
+              <a:buClrTx/>
+              <a:buSzTx/>
+              <a:buFontTx/>
+              <a:buAutoNum type="arabicPeriod" startAt="2"/>
+              <a:tabLst/>
+            </a:pPr>
+            <a:r>
+              <a:rPr kumimoji="0" lang="de-DE" altLang="de-DE" sz="1200" b="0" i="0" u="none" strike="noStrike" cap="none" normalizeH="0" baseline="0">
+                <a:ln>
+                  <a:noFill/>
+                </a:ln>
+                <a:solidFill>
+                  <a:schemeClr val="tx1"/>
+                </a:solidFill>
+                <a:effectLst/>
+                <a:latin typeface="Arial" panose="020B0604020202020204" pitchFamily="34" charset="0"/>
+                <a:ea typeface="inherit"/>
+              </a:rPr>
+              <a:t>[12:07]</a:t>
+            </a:r>
+          </a:p>
+          <a:p>
+            <a:pPr marL="0" marR="0" lvl="0" indent="0" algn="l" defTabSz="914400" rtl="0" eaLnBrk="0" fontAlgn="base" latinLnBrk="0" hangingPunct="0">
+              <a:lnSpc>
+                <a:spcPct val="100000"/>
+              </a:lnSpc>
+              <a:spcBef>
+                <a:spcPct val="0"/>
+              </a:spcBef>
+              <a:spcAft>
+                <a:spcPct val="0"/>
+              </a:spcAft>
+              <a:buClrTx/>
+              <a:buSzTx/>
+              <a:buFontTx/>
+              <a:buNone/>
+              <a:tabLst/>
+            </a:pPr>
+            <a:r>
+              <a:rPr kumimoji="0" lang="de-DE" altLang="de-DE" sz="1200" b="0" i="0" u="none" strike="noStrike" cap="none" normalizeH="0" baseline="0">
+                <a:ln>
+                  <a:noFill/>
+                </a:ln>
+                <a:solidFill>
+                  <a:schemeClr val="tx1"/>
+                </a:solidFill>
+                <a:effectLst/>
+                <a:latin typeface="Arial" panose="020B0604020202020204" pitchFamily="34" charset="0"/>
+                <a:ea typeface="inherit"/>
+              </a:rPr>
+              <a:t>  </a:t>
+            </a:r>
+            <a:r>
+              <a:rPr kumimoji="0" lang="de-DE" altLang="de-DE" sz="1900" b="0" i="0" u="none" strike="noStrike" cap="none" normalizeH="0" baseline="0">
+                <a:ln>
+                  <a:noFill/>
+                </a:ln>
+                <a:solidFill>
+                  <a:schemeClr val="tx1"/>
+                </a:solidFill>
+                <a:effectLst/>
+                <a:latin typeface="Arial" panose="020B0604020202020204" pitchFamily="34" charset="0"/>
+                <a:ea typeface="inherit"/>
+              </a:rPr>
+              <a:t>     </a:t>
+            </a:r>
+            <a:endParaRPr kumimoji="0" lang="de-DE" altLang="de-DE" sz="1200" b="0" i="0" u="none" strike="noStrike" cap="none" normalizeH="0" baseline="0">
+              <a:ln>
+                <a:noFill/>
+              </a:ln>
+              <a:solidFill>
+                <a:schemeClr val="tx1"/>
+              </a:solidFill>
+              <a:effectLst/>
+              <a:latin typeface="Arial" panose="020B0604020202020204" pitchFamily="34" charset="0"/>
+              <a:ea typeface="inherit"/>
+            </a:endParaRPr>
+          </a:p>
+          <a:p>
+            <a:pPr marL="0" marR="0" lvl="0" indent="0" algn="l" defTabSz="914400" rtl="0" eaLnBrk="0" fontAlgn="base" latinLnBrk="0" hangingPunct="0">
+              <a:lnSpc>
+                <a:spcPct val="100000"/>
+              </a:lnSpc>
+              <a:spcBef>
+                <a:spcPct val="0"/>
+              </a:spcBef>
+              <a:spcAft>
+                <a:spcPct val="0"/>
+              </a:spcAft>
+              <a:buClrTx/>
+              <a:buSzTx/>
+              <a:buFontTx/>
+              <a:buNone/>
+              <a:tabLst/>
+            </a:pPr>
+            <a:endParaRPr kumimoji="0" lang="de-DE" altLang="de-DE" sz="1800" b="0" i="0" u="none" strike="noStrike" cap="none" normalizeH="0" baseline="0">
+              <a:ln>
+                <a:noFill/>
+              </a:ln>
+              <a:solidFill>
+                <a:schemeClr val="tx1"/>
+              </a:solidFill>
+              <a:effectLst/>
+              <a:latin typeface="Arial" panose="020B0604020202020204" pitchFamily="34" charset="0"/>
+            </a:endParaRPr>
+          </a:p>
+        </p:txBody>
+      </p:sp>
+      <p:sp>
+        <p:nvSpPr>
+          <p:cNvPr id="8" name="Rectangle 5">
+            <a:extLst>
+              <a:ext uri="{FF2B5EF4-FFF2-40B4-BE49-F238E27FC236}">
+                <a16:creationId xmlns:a16="http://schemas.microsoft.com/office/drawing/2014/main" id="{60C0F22B-7FED-1286-FDA8-65CEB9A768D5}"/>
+              </a:ext>
+            </a:extLst>
+          </p:cNvPr>
+          <p:cNvSpPr>
+            <a:spLocks noChangeArrowheads="1"/>
+          </p:cNvSpPr>
+          <p:nvPr/>
+        </p:nvSpPr>
+        <p:spPr bwMode="auto">
+          <a:xfrm>
+            <a:off x="152400" y="152400"/>
+            <a:ext cx="12192000" cy="0"/>
+          </a:xfrm>
+          <a:prstGeom prst="rect">
+            <a:avLst/>
+          </a:prstGeom>
+          <a:noFill/>
+          <a:ln>
+            <a:noFill/>
+          </a:ln>
+          <a:effectLst/>
+          <a:extLst>
+            <a:ext uri="{909E8E84-426E-40DD-AFC4-6F175D3DCCD1}">
+              <a14:hiddenFill xmlns:a14="http://schemas.microsoft.com/office/drawing/2010/main">
+                <a:solidFill>
+                  <a:schemeClr val="accent1"/>
+                </a:solidFill>
+              </a14:hiddenFill>
+            </a:ext>
+            <a:ext uri="{91240B29-F687-4F45-9708-019B960494DF}">
+              <a14:hiddenLine xmlns:a14="http://schemas.microsoft.com/office/drawing/2010/main" w="9525">
+                <a:solidFill>
+                  <a:schemeClr val="tx1"/>
+                </a:solidFill>
+                <a:miter lim="800000"/>
+                <a:headEnd/>
+                <a:tailEnd/>
+              </a14:hiddenLine>
+            </a:ext>
+            <a:ext uri="{AF507438-7753-43E0-B8FC-AC1667EBCBE1}">
+              <a14:hiddenEffects xmlns:a14="http://schemas.microsoft.com/office/drawing/2010/main">
+                <a:effectLst>
+                  <a:outerShdw dist="35921" dir="2700000" algn="ctr" rotWithShape="0">
+                    <a:schemeClr val="bg2"/>
+                  </a:outerShdw>
+                </a:effectLst>
+              </a14:hiddenEffects>
+            </a:ext>
+          </a:extLst>
+        </p:spPr>
+        <p:txBody>
+          <a:bodyPr vert="horz" wrap="none" lIns="0" tIns="0" rIns="0" bIns="0" numCol="1" anchor="ctr" anchorCtr="0" compatLnSpc="1">
+            <a:prstTxWarp prst="textNoShape">
+              <a:avLst/>
+            </a:prstTxWarp>
+            <a:spAutoFit/>
+          </a:bodyPr>
+          <a:lstStyle>
+            <a:lvl1pPr eaLnBrk="0" fontAlgn="base" hangingPunct="0">
+              <a:spcBef>
+                <a:spcPct val="0"/>
+              </a:spcBef>
+              <a:spcAft>
+                <a:spcPct val="0"/>
+              </a:spcAft>
+              <a:defRPr>
+                <a:solidFill>
+                  <a:schemeClr val="tx1"/>
+                </a:solidFill>
+                <a:latin typeface="Arial" panose="020B0604020202020204" pitchFamily="34" charset="0"/>
+              </a:defRPr>
+            </a:lvl1pPr>
+            <a:lvl2pPr eaLnBrk="0" fontAlgn="base" hangingPunct="0">
+              <a:spcBef>
+                <a:spcPct val="0"/>
+              </a:spcBef>
+              <a:spcAft>
+                <a:spcPct val="0"/>
+              </a:spcAft>
+              <a:defRPr>
+                <a:solidFill>
+                  <a:schemeClr val="tx1"/>
+                </a:solidFill>
+                <a:latin typeface="Arial" panose="020B0604020202020204" pitchFamily="34" charset="0"/>
+              </a:defRPr>
+            </a:lvl2pPr>
+            <a:lvl3pPr eaLnBrk="0" fontAlgn="base" hangingPunct="0">
+              <a:spcBef>
+                <a:spcPct val="0"/>
+              </a:spcBef>
+              <a:spcAft>
+                <a:spcPct val="0"/>
+              </a:spcAft>
+              <a:defRPr>
+                <a:solidFill>
+                  <a:schemeClr val="tx1"/>
+                </a:solidFill>
+                <a:latin typeface="Arial" panose="020B0604020202020204" pitchFamily="34" charset="0"/>
+              </a:defRPr>
+            </a:lvl3pPr>
+            <a:lvl4pPr eaLnBrk="0" fontAlgn="base" hangingPunct="0">
+              <a:spcBef>
+                <a:spcPct val="0"/>
+              </a:spcBef>
+              <a:spcAft>
+                <a:spcPct val="0"/>
+              </a:spcAft>
+              <a:defRPr>
+                <a:solidFill>
+                  <a:schemeClr val="tx1"/>
+                </a:solidFill>
+                <a:latin typeface="Arial" panose="020B0604020202020204" pitchFamily="34" charset="0"/>
+              </a:defRPr>
+            </a:lvl4pPr>
+            <a:lvl5pPr eaLnBrk="0" fontAlgn="base" hangingPunct="0">
+              <a:spcBef>
+                <a:spcPct val="0"/>
+              </a:spcBef>
+              <a:spcAft>
+                <a:spcPct val="0"/>
+              </a:spcAft>
+              <a:defRPr>
+                <a:solidFill>
+                  <a:schemeClr val="tx1"/>
+                </a:solidFill>
+                <a:latin typeface="Arial" panose="020B0604020202020204" pitchFamily="34" charset="0"/>
+              </a:defRPr>
+            </a:lvl5pPr>
+            <a:lvl6pPr eaLnBrk="0" fontAlgn="base" hangingPunct="0">
+              <a:spcBef>
+                <a:spcPct val="0"/>
+              </a:spcBef>
+              <a:spcAft>
+                <a:spcPct val="0"/>
+              </a:spcAft>
+              <a:defRPr>
+                <a:solidFill>
+                  <a:schemeClr val="tx1"/>
+                </a:solidFill>
+                <a:latin typeface="Arial" panose="020B0604020202020204" pitchFamily="34" charset="0"/>
+              </a:defRPr>
+            </a:lvl6pPr>
+            <a:lvl7pPr eaLnBrk="0" fontAlgn="base" hangingPunct="0">
+              <a:spcBef>
+                <a:spcPct val="0"/>
+              </a:spcBef>
+              <a:spcAft>
+                <a:spcPct val="0"/>
+              </a:spcAft>
+              <a:defRPr>
+                <a:solidFill>
+                  <a:schemeClr val="tx1"/>
+                </a:solidFill>
+                <a:latin typeface="Arial" panose="020B0604020202020204" pitchFamily="34" charset="0"/>
+              </a:defRPr>
+            </a:lvl7pPr>
+            <a:lvl8pPr eaLnBrk="0" fontAlgn="base" hangingPunct="0">
+              <a:spcBef>
+                <a:spcPct val="0"/>
+              </a:spcBef>
+              <a:spcAft>
+                <a:spcPct val="0"/>
+              </a:spcAft>
+              <a:defRPr>
+                <a:solidFill>
+                  <a:schemeClr val="tx1"/>
+                </a:solidFill>
+                <a:latin typeface="Arial" panose="020B0604020202020204" pitchFamily="34" charset="0"/>
+              </a:defRPr>
+            </a:lvl8pPr>
+            <a:lvl9pPr eaLnBrk="0" fontAlgn="base" hangingPunct="0">
+              <a:spcBef>
+                <a:spcPct val="0"/>
+              </a:spcBef>
+              <a:spcAft>
+                <a:spcPct val="0"/>
+              </a:spcAft>
+              <a:defRPr>
+                <a:solidFill>
+                  <a:schemeClr val="tx1"/>
+                </a:solidFill>
+                <a:latin typeface="Arial" panose="020B0604020202020204" pitchFamily="34" charset="0"/>
+              </a:defRPr>
+            </a:lvl9pPr>
+          </a:lstStyle>
+          <a:p>
+            <a:pPr marL="0" marR="0" lvl="0" indent="0" algn="l" defTabSz="914400" rtl="0" eaLnBrk="0" fontAlgn="base" latinLnBrk="0" hangingPunct="0">
+              <a:lnSpc>
+                <a:spcPct val="100000"/>
+              </a:lnSpc>
+              <a:spcBef>
+                <a:spcPct val="0"/>
+              </a:spcBef>
+              <a:spcAft>
+                <a:spcPct val="0"/>
+              </a:spcAft>
+              <a:buClrTx/>
+              <a:buSzTx/>
+              <a:buFontTx/>
+              <a:buAutoNum type="arabicPeriod" startAt="3"/>
+              <a:tabLst/>
+            </a:pPr>
+            <a:r>
+              <a:rPr kumimoji="0" lang="de-DE" altLang="de-DE" sz="1200" b="0" i="0" u="none" strike="noStrike" cap="none" normalizeH="0" baseline="0">
+                <a:ln>
+                  <a:noFill/>
+                </a:ln>
+                <a:solidFill>
+                  <a:schemeClr val="tx1"/>
+                </a:solidFill>
+                <a:effectLst/>
+                <a:latin typeface="Arial" panose="020B0604020202020204" pitchFamily="34" charset="0"/>
+                <a:ea typeface="inherit"/>
+              </a:rPr>
+              <a:t>[12:07]</a:t>
+            </a:r>
+          </a:p>
+          <a:p>
+            <a:pPr marL="0" marR="0" lvl="0" indent="0" algn="l" defTabSz="914400" rtl="0" eaLnBrk="0" fontAlgn="base" latinLnBrk="0" hangingPunct="0">
+              <a:lnSpc>
+                <a:spcPct val="100000"/>
+              </a:lnSpc>
+              <a:spcBef>
+                <a:spcPct val="0"/>
+              </a:spcBef>
+              <a:spcAft>
+                <a:spcPct val="0"/>
+              </a:spcAft>
+              <a:buClrTx/>
+              <a:buSzTx/>
+              <a:buFontTx/>
+              <a:buNone/>
+              <a:tabLst/>
+            </a:pPr>
+            <a:r>
+              <a:rPr kumimoji="0" lang="de-DE" altLang="de-DE" sz="1200" b="0" i="0" u="none" strike="noStrike" cap="none" normalizeH="0" baseline="0">
+                <a:ln>
+                  <a:noFill/>
+                </a:ln>
+                <a:solidFill>
+                  <a:schemeClr val="tx1"/>
+                </a:solidFill>
+                <a:effectLst/>
+                <a:latin typeface="Arial" panose="020B0604020202020204" pitchFamily="34" charset="0"/>
+                <a:ea typeface="inherit"/>
+              </a:rPr>
+              <a:t>  </a:t>
+            </a:r>
+            <a:r>
+              <a:rPr kumimoji="0" lang="de-DE" altLang="de-DE" sz="1900" b="0" i="0" u="none" strike="noStrike" cap="none" normalizeH="0" baseline="0">
+                <a:ln>
+                  <a:noFill/>
+                </a:ln>
+                <a:solidFill>
+                  <a:schemeClr val="tx1"/>
+                </a:solidFill>
+                <a:effectLst/>
+                <a:latin typeface="Arial" panose="020B0604020202020204" pitchFamily="34" charset="0"/>
+                <a:ea typeface="inherit"/>
+              </a:rPr>
+              <a:t>     </a:t>
+            </a:r>
+            <a:endParaRPr kumimoji="0" lang="de-DE" altLang="de-DE" sz="1200" b="0" i="0" u="none" strike="noStrike" cap="none" normalizeH="0" baseline="0">
+              <a:ln>
+                <a:noFill/>
+              </a:ln>
+              <a:solidFill>
+                <a:schemeClr val="tx1"/>
+              </a:solidFill>
+              <a:effectLst/>
+              <a:latin typeface="Arial" panose="020B0604020202020204" pitchFamily="34" charset="0"/>
+              <a:ea typeface="inherit"/>
+            </a:endParaRPr>
+          </a:p>
+          <a:p>
+            <a:pPr marL="0" marR="0" lvl="0" indent="0" algn="l" defTabSz="914400" rtl="0" eaLnBrk="0" fontAlgn="base" latinLnBrk="0" hangingPunct="0">
+              <a:lnSpc>
+                <a:spcPct val="100000"/>
+              </a:lnSpc>
+              <a:spcBef>
+                <a:spcPct val="0"/>
+              </a:spcBef>
+              <a:spcAft>
+                <a:spcPct val="0"/>
+              </a:spcAft>
+              <a:buClrTx/>
+              <a:buSzTx/>
+              <a:buFontTx/>
+              <a:buNone/>
+              <a:tabLst/>
+            </a:pPr>
+            <a:endParaRPr kumimoji="0" lang="de-DE" altLang="de-DE" sz="1800" b="0" i="0" u="none" strike="noStrike" cap="none" normalizeH="0" baseline="0">
+              <a:ln>
+                <a:noFill/>
+              </a:ln>
+              <a:solidFill>
+                <a:schemeClr val="tx1"/>
+              </a:solidFill>
+              <a:effectLst/>
+              <a:latin typeface="Arial" panose="020B0604020202020204" pitchFamily="34" charset="0"/>
+            </a:endParaRPr>
+          </a:p>
+        </p:txBody>
+      </p:sp>
+      <p:sp>
+        <p:nvSpPr>
+          <p:cNvPr id="9" name="Rectangle 7">
+            <a:extLst>
+              <a:ext uri="{FF2B5EF4-FFF2-40B4-BE49-F238E27FC236}">
+                <a16:creationId xmlns:a16="http://schemas.microsoft.com/office/drawing/2014/main" id="{E87A2CA3-441E-57B5-F3A2-351D6BD0EDEB}"/>
+              </a:ext>
+            </a:extLst>
+          </p:cNvPr>
+          <p:cNvSpPr>
+            <a:spLocks noChangeArrowheads="1"/>
+          </p:cNvSpPr>
+          <p:nvPr/>
+        </p:nvSpPr>
+        <p:spPr bwMode="auto">
+          <a:xfrm>
+            <a:off x="152400" y="152400"/>
+            <a:ext cx="12192000" cy="0"/>
+          </a:xfrm>
+          <a:prstGeom prst="rect">
+            <a:avLst/>
+          </a:prstGeom>
+          <a:noFill/>
+          <a:ln>
+            <a:noFill/>
+          </a:ln>
+          <a:effectLst/>
+          <a:extLst>
+            <a:ext uri="{909E8E84-426E-40DD-AFC4-6F175D3DCCD1}">
+              <a14:hiddenFill xmlns:a14="http://schemas.microsoft.com/office/drawing/2010/main">
+                <a:solidFill>
+                  <a:schemeClr val="accent1"/>
+                </a:solidFill>
+              </a14:hiddenFill>
+            </a:ext>
+            <a:ext uri="{91240B29-F687-4F45-9708-019B960494DF}">
+              <a14:hiddenLine xmlns:a14="http://schemas.microsoft.com/office/drawing/2010/main" w="9525">
+                <a:solidFill>
+                  <a:schemeClr val="tx1"/>
+                </a:solidFill>
+                <a:miter lim="800000"/>
+                <a:headEnd/>
+                <a:tailEnd/>
+              </a14:hiddenLine>
+            </a:ext>
+            <a:ext uri="{AF507438-7753-43E0-B8FC-AC1667EBCBE1}">
+              <a14:hiddenEffects xmlns:a14="http://schemas.microsoft.com/office/drawing/2010/main">
+                <a:effectLst>
+                  <a:outerShdw dist="35921" dir="2700000" algn="ctr" rotWithShape="0">
+                    <a:schemeClr val="bg2"/>
+                  </a:outerShdw>
+                </a:effectLst>
+              </a14:hiddenEffects>
+            </a:ext>
+          </a:extLst>
+        </p:spPr>
+        <p:txBody>
+          <a:bodyPr vert="horz" wrap="none" lIns="0" tIns="0" rIns="0" bIns="0" numCol="1" anchor="ctr" anchorCtr="0" compatLnSpc="1">
+            <a:prstTxWarp prst="textNoShape">
+              <a:avLst/>
+            </a:prstTxWarp>
+            <a:spAutoFit/>
+          </a:bodyPr>
+          <a:lstStyle>
+            <a:lvl1pPr eaLnBrk="0" fontAlgn="base" hangingPunct="0">
+              <a:spcBef>
+                <a:spcPct val="0"/>
+              </a:spcBef>
+              <a:spcAft>
+                <a:spcPct val="0"/>
+              </a:spcAft>
+              <a:defRPr>
+                <a:solidFill>
+                  <a:schemeClr val="tx1"/>
+                </a:solidFill>
+                <a:latin typeface="Arial" panose="020B0604020202020204" pitchFamily="34" charset="0"/>
+              </a:defRPr>
+            </a:lvl1pPr>
+            <a:lvl2pPr eaLnBrk="0" fontAlgn="base" hangingPunct="0">
+              <a:spcBef>
+                <a:spcPct val="0"/>
+              </a:spcBef>
+              <a:spcAft>
+                <a:spcPct val="0"/>
+              </a:spcAft>
+              <a:defRPr>
+                <a:solidFill>
+                  <a:schemeClr val="tx1"/>
+                </a:solidFill>
+                <a:latin typeface="Arial" panose="020B0604020202020204" pitchFamily="34" charset="0"/>
+              </a:defRPr>
+            </a:lvl2pPr>
+            <a:lvl3pPr eaLnBrk="0" fontAlgn="base" hangingPunct="0">
+              <a:spcBef>
+                <a:spcPct val="0"/>
+              </a:spcBef>
+              <a:spcAft>
+                <a:spcPct val="0"/>
+              </a:spcAft>
+              <a:defRPr>
+                <a:solidFill>
+                  <a:schemeClr val="tx1"/>
+                </a:solidFill>
+                <a:latin typeface="Arial" panose="020B0604020202020204" pitchFamily="34" charset="0"/>
+              </a:defRPr>
+            </a:lvl3pPr>
+            <a:lvl4pPr eaLnBrk="0" fontAlgn="base" hangingPunct="0">
+              <a:spcBef>
+                <a:spcPct val="0"/>
+              </a:spcBef>
+              <a:spcAft>
+                <a:spcPct val="0"/>
+              </a:spcAft>
+              <a:defRPr>
+                <a:solidFill>
+                  <a:schemeClr val="tx1"/>
+                </a:solidFill>
+                <a:latin typeface="Arial" panose="020B0604020202020204" pitchFamily="34" charset="0"/>
+              </a:defRPr>
+            </a:lvl4pPr>
+            <a:lvl5pPr eaLnBrk="0" fontAlgn="base" hangingPunct="0">
+              <a:spcBef>
+                <a:spcPct val="0"/>
+              </a:spcBef>
+              <a:spcAft>
+                <a:spcPct val="0"/>
+              </a:spcAft>
+              <a:defRPr>
+                <a:solidFill>
+                  <a:schemeClr val="tx1"/>
+                </a:solidFill>
+                <a:latin typeface="Arial" panose="020B0604020202020204" pitchFamily="34" charset="0"/>
+              </a:defRPr>
+            </a:lvl5pPr>
+            <a:lvl6pPr eaLnBrk="0" fontAlgn="base" hangingPunct="0">
+              <a:spcBef>
+                <a:spcPct val="0"/>
+              </a:spcBef>
+              <a:spcAft>
+                <a:spcPct val="0"/>
+              </a:spcAft>
+              <a:defRPr>
+                <a:solidFill>
+                  <a:schemeClr val="tx1"/>
+                </a:solidFill>
+                <a:latin typeface="Arial" panose="020B0604020202020204" pitchFamily="34" charset="0"/>
+              </a:defRPr>
+            </a:lvl6pPr>
+            <a:lvl7pPr eaLnBrk="0" fontAlgn="base" hangingPunct="0">
+              <a:spcBef>
+                <a:spcPct val="0"/>
+              </a:spcBef>
+              <a:spcAft>
+                <a:spcPct val="0"/>
+              </a:spcAft>
+              <a:defRPr>
+                <a:solidFill>
+                  <a:schemeClr val="tx1"/>
+                </a:solidFill>
+                <a:latin typeface="Arial" panose="020B0604020202020204" pitchFamily="34" charset="0"/>
+              </a:defRPr>
+            </a:lvl7pPr>
+            <a:lvl8pPr eaLnBrk="0" fontAlgn="base" hangingPunct="0">
+              <a:spcBef>
+                <a:spcPct val="0"/>
+              </a:spcBef>
+              <a:spcAft>
+                <a:spcPct val="0"/>
+              </a:spcAft>
+              <a:defRPr>
+                <a:solidFill>
+                  <a:schemeClr val="tx1"/>
+                </a:solidFill>
+                <a:latin typeface="Arial" panose="020B0604020202020204" pitchFamily="34" charset="0"/>
+              </a:defRPr>
+            </a:lvl8pPr>
+            <a:lvl9pPr eaLnBrk="0" fontAlgn="base" hangingPunct="0">
+              <a:spcBef>
+                <a:spcPct val="0"/>
+              </a:spcBef>
+              <a:spcAft>
+                <a:spcPct val="0"/>
+              </a:spcAft>
+              <a:defRPr>
+                <a:solidFill>
+                  <a:schemeClr val="tx1"/>
+                </a:solidFill>
+                <a:latin typeface="Arial" panose="020B0604020202020204" pitchFamily="34" charset="0"/>
+              </a:defRPr>
+            </a:lvl9pPr>
+          </a:lstStyle>
+          <a:p>
+            <a:pPr marL="0" marR="0" lvl="0" indent="0" algn="l" defTabSz="914400" rtl="0" eaLnBrk="0" fontAlgn="base" latinLnBrk="0" hangingPunct="0">
+              <a:lnSpc>
+                <a:spcPct val="100000"/>
+              </a:lnSpc>
+              <a:spcBef>
+                <a:spcPct val="0"/>
+              </a:spcBef>
+              <a:spcAft>
+                <a:spcPct val="0"/>
+              </a:spcAft>
+              <a:buClrTx/>
+              <a:buSzTx/>
+              <a:buFontTx/>
+              <a:buAutoNum type="arabicPeriod" startAt="4"/>
+              <a:tabLst/>
+            </a:pPr>
+            <a:r>
+              <a:rPr kumimoji="0" lang="de-DE" altLang="de-DE" sz="1200" b="0" i="0" u="none" strike="noStrike" cap="none" normalizeH="0" baseline="0">
+                <a:ln>
+                  <a:noFill/>
+                </a:ln>
+                <a:solidFill>
+                  <a:schemeClr val="tx1"/>
+                </a:solidFill>
+                <a:effectLst/>
+                <a:latin typeface="Arial" panose="020B0604020202020204" pitchFamily="34" charset="0"/>
+                <a:ea typeface="inherit"/>
+              </a:rPr>
+              <a:t>[12:07]</a:t>
+            </a:r>
+          </a:p>
+          <a:p>
+            <a:pPr marL="0" marR="0" lvl="0" indent="0" algn="l" defTabSz="914400" rtl="0" eaLnBrk="0" fontAlgn="base" latinLnBrk="0" hangingPunct="0">
+              <a:lnSpc>
+                <a:spcPct val="100000"/>
+              </a:lnSpc>
+              <a:spcBef>
+                <a:spcPct val="0"/>
+              </a:spcBef>
+              <a:spcAft>
+                <a:spcPct val="0"/>
+              </a:spcAft>
+              <a:buClrTx/>
+              <a:buSzTx/>
+              <a:buFontTx/>
+              <a:buNone/>
+              <a:tabLst/>
+            </a:pPr>
+            <a:r>
+              <a:rPr kumimoji="0" lang="de-DE" altLang="de-DE" sz="1200" b="0" i="0" u="none" strike="noStrike" cap="none" normalizeH="0" baseline="0">
+                <a:ln>
+                  <a:noFill/>
+                </a:ln>
+                <a:solidFill>
+                  <a:schemeClr val="tx1"/>
+                </a:solidFill>
+                <a:effectLst/>
+                <a:latin typeface="Arial" panose="020B0604020202020204" pitchFamily="34" charset="0"/>
+                <a:ea typeface="inherit"/>
+              </a:rPr>
+              <a:t>  </a:t>
+            </a:r>
+            <a:r>
+              <a:rPr kumimoji="0" lang="de-DE" altLang="de-DE" sz="1900" b="0" i="0" u="none" strike="noStrike" cap="none" normalizeH="0" baseline="0">
+                <a:ln>
+                  <a:noFill/>
+                </a:ln>
+                <a:solidFill>
+                  <a:schemeClr val="tx1"/>
+                </a:solidFill>
+                <a:effectLst/>
+                <a:latin typeface="Arial" panose="020B0604020202020204" pitchFamily="34" charset="0"/>
+                <a:ea typeface="inherit"/>
+              </a:rPr>
+              <a:t>     </a:t>
+            </a:r>
+            <a:endParaRPr kumimoji="0" lang="de-DE" altLang="de-DE" sz="1200" b="0" i="0" u="none" strike="noStrike" cap="none" normalizeH="0" baseline="0">
+              <a:ln>
+                <a:noFill/>
+              </a:ln>
+              <a:solidFill>
+                <a:schemeClr val="tx1"/>
+              </a:solidFill>
+              <a:effectLst/>
+              <a:latin typeface="Arial" panose="020B0604020202020204" pitchFamily="34" charset="0"/>
+              <a:ea typeface="gg sans"/>
+            </a:endParaRPr>
+          </a:p>
+          <a:p>
+            <a:pPr marL="0" marR="0" lvl="0" indent="0" algn="l" defTabSz="914400" rtl="0" eaLnBrk="0" fontAlgn="base" latinLnBrk="0" hangingPunct="0">
+              <a:lnSpc>
+                <a:spcPct val="100000"/>
+              </a:lnSpc>
+              <a:spcBef>
+                <a:spcPct val="0"/>
+              </a:spcBef>
+              <a:spcAft>
+                <a:spcPct val="0"/>
+              </a:spcAft>
+              <a:buClrTx/>
+              <a:buSzTx/>
+              <a:buFontTx/>
+              <a:buNone/>
+              <a:tabLst/>
+            </a:pPr>
+            <a:endParaRPr kumimoji="0" lang="de-DE" altLang="de-DE" sz="1800" b="0" i="0" u="none" strike="noStrike" cap="none" normalizeH="0" baseline="0">
+              <a:ln>
+                <a:noFill/>
+              </a:ln>
+              <a:solidFill>
+                <a:schemeClr val="tx1"/>
+              </a:solidFill>
+              <a:effectLst/>
+              <a:latin typeface="Arial" panose="020B0604020202020204" pitchFamily="34" charset="0"/>
+            </a:endParaRPr>
+          </a:p>
+        </p:txBody>
+      </p:sp>
+      <p:sp>
+        <p:nvSpPr>
+          <p:cNvPr id="10" name="AutoShape 8" descr="Bild">
+            <a:extLst>
+              <a:ext uri="{FF2B5EF4-FFF2-40B4-BE49-F238E27FC236}">
+                <a16:creationId xmlns:a16="http://schemas.microsoft.com/office/drawing/2014/main" id="{9CA72BCA-7E3A-0488-5E5B-0B7C16771254}"/>
+              </a:ext>
+            </a:extLst>
+          </p:cNvPr>
+          <p:cNvSpPr>
+            <a:spLocks noChangeAspect="1" noChangeArrowheads="1"/>
+          </p:cNvSpPr>
+          <p:nvPr/>
+        </p:nvSpPr>
+        <p:spPr bwMode="auto">
+          <a:xfrm>
+            <a:off x="238125" y="-38100"/>
+            <a:ext cx="304800" cy="304800"/>
+          </a:xfrm>
+          <a:prstGeom prst="rect">
+            <a:avLst/>
+          </a:prstGeom>
+          <a:noFill/>
+          <a:extLst>
+            <a:ext uri="{909E8E84-426E-40DD-AFC4-6F175D3DCCD1}">
+              <a14:hiddenFill xmlns:a14="http://schemas.microsoft.com/office/drawing/2010/main">
+                <a:solidFill>
+                  <a:srgbClr val="FFFFFF"/>
+                </a:solidFill>
+              </a14:hiddenFill>
+            </a:ext>
+          </a:extLst>
+        </p:spPr>
+        <p:txBody>
+          <a:bodyPr vert="horz" wrap="square" lIns="91440" tIns="45720" rIns="91440" bIns="45720" numCol="1" anchor="t" anchorCtr="0" compatLnSpc="1">
+            <a:prstTxWarp prst="textNoShape">
+              <a:avLst/>
+            </a:prstTxWarp>
+          </a:bodyPr>
+          <a:lstStyle/>
+          <a:p>
+            <a:endParaRPr lang="en-US"/>
+          </a:p>
+        </p:txBody>
+      </p:sp>
+      <p:sp>
+        <p:nvSpPr>
+          <p:cNvPr id="11" name="AutoShape 4" descr="Bild">
+            <a:extLst>
+              <a:ext uri="{FF2B5EF4-FFF2-40B4-BE49-F238E27FC236}">
+                <a16:creationId xmlns:a16="http://schemas.microsoft.com/office/drawing/2014/main" id="{89FAA9BB-89F7-05BC-FD3B-DDA66DF4CEDB}"/>
+              </a:ext>
+            </a:extLst>
+          </p:cNvPr>
+          <p:cNvSpPr>
+            <a:spLocks noChangeAspect="1" noChangeArrowheads="1"/>
+          </p:cNvSpPr>
+          <p:nvPr/>
+        </p:nvSpPr>
+        <p:spPr bwMode="auto">
+          <a:xfrm>
+            <a:off x="238125" y="-38100"/>
+            <a:ext cx="304800" cy="304800"/>
+          </a:xfrm>
+          <a:prstGeom prst="rect">
+            <a:avLst/>
+          </a:prstGeom>
+          <a:noFill/>
+          <a:extLst>
+            <a:ext uri="{909E8E84-426E-40DD-AFC4-6F175D3DCCD1}">
+              <a14:hiddenFill xmlns:a14="http://schemas.microsoft.com/office/drawing/2010/main">
+                <a:solidFill>
+                  <a:srgbClr val="FFFFFF"/>
+                </a:solidFill>
+              </a14:hiddenFill>
+            </a:ext>
+          </a:extLst>
+        </p:spPr>
+        <p:txBody>
+          <a:bodyPr vert="horz" wrap="square" lIns="91440" tIns="45720" rIns="91440" bIns="45720" numCol="1" anchor="t" anchorCtr="0" compatLnSpc="1">
+            <a:prstTxWarp prst="textNoShape">
+              <a:avLst/>
+            </a:prstTxWarp>
+          </a:bodyPr>
+          <a:lstStyle/>
+          <a:p>
+            <a:endParaRPr lang="en-US"/>
+          </a:p>
+        </p:txBody>
+      </p:sp>
+      <p:sp>
+        <p:nvSpPr>
+          <p:cNvPr id="12" name="AutoShape 2" descr="Bild">
+            <a:extLst>
+              <a:ext uri="{FF2B5EF4-FFF2-40B4-BE49-F238E27FC236}">
+                <a16:creationId xmlns:a16="http://schemas.microsoft.com/office/drawing/2014/main" id="{A63FA266-5500-71CF-0D07-DAFE23CE5E20}"/>
+              </a:ext>
+            </a:extLst>
+          </p:cNvPr>
+          <p:cNvSpPr>
+            <a:spLocks noChangeAspect="1" noChangeArrowheads="1"/>
+          </p:cNvSpPr>
+          <p:nvPr/>
+        </p:nvSpPr>
+        <p:spPr bwMode="auto">
+          <a:xfrm>
+            <a:off x="238125" y="98425"/>
+            <a:ext cx="304800" cy="304800"/>
+          </a:xfrm>
+          <a:prstGeom prst="rect">
+            <a:avLst/>
+          </a:prstGeom>
+          <a:noFill/>
+          <a:extLst>
+            <a:ext uri="{909E8E84-426E-40DD-AFC4-6F175D3DCCD1}">
+              <a14:hiddenFill xmlns:a14="http://schemas.microsoft.com/office/drawing/2010/main">
+                <a:solidFill>
+                  <a:srgbClr val="FFFFFF"/>
+                </a:solidFill>
+              </a14:hiddenFill>
+            </a:ext>
+          </a:extLst>
+        </p:spPr>
+        <p:txBody>
+          <a:bodyPr vert="horz" wrap="square" lIns="91440" tIns="45720" rIns="91440" bIns="45720" numCol="1" anchor="t" anchorCtr="0" compatLnSpc="1">
+            <a:prstTxWarp prst="textNoShape">
+              <a:avLst/>
+            </a:prstTxWarp>
+          </a:bodyPr>
+          <a:lstStyle/>
+          <a:p>
+            <a:endParaRPr lang="en-US"/>
+          </a:p>
+        </p:txBody>
+      </p:sp>
+      <p:sp>
+        <p:nvSpPr>
+          <p:cNvPr id="13" name="AutoShape 6" descr="Bild">
+            <a:extLst>
+              <a:ext uri="{FF2B5EF4-FFF2-40B4-BE49-F238E27FC236}">
+                <a16:creationId xmlns:a16="http://schemas.microsoft.com/office/drawing/2014/main" id="{C43FA505-8845-937B-2ED2-7CB106C042DF}"/>
+              </a:ext>
+            </a:extLst>
+          </p:cNvPr>
+          <p:cNvSpPr>
+            <a:spLocks noChangeAspect="1" noChangeArrowheads="1"/>
+          </p:cNvSpPr>
+          <p:nvPr/>
+        </p:nvSpPr>
+        <p:spPr bwMode="auto">
+          <a:xfrm>
+            <a:off x="238125" y="-38100"/>
+            <a:ext cx="304800" cy="304800"/>
+          </a:xfrm>
+          <a:prstGeom prst="rect">
+            <a:avLst/>
+          </a:prstGeom>
+          <a:noFill/>
+          <a:extLst>
+            <a:ext uri="{909E8E84-426E-40DD-AFC4-6F175D3DCCD1}">
+              <a14:hiddenFill xmlns:a14="http://schemas.microsoft.com/office/drawing/2010/main">
+                <a:solidFill>
+                  <a:srgbClr val="FFFFFF"/>
+                </a:solidFill>
+              </a14:hiddenFill>
+            </a:ext>
+          </a:extLst>
+        </p:spPr>
+        <p:txBody>
+          <a:bodyPr vert="horz" wrap="square" lIns="91440" tIns="45720" rIns="91440" bIns="45720" numCol="1" anchor="t" anchorCtr="0" compatLnSpc="1">
+            <a:prstTxWarp prst="textNoShape">
+              <a:avLst/>
+            </a:prstTxWarp>
+          </a:bodyPr>
+          <a:lstStyle/>
+          <a:p>
+            <a:endParaRPr lang="en-US"/>
+          </a:p>
+        </p:txBody>
+      </p:sp>
+      <p:sp>
+        <p:nvSpPr>
+          <p:cNvPr id="16" name="AutoShape 12">
+            <a:extLst>
+              <a:ext uri="{FF2B5EF4-FFF2-40B4-BE49-F238E27FC236}">
+                <a16:creationId xmlns:a16="http://schemas.microsoft.com/office/drawing/2014/main" id="{213E9F4E-9A4F-F9D0-23FB-208BF350189A}"/>
+              </a:ext>
+            </a:extLst>
+          </p:cNvPr>
+          <p:cNvSpPr>
+            <a:spLocks noChangeAspect="1" noChangeArrowheads="1"/>
+          </p:cNvSpPr>
+          <p:nvPr/>
+        </p:nvSpPr>
+        <p:spPr bwMode="auto">
+          <a:xfrm>
+            <a:off x="5943600" y="3276600"/>
+            <a:ext cx="304800" cy="304800"/>
+          </a:xfrm>
+          <a:prstGeom prst="rect">
+            <a:avLst/>
+          </a:prstGeom>
+          <a:noFill/>
+          <a:extLst>
+            <a:ext uri="{909E8E84-426E-40DD-AFC4-6F175D3DCCD1}">
+              <a14:hiddenFill xmlns:a14="http://schemas.microsoft.com/office/drawing/2010/main">
+                <a:solidFill>
+                  <a:srgbClr val="FFFFFF"/>
+                </a:solidFill>
+              </a14:hiddenFill>
+            </a:ext>
+          </a:extLst>
+        </p:spPr>
+        <p:txBody>
+          <a:bodyPr vert="horz" wrap="square" lIns="91440" tIns="45720" rIns="91440" bIns="45720" numCol="1" anchor="t" anchorCtr="0" compatLnSpc="1">
+            <a:prstTxWarp prst="textNoShape">
+              <a:avLst/>
+            </a:prstTxWarp>
+          </a:bodyPr>
+          <a:lstStyle/>
+          <a:p>
+            <a:endParaRPr lang="en-US"/>
+          </a:p>
+        </p:txBody>
+      </p:sp>
+      <p:sp>
+        <p:nvSpPr>
+          <p:cNvPr id="19" name="AutoShape 14">
+            <a:extLst>
+              <a:ext uri="{FF2B5EF4-FFF2-40B4-BE49-F238E27FC236}">
+                <a16:creationId xmlns:a16="http://schemas.microsoft.com/office/drawing/2014/main" id="{C7F24A98-4F0C-97CA-D353-988535C9DDF8}"/>
+              </a:ext>
+            </a:extLst>
+          </p:cNvPr>
+          <p:cNvSpPr>
+            <a:spLocks noChangeAspect="1" noChangeArrowheads="1"/>
+          </p:cNvSpPr>
+          <p:nvPr/>
+        </p:nvSpPr>
+        <p:spPr bwMode="auto">
+          <a:xfrm>
+            <a:off x="6096000" y="3429000"/>
+            <a:ext cx="304800" cy="304800"/>
+          </a:xfrm>
+          <a:prstGeom prst="rect">
+            <a:avLst/>
+          </a:prstGeom>
+          <a:noFill/>
+          <a:extLst>
+            <a:ext uri="{909E8E84-426E-40DD-AFC4-6F175D3DCCD1}">
+              <a14:hiddenFill xmlns:a14="http://schemas.microsoft.com/office/drawing/2010/main">
+                <a:solidFill>
+                  <a:srgbClr val="FFFFFF"/>
+                </a:solidFill>
+              </a14:hiddenFill>
+            </a:ext>
+          </a:extLst>
+        </p:spPr>
+        <p:txBody>
+          <a:bodyPr vert="horz" wrap="square" lIns="91440" tIns="45720" rIns="91440" bIns="45720" numCol="1" anchor="t" anchorCtr="0" compatLnSpc="1">
+            <a:prstTxWarp prst="textNoShape">
+              <a:avLst/>
+            </a:prstTxWarp>
+          </a:bodyPr>
+          <a:lstStyle/>
+          <a:p>
+            <a:endParaRPr lang="en-US"/>
+          </a:p>
+        </p:txBody>
+      </p:sp>
+      <p:pic>
+        <p:nvPicPr>
+          <p:cNvPr id="22" name="Inhaltsplatzhalter 21">
+            <a:extLst>
+              <a:ext uri="{FF2B5EF4-FFF2-40B4-BE49-F238E27FC236}">
+                <a16:creationId xmlns:a16="http://schemas.microsoft.com/office/drawing/2014/main" id="{8D1769F9-CFB7-09AE-C20D-AE58972FB007}"/>
+              </a:ext>
+            </a:extLst>
+          </p:cNvPr>
+          <p:cNvPicPr>
+            <a:picLocks noGrp="1" noChangeAspect="1"/>
+          </p:cNvPicPr>
+          <p:nvPr>
+            <p:ph idx="1"/>
+          </p:nvPr>
+        </p:nvPicPr>
+        <p:blipFill>
+          <a:blip r:embed="rId2"/>
+          <a:stretch>
+            <a:fillRect/>
+          </a:stretch>
+        </p:blipFill>
+        <p:spPr>
+          <a:xfrm>
+            <a:off x="335360" y="2308846"/>
+            <a:ext cx="4734194" cy="1847963"/>
+          </a:xfrm>
+          <a:prstGeom prst="rect">
+            <a:avLst/>
+          </a:prstGeom>
+        </p:spPr>
+      </p:pic>
+      <p:pic>
+        <p:nvPicPr>
+          <p:cNvPr id="23" name="Grafik 22">
+            <a:extLst>
+              <a:ext uri="{FF2B5EF4-FFF2-40B4-BE49-F238E27FC236}">
+                <a16:creationId xmlns:a16="http://schemas.microsoft.com/office/drawing/2014/main" id="{5FF18EBA-2413-4216-A550-D907745A418A}"/>
+              </a:ext>
+            </a:extLst>
+          </p:cNvPr>
+          <p:cNvPicPr>
+            <a:picLocks noChangeAspect="1"/>
+          </p:cNvPicPr>
+          <p:nvPr/>
+        </p:nvPicPr>
+        <p:blipFill>
+          <a:blip r:embed="rId3"/>
+          <a:stretch>
+            <a:fillRect/>
+          </a:stretch>
+        </p:blipFill>
+        <p:spPr>
+          <a:xfrm>
+            <a:off x="5591944" y="2141709"/>
+            <a:ext cx="5613276" cy="2164597"/>
+          </a:xfrm>
+          <a:prstGeom prst="rect">
+            <a:avLst/>
+          </a:prstGeom>
+        </p:spPr>
+      </p:pic>
+      <p:pic>
+        <p:nvPicPr>
+          <p:cNvPr id="24" name="Grafik 23">
+            <a:extLst>
+              <a:ext uri="{FF2B5EF4-FFF2-40B4-BE49-F238E27FC236}">
+                <a16:creationId xmlns:a16="http://schemas.microsoft.com/office/drawing/2014/main" id="{562F4734-CDE8-4985-A2D0-BD31DD9C6395}"/>
+              </a:ext>
+            </a:extLst>
+          </p:cNvPr>
+          <p:cNvPicPr>
+            <a:picLocks noChangeAspect="1"/>
+          </p:cNvPicPr>
+          <p:nvPr/>
+        </p:nvPicPr>
+        <p:blipFill>
+          <a:blip r:embed="rId4"/>
+          <a:stretch>
+            <a:fillRect/>
+          </a:stretch>
+        </p:blipFill>
+        <p:spPr>
+          <a:xfrm>
+            <a:off x="6600056" y="4437112"/>
+            <a:ext cx="4424207" cy="1723151"/>
+          </a:xfrm>
+          <a:prstGeom prst="rect">
+            <a:avLst/>
+          </a:prstGeom>
+        </p:spPr>
+      </p:pic>
+      <p:pic>
+        <p:nvPicPr>
+          <p:cNvPr id="25" name="Grafik 24">
+            <a:extLst>
+              <a:ext uri="{FF2B5EF4-FFF2-40B4-BE49-F238E27FC236}">
+                <a16:creationId xmlns:a16="http://schemas.microsoft.com/office/drawing/2014/main" id="{D74F0049-CC50-7075-92B7-08941E67F100}"/>
+              </a:ext>
+            </a:extLst>
+          </p:cNvPr>
+          <p:cNvPicPr>
+            <a:picLocks noChangeAspect="1"/>
+          </p:cNvPicPr>
+          <p:nvPr/>
+        </p:nvPicPr>
+        <p:blipFill>
+          <a:blip r:embed="rId5"/>
+          <a:stretch>
+            <a:fillRect/>
+          </a:stretch>
+        </p:blipFill>
+        <p:spPr>
+          <a:xfrm>
+            <a:off x="361137" y="4367937"/>
+            <a:ext cx="4533156" cy="1748080"/>
+          </a:xfrm>
+          <a:prstGeom prst="rect">
+            <a:avLst/>
+          </a:prstGeom>
+        </p:spPr>
+      </p:pic>
+    </p:spTree>
+    <p:extLst>
+      <p:ext uri="{BB962C8B-B14F-4D97-AF65-F5344CB8AC3E}">
+        <p14:creationId xmlns:p14="http://schemas.microsoft.com/office/powerpoint/2010/main" val="566942275"/>
+      </p:ext>
+    </p:extLst>
+  </p:cSld>
+  <p:clrMapOvr>
+    <a:masterClrMapping/>
+  </p:clrMapOvr>
+</p:sld>
+</file>
+
+<file path=ppt/slides/slide15.xml><?xml version="1.0" encoding="utf-8"?>
+<p:sld xmlns:a="http://schemas.openxmlformats.org/drawingml/2006/main" xmlns:r="http://schemas.openxmlformats.org/officeDocument/2006/relationships" xmlns:p="http://schemas.openxmlformats.org/presentationml/2006/main">
+  <p:cSld>
+    <p:spTree>
+      <p:nvGrpSpPr>
+        <p:cNvPr id="1" name="">
+          <a:extLst>
+            <a:ext uri="{FF2B5EF4-FFF2-40B4-BE49-F238E27FC236}">
+              <a16:creationId xmlns:a16="http://schemas.microsoft.com/office/drawing/2014/main" id="{D45C64B5-9FD4-F8E7-7219-B07395204F03}"/>
+            </a:ext>
+          </a:extLst>
+        </p:cNvPr>
+        <p:cNvGrpSpPr/>
+        <p:nvPr/>
+      </p:nvGrpSpPr>
+      <p:grpSpPr>
+        <a:xfrm>
+          <a:off x="0" y="0"/>
+          <a:ext cx="0" cy="0"/>
+          <a:chOff x="0" y="0"/>
+          <a:chExt cx="0" cy="0"/>
+        </a:xfrm>
+      </p:grpSpPr>
+      <p:sp>
+        <p:nvSpPr>
+          <p:cNvPr id="2" name="Titel 1">
+            <a:extLst>
+              <a:ext uri="{FF2B5EF4-FFF2-40B4-BE49-F238E27FC236}">
+                <a16:creationId xmlns:a16="http://schemas.microsoft.com/office/drawing/2014/main" id="{C8E365F5-5159-78DB-9095-F1253763348D}"/>
+              </a:ext>
+            </a:extLst>
+          </p:cNvPr>
+          <p:cNvSpPr>
+            <a:spLocks noGrp="1"/>
+          </p:cNvSpPr>
+          <p:nvPr>
+            <p:ph type="title"/>
+          </p:nvPr>
+        </p:nvSpPr>
+        <p:spPr>
+          <a:xfrm>
+            <a:off x="408076" y="1170372"/>
+            <a:ext cx="11012400" cy="1477328"/>
+          </a:xfrm>
+        </p:spPr>
+        <p:txBody>
+          <a:bodyPr/>
+          <a:lstStyle/>
+          <a:p>
+            <a:r>
+              <a:rPr lang="en-GB" dirty="0"/>
+              <a:t>The effects of convergence parameters</a:t>
+            </a:r>
+            <a:br>
+              <a:rPr lang="en-GB" dirty="0"/>
+            </a:br>
+            <a:r>
+              <a:rPr lang="en-GB" dirty="0"/>
+              <a:t>Trust measurement More: Q=1e-4 R=0.001</a:t>
+            </a:r>
+            <a:br>
+              <a:rPr lang="en-GB" i="1" dirty="0">
+                <a:solidFill>
+                  <a:schemeClr val="bg1">
+                    <a:lumMod val="50000"/>
+                  </a:schemeClr>
+                </a:solidFill>
+              </a:rPr>
+            </a:br>
+            <a:endParaRPr lang="en-US" dirty="0"/>
+          </a:p>
+        </p:txBody>
+      </p:sp>
+      <p:sp>
+        <p:nvSpPr>
+          <p:cNvPr id="4" name="Datumsplatzhalter 3">
+            <a:extLst>
+              <a:ext uri="{FF2B5EF4-FFF2-40B4-BE49-F238E27FC236}">
+                <a16:creationId xmlns:a16="http://schemas.microsoft.com/office/drawing/2014/main" id="{920576CF-921D-2429-3B5B-EEB803F56EC9}"/>
+              </a:ext>
+            </a:extLst>
+          </p:cNvPr>
+          <p:cNvSpPr>
+            <a:spLocks noGrp="1"/>
+          </p:cNvSpPr>
+          <p:nvPr>
+            <p:ph type="dt" sz="half" idx="10"/>
+          </p:nvPr>
+        </p:nvSpPr>
+        <p:spPr/>
+        <p:txBody>
+          <a:bodyPr/>
+          <a:lstStyle/>
+          <a:p>
+            <a:fld id="{B2DD1E4E-1107-499B-BB00-8AA0260A0EFB}" type="datetime1">
+              <a:rPr lang="de-DE" smtClean="0"/>
+              <a:t>07.07.2025</a:t>
+            </a:fld>
+            <a:endParaRPr lang="de-CH" dirty="0"/>
+          </a:p>
+        </p:txBody>
+      </p:sp>
+      <p:sp>
+        <p:nvSpPr>
+          <p:cNvPr id="5" name="Fußzeilenplatzhalter 4">
+            <a:extLst>
+              <a:ext uri="{FF2B5EF4-FFF2-40B4-BE49-F238E27FC236}">
+                <a16:creationId xmlns:a16="http://schemas.microsoft.com/office/drawing/2014/main" id="{F88F16E8-0591-BB04-6B4F-57C1648B8846}"/>
+              </a:ext>
+            </a:extLst>
+          </p:cNvPr>
+          <p:cNvSpPr>
+            <a:spLocks noGrp="1"/>
+          </p:cNvSpPr>
+          <p:nvPr>
+            <p:ph type="ftr" sz="quarter" idx="11"/>
+          </p:nvPr>
+        </p:nvSpPr>
+        <p:spPr/>
+        <p:txBody>
+          <a:bodyPr/>
+          <a:lstStyle/>
+          <a:p>
+            <a:r>
+              <a:rPr lang="en-US"/>
+              <a:t>Institute For Sensor and Electronics</a:t>
+            </a:r>
+            <a:endParaRPr lang="de-CH" dirty="0"/>
+          </a:p>
+        </p:txBody>
+      </p:sp>
+      <p:sp>
+        <p:nvSpPr>
+          <p:cNvPr id="6" name="Foliennummernplatzhalter 5">
+            <a:extLst>
+              <a:ext uri="{FF2B5EF4-FFF2-40B4-BE49-F238E27FC236}">
+                <a16:creationId xmlns:a16="http://schemas.microsoft.com/office/drawing/2014/main" id="{46C9FB1A-10E3-3C08-F685-E8DFDD10EE20}"/>
+              </a:ext>
+            </a:extLst>
+          </p:cNvPr>
+          <p:cNvSpPr>
+            <a:spLocks noGrp="1"/>
+          </p:cNvSpPr>
+          <p:nvPr>
+            <p:ph type="sldNum" sz="quarter" idx="12"/>
+          </p:nvPr>
+        </p:nvSpPr>
+        <p:spPr/>
+        <p:txBody>
+          <a:bodyPr/>
+          <a:lstStyle/>
+          <a:p>
+            <a:fld id="{442AD375-037F-43D0-B059-5172DA06796A}" type="slidenum">
+              <a:rPr lang="de-CH" smtClean="0"/>
+              <a:pPr/>
+              <a:t>15</a:t>
+            </a:fld>
+            <a:endParaRPr lang="de-CH" dirty="0"/>
+          </a:p>
+        </p:txBody>
+      </p:sp>
+      <p:sp>
+        <p:nvSpPr>
+          <p:cNvPr id="7" name="Rectangle 3">
+            <a:extLst>
+              <a:ext uri="{FF2B5EF4-FFF2-40B4-BE49-F238E27FC236}">
+                <a16:creationId xmlns:a16="http://schemas.microsoft.com/office/drawing/2014/main" id="{D80133CB-EA64-1A02-F9E0-170381A6C72D}"/>
+              </a:ext>
+            </a:extLst>
+          </p:cNvPr>
+          <p:cNvSpPr>
+            <a:spLocks noChangeArrowheads="1"/>
+          </p:cNvSpPr>
+          <p:nvPr/>
+        </p:nvSpPr>
+        <p:spPr bwMode="auto">
+          <a:xfrm>
+            <a:off x="152400" y="152400"/>
+            <a:ext cx="12192000" cy="0"/>
+          </a:xfrm>
+          <a:prstGeom prst="rect">
+            <a:avLst/>
+          </a:prstGeom>
+          <a:noFill/>
+          <a:ln>
+            <a:noFill/>
+          </a:ln>
+          <a:effectLst/>
+          <a:extLst>
+            <a:ext uri="{909E8E84-426E-40DD-AFC4-6F175D3DCCD1}">
+              <a14:hiddenFill xmlns:a14="http://schemas.microsoft.com/office/drawing/2010/main">
+                <a:solidFill>
+                  <a:schemeClr val="accent1"/>
+                </a:solidFill>
+              </a14:hiddenFill>
+            </a:ext>
+            <a:ext uri="{91240B29-F687-4F45-9708-019B960494DF}">
+              <a14:hiddenLine xmlns:a14="http://schemas.microsoft.com/office/drawing/2010/main" w="9525">
+                <a:solidFill>
+                  <a:schemeClr val="tx1"/>
+                </a:solidFill>
+                <a:miter lim="800000"/>
+                <a:headEnd/>
+                <a:tailEnd/>
+              </a14:hiddenLine>
+            </a:ext>
+            <a:ext uri="{AF507438-7753-43E0-B8FC-AC1667EBCBE1}">
+              <a14:hiddenEffects xmlns:a14="http://schemas.microsoft.com/office/drawing/2010/main">
+                <a:effectLst>
+                  <a:outerShdw dist="35921" dir="2700000" algn="ctr" rotWithShape="0">
+                    <a:schemeClr val="bg2"/>
+                  </a:outerShdw>
+                </a:effectLst>
+              </a14:hiddenEffects>
+            </a:ext>
+          </a:extLst>
+        </p:spPr>
+        <p:txBody>
+          <a:bodyPr vert="horz" wrap="none" lIns="0" tIns="0" rIns="0" bIns="0" numCol="1" anchor="ctr" anchorCtr="0" compatLnSpc="1">
+            <a:prstTxWarp prst="textNoShape">
+              <a:avLst/>
+            </a:prstTxWarp>
+            <a:spAutoFit/>
+          </a:bodyPr>
+          <a:lstStyle>
+            <a:lvl1pPr eaLnBrk="0" fontAlgn="base" hangingPunct="0">
+              <a:spcBef>
+                <a:spcPct val="0"/>
+              </a:spcBef>
+              <a:spcAft>
+                <a:spcPct val="0"/>
+              </a:spcAft>
+              <a:defRPr>
+                <a:solidFill>
+                  <a:schemeClr val="tx1"/>
+                </a:solidFill>
+                <a:latin typeface="Arial" panose="020B0604020202020204" pitchFamily="34" charset="0"/>
+              </a:defRPr>
+            </a:lvl1pPr>
+            <a:lvl2pPr eaLnBrk="0" fontAlgn="base" hangingPunct="0">
+              <a:spcBef>
+                <a:spcPct val="0"/>
+              </a:spcBef>
+              <a:spcAft>
+                <a:spcPct val="0"/>
+              </a:spcAft>
+              <a:defRPr>
+                <a:solidFill>
+                  <a:schemeClr val="tx1"/>
+                </a:solidFill>
+                <a:latin typeface="Arial" panose="020B0604020202020204" pitchFamily="34" charset="0"/>
+              </a:defRPr>
+            </a:lvl2pPr>
+            <a:lvl3pPr eaLnBrk="0" fontAlgn="base" hangingPunct="0">
+              <a:spcBef>
+                <a:spcPct val="0"/>
+              </a:spcBef>
+              <a:spcAft>
+                <a:spcPct val="0"/>
+              </a:spcAft>
+              <a:defRPr>
+                <a:solidFill>
+                  <a:schemeClr val="tx1"/>
+                </a:solidFill>
+                <a:latin typeface="Arial" panose="020B0604020202020204" pitchFamily="34" charset="0"/>
+              </a:defRPr>
+            </a:lvl3pPr>
+            <a:lvl4pPr eaLnBrk="0" fontAlgn="base" hangingPunct="0">
+              <a:spcBef>
+                <a:spcPct val="0"/>
+              </a:spcBef>
+              <a:spcAft>
+                <a:spcPct val="0"/>
+              </a:spcAft>
+              <a:defRPr>
+                <a:solidFill>
+                  <a:schemeClr val="tx1"/>
+                </a:solidFill>
+                <a:latin typeface="Arial" panose="020B0604020202020204" pitchFamily="34" charset="0"/>
+              </a:defRPr>
+            </a:lvl4pPr>
+            <a:lvl5pPr eaLnBrk="0" fontAlgn="base" hangingPunct="0">
+              <a:spcBef>
+                <a:spcPct val="0"/>
+              </a:spcBef>
+              <a:spcAft>
+                <a:spcPct val="0"/>
+              </a:spcAft>
+              <a:defRPr>
+                <a:solidFill>
+                  <a:schemeClr val="tx1"/>
+                </a:solidFill>
+                <a:latin typeface="Arial" panose="020B0604020202020204" pitchFamily="34" charset="0"/>
+              </a:defRPr>
+            </a:lvl5pPr>
+            <a:lvl6pPr eaLnBrk="0" fontAlgn="base" hangingPunct="0">
+              <a:spcBef>
+                <a:spcPct val="0"/>
+              </a:spcBef>
+              <a:spcAft>
+                <a:spcPct val="0"/>
+              </a:spcAft>
+              <a:defRPr>
+                <a:solidFill>
+                  <a:schemeClr val="tx1"/>
+                </a:solidFill>
+                <a:latin typeface="Arial" panose="020B0604020202020204" pitchFamily="34" charset="0"/>
+              </a:defRPr>
+            </a:lvl6pPr>
+            <a:lvl7pPr eaLnBrk="0" fontAlgn="base" hangingPunct="0">
+              <a:spcBef>
+                <a:spcPct val="0"/>
+              </a:spcBef>
+              <a:spcAft>
+                <a:spcPct val="0"/>
+              </a:spcAft>
+              <a:defRPr>
+                <a:solidFill>
+                  <a:schemeClr val="tx1"/>
+                </a:solidFill>
+                <a:latin typeface="Arial" panose="020B0604020202020204" pitchFamily="34" charset="0"/>
+              </a:defRPr>
+            </a:lvl7pPr>
+            <a:lvl8pPr eaLnBrk="0" fontAlgn="base" hangingPunct="0">
+              <a:spcBef>
+                <a:spcPct val="0"/>
+              </a:spcBef>
+              <a:spcAft>
+                <a:spcPct val="0"/>
+              </a:spcAft>
+              <a:defRPr>
+                <a:solidFill>
+                  <a:schemeClr val="tx1"/>
+                </a:solidFill>
+                <a:latin typeface="Arial" panose="020B0604020202020204" pitchFamily="34" charset="0"/>
+              </a:defRPr>
+            </a:lvl8pPr>
+            <a:lvl9pPr eaLnBrk="0" fontAlgn="base" hangingPunct="0">
+              <a:spcBef>
+                <a:spcPct val="0"/>
+              </a:spcBef>
+              <a:spcAft>
+                <a:spcPct val="0"/>
+              </a:spcAft>
+              <a:defRPr>
+                <a:solidFill>
+                  <a:schemeClr val="tx1"/>
+                </a:solidFill>
+                <a:latin typeface="Arial" panose="020B0604020202020204" pitchFamily="34" charset="0"/>
+              </a:defRPr>
+            </a:lvl9pPr>
+          </a:lstStyle>
+          <a:p>
+            <a:pPr marL="0" marR="0" lvl="0" indent="0" algn="l" defTabSz="914400" rtl="0" eaLnBrk="0" fontAlgn="base" latinLnBrk="0" hangingPunct="0">
+              <a:lnSpc>
+                <a:spcPct val="100000"/>
+              </a:lnSpc>
+              <a:spcBef>
+                <a:spcPct val="0"/>
+              </a:spcBef>
+              <a:spcAft>
+                <a:spcPct val="0"/>
+              </a:spcAft>
+              <a:buClrTx/>
+              <a:buSzTx/>
+              <a:buFontTx/>
+              <a:buAutoNum type="arabicPeriod" startAt="2"/>
+              <a:tabLst/>
+            </a:pPr>
+            <a:r>
+              <a:rPr kumimoji="0" lang="de-DE" altLang="de-DE" sz="1200" b="0" i="0" u="none" strike="noStrike" cap="none" normalizeH="0" baseline="0">
+                <a:ln>
+                  <a:noFill/>
+                </a:ln>
+                <a:solidFill>
+                  <a:schemeClr val="tx1"/>
+                </a:solidFill>
+                <a:effectLst/>
+                <a:latin typeface="Arial" panose="020B0604020202020204" pitchFamily="34" charset="0"/>
+                <a:ea typeface="inherit"/>
+              </a:rPr>
+              <a:t>[12:07]</a:t>
+            </a:r>
+          </a:p>
+          <a:p>
+            <a:pPr marL="0" marR="0" lvl="0" indent="0" algn="l" defTabSz="914400" rtl="0" eaLnBrk="0" fontAlgn="base" latinLnBrk="0" hangingPunct="0">
+              <a:lnSpc>
+                <a:spcPct val="100000"/>
+              </a:lnSpc>
+              <a:spcBef>
+                <a:spcPct val="0"/>
+              </a:spcBef>
+              <a:spcAft>
+                <a:spcPct val="0"/>
+              </a:spcAft>
+              <a:buClrTx/>
+              <a:buSzTx/>
+              <a:buFontTx/>
+              <a:buNone/>
+              <a:tabLst/>
+            </a:pPr>
+            <a:r>
+              <a:rPr kumimoji="0" lang="de-DE" altLang="de-DE" sz="1200" b="0" i="0" u="none" strike="noStrike" cap="none" normalizeH="0" baseline="0">
+                <a:ln>
+                  <a:noFill/>
+                </a:ln>
+                <a:solidFill>
+                  <a:schemeClr val="tx1"/>
+                </a:solidFill>
+                <a:effectLst/>
+                <a:latin typeface="Arial" panose="020B0604020202020204" pitchFamily="34" charset="0"/>
+                <a:ea typeface="inherit"/>
+              </a:rPr>
+              <a:t>  </a:t>
+            </a:r>
+            <a:r>
+              <a:rPr kumimoji="0" lang="de-DE" altLang="de-DE" sz="1900" b="0" i="0" u="none" strike="noStrike" cap="none" normalizeH="0" baseline="0">
+                <a:ln>
+                  <a:noFill/>
+                </a:ln>
+                <a:solidFill>
+                  <a:schemeClr val="tx1"/>
+                </a:solidFill>
+                <a:effectLst/>
+                <a:latin typeface="Arial" panose="020B0604020202020204" pitchFamily="34" charset="0"/>
+                <a:ea typeface="inherit"/>
+              </a:rPr>
+              <a:t>     </a:t>
+            </a:r>
+            <a:endParaRPr kumimoji="0" lang="de-DE" altLang="de-DE" sz="1200" b="0" i="0" u="none" strike="noStrike" cap="none" normalizeH="0" baseline="0">
+              <a:ln>
+                <a:noFill/>
+              </a:ln>
+              <a:solidFill>
+                <a:schemeClr val="tx1"/>
+              </a:solidFill>
+              <a:effectLst/>
+              <a:latin typeface="Arial" panose="020B0604020202020204" pitchFamily="34" charset="0"/>
+              <a:ea typeface="inherit"/>
+            </a:endParaRPr>
+          </a:p>
+          <a:p>
+            <a:pPr marL="0" marR="0" lvl="0" indent="0" algn="l" defTabSz="914400" rtl="0" eaLnBrk="0" fontAlgn="base" latinLnBrk="0" hangingPunct="0">
+              <a:lnSpc>
+                <a:spcPct val="100000"/>
+              </a:lnSpc>
+              <a:spcBef>
+                <a:spcPct val="0"/>
+              </a:spcBef>
+              <a:spcAft>
+                <a:spcPct val="0"/>
+              </a:spcAft>
+              <a:buClrTx/>
+              <a:buSzTx/>
+              <a:buFontTx/>
+              <a:buNone/>
+              <a:tabLst/>
+            </a:pPr>
+            <a:endParaRPr kumimoji="0" lang="de-DE" altLang="de-DE" sz="1800" b="0" i="0" u="none" strike="noStrike" cap="none" normalizeH="0" baseline="0">
+              <a:ln>
+                <a:noFill/>
+              </a:ln>
+              <a:solidFill>
+                <a:schemeClr val="tx1"/>
+              </a:solidFill>
+              <a:effectLst/>
+              <a:latin typeface="Arial" panose="020B0604020202020204" pitchFamily="34" charset="0"/>
+            </a:endParaRPr>
+          </a:p>
+        </p:txBody>
+      </p:sp>
+      <p:sp>
+        <p:nvSpPr>
+          <p:cNvPr id="8" name="Rectangle 5">
+            <a:extLst>
+              <a:ext uri="{FF2B5EF4-FFF2-40B4-BE49-F238E27FC236}">
+                <a16:creationId xmlns:a16="http://schemas.microsoft.com/office/drawing/2014/main" id="{C435D42E-9593-C54A-A7C7-4F98D5F07E97}"/>
+              </a:ext>
+            </a:extLst>
+          </p:cNvPr>
+          <p:cNvSpPr>
+            <a:spLocks noChangeArrowheads="1"/>
+          </p:cNvSpPr>
+          <p:nvPr/>
+        </p:nvSpPr>
+        <p:spPr bwMode="auto">
+          <a:xfrm>
+            <a:off x="152400" y="152400"/>
+            <a:ext cx="12192000" cy="0"/>
+          </a:xfrm>
+          <a:prstGeom prst="rect">
+            <a:avLst/>
+          </a:prstGeom>
+          <a:noFill/>
+          <a:ln>
+            <a:noFill/>
+          </a:ln>
+          <a:effectLst/>
+          <a:extLst>
+            <a:ext uri="{909E8E84-426E-40DD-AFC4-6F175D3DCCD1}">
+              <a14:hiddenFill xmlns:a14="http://schemas.microsoft.com/office/drawing/2010/main">
+                <a:solidFill>
+                  <a:schemeClr val="accent1"/>
+                </a:solidFill>
+              </a14:hiddenFill>
+            </a:ext>
+            <a:ext uri="{91240B29-F687-4F45-9708-019B960494DF}">
+              <a14:hiddenLine xmlns:a14="http://schemas.microsoft.com/office/drawing/2010/main" w="9525">
+                <a:solidFill>
+                  <a:schemeClr val="tx1"/>
+                </a:solidFill>
+                <a:miter lim="800000"/>
+                <a:headEnd/>
+                <a:tailEnd/>
+              </a14:hiddenLine>
+            </a:ext>
+            <a:ext uri="{AF507438-7753-43E0-B8FC-AC1667EBCBE1}">
+              <a14:hiddenEffects xmlns:a14="http://schemas.microsoft.com/office/drawing/2010/main">
+                <a:effectLst>
+                  <a:outerShdw dist="35921" dir="2700000" algn="ctr" rotWithShape="0">
+                    <a:schemeClr val="bg2"/>
+                  </a:outerShdw>
+                </a:effectLst>
+              </a14:hiddenEffects>
+            </a:ext>
+          </a:extLst>
+        </p:spPr>
+        <p:txBody>
+          <a:bodyPr vert="horz" wrap="none" lIns="0" tIns="0" rIns="0" bIns="0" numCol="1" anchor="ctr" anchorCtr="0" compatLnSpc="1">
+            <a:prstTxWarp prst="textNoShape">
+              <a:avLst/>
+            </a:prstTxWarp>
+            <a:spAutoFit/>
+          </a:bodyPr>
+          <a:lstStyle>
+            <a:lvl1pPr eaLnBrk="0" fontAlgn="base" hangingPunct="0">
+              <a:spcBef>
+                <a:spcPct val="0"/>
+              </a:spcBef>
+              <a:spcAft>
+                <a:spcPct val="0"/>
+              </a:spcAft>
+              <a:defRPr>
+                <a:solidFill>
+                  <a:schemeClr val="tx1"/>
+                </a:solidFill>
+                <a:latin typeface="Arial" panose="020B0604020202020204" pitchFamily="34" charset="0"/>
+              </a:defRPr>
+            </a:lvl1pPr>
+            <a:lvl2pPr eaLnBrk="0" fontAlgn="base" hangingPunct="0">
+              <a:spcBef>
+                <a:spcPct val="0"/>
+              </a:spcBef>
+              <a:spcAft>
+                <a:spcPct val="0"/>
+              </a:spcAft>
+              <a:defRPr>
+                <a:solidFill>
+                  <a:schemeClr val="tx1"/>
+                </a:solidFill>
+                <a:latin typeface="Arial" panose="020B0604020202020204" pitchFamily="34" charset="0"/>
+              </a:defRPr>
+            </a:lvl2pPr>
+            <a:lvl3pPr eaLnBrk="0" fontAlgn="base" hangingPunct="0">
+              <a:spcBef>
+                <a:spcPct val="0"/>
+              </a:spcBef>
+              <a:spcAft>
+                <a:spcPct val="0"/>
+              </a:spcAft>
+              <a:defRPr>
+                <a:solidFill>
+                  <a:schemeClr val="tx1"/>
+                </a:solidFill>
+                <a:latin typeface="Arial" panose="020B0604020202020204" pitchFamily="34" charset="0"/>
+              </a:defRPr>
+            </a:lvl3pPr>
+            <a:lvl4pPr eaLnBrk="0" fontAlgn="base" hangingPunct="0">
+              <a:spcBef>
+                <a:spcPct val="0"/>
+              </a:spcBef>
+              <a:spcAft>
+                <a:spcPct val="0"/>
+              </a:spcAft>
+              <a:defRPr>
+                <a:solidFill>
+                  <a:schemeClr val="tx1"/>
+                </a:solidFill>
+                <a:latin typeface="Arial" panose="020B0604020202020204" pitchFamily="34" charset="0"/>
+              </a:defRPr>
+            </a:lvl4pPr>
+            <a:lvl5pPr eaLnBrk="0" fontAlgn="base" hangingPunct="0">
+              <a:spcBef>
+                <a:spcPct val="0"/>
+              </a:spcBef>
+              <a:spcAft>
+                <a:spcPct val="0"/>
+              </a:spcAft>
+              <a:defRPr>
+                <a:solidFill>
+                  <a:schemeClr val="tx1"/>
+                </a:solidFill>
+                <a:latin typeface="Arial" panose="020B0604020202020204" pitchFamily="34" charset="0"/>
+              </a:defRPr>
+            </a:lvl5pPr>
+            <a:lvl6pPr eaLnBrk="0" fontAlgn="base" hangingPunct="0">
+              <a:spcBef>
+                <a:spcPct val="0"/>
+              </a:spcBef>
+              <a:spcAft>
+                <a:spcPct val="0"/>
+              </a:spcAft>
+              <a:defRPr>
+                <a:solidFill>
+                  <a:schemeClr val="tx1"/>
+                </a:solidFill>
+                <a:latin typeface="Arial" panose="020B0604020202020204" pitchFamily="34" charset="0"/>
+              </a:defRPr>
+            </a:lvl6pPr>
+            <a:lvl7pPr eaLnBrk="0" fontAlgn="base" hangingPunct="0">
+              <a:spcBef>
+                <a:spcPct val="0"/>
+              </a:spcBef>
+              <a:spcAft>
+                <a:spcPct val="0"/>
+              </a:spcAft>
+              <a:defRPr>
+                <a:solidFill>
+                  <a:schemeClr val="tx1"/>
+                </a:solidFill>
+                <a:latin typeface="Arial" panose="020B0604020202020204" pitchFamily="34" charset="0"/>
+              </a:defRPr>
+            </a:lvl7pPr>
+            <a:lvl8pPr eaLnBrk="0" fontAlgn="base" hangingPunct="0">
+              <a:spcBef>
+                <a:spcPct val="0"/>
+              </a:spcBef>
+              <a:spcAft>
+                <a:spcPct val="0"/>
+              </a:spcAft>
+              <a:defRPr>
+                <a:solidFill>
+                  <a:schemeClr val="tx1"/>
+                </a:solidFill>
+                <a:latin typeface="Arial" panose="020B0604020202020204" pitchFamily="34" charset="0"/>
+              </a:defRPr>
+            </a:lvl8pPr>
+            <a:lvl9pPr eaLnBrk="0" fontAlgn="base" hangingPunct="0">
+              <a:spcBef>
+                <a:spcPct val="0"/>
+              </a:spcBef>
+              <a:spcAft>
+                <a:spcPct val="0"/>
+              </a:spcAft>
+              <a:defRPr>
+                <a:solidFill>
+                  <a:schemeClr val="tx1"/>
+                </a:solidFill>
+                <a:latin typeface="Arial" panose="020B0604020202020204" pitchFamily="34" charset="0"/>
+              </a:defRPr>
+            </a:lvl9pPr>
+          </a:lstStyle>
+          <a:p>
+            <a:pPr marL="0" marR="0" lvl="0" indent="0" algn="l" defTabSz="914400" rtl="0" eaLnBrk="0" fontAlgn="base" latinLnBrk="0" hangingPunct="0">
+              <a:lnSpc>
+                <a:spcPct val="100000"/>
+              </a:lnSpc>
+              <a:spcBef>
+                <a:spcPct val="0"/>
+              </a:spcBef>
+              <a:spcAft>
+                <a:spcPct val="0"/>
+              </a:spcAft>
+              <a:buClrTx/>
+              <a:buSzTx/>
+              <a:buFontTx/>
+              <a:buAutoNum type="arabicPeriod" startAt="3"/>
+              <a:tabLst/>
+            </a:pPr>
+            <a:r>
+              <a:rPr kumimoji="0" lang="de-DE" altLang="de-DE" sz="1200" b="0" i="0" u="none" strike="noStrike" cap="none" normalizeH="0" baseline="0">
+                <a:ln>
+                  <a:noFill/>
+                </a:ln>
+                <a:solidFill>
+                  <a:schemeClr val="tx1"/>
+                </a:solidFill>
+                <a:effectLst/>
+                <a:latin typeface="Arial" panose="020B0604020202020204" pitchFamily="34" charset="0"/>
+                <a:ea typeface="inherit"/>
+              </a:rPr>
+              <a:t>[12:07]</a:t>
+            </a:r>
+          </a:p>
+          <a:p>
+            <a:pPr marL="0" marR="0" lvl="0" indent="0" algn="l" defTabSz="914400" rtl="0" eaLnBrk="0" fontAlgn="base" latinLnBrk="0" hangingPunct="0">
+              <a:lnSpc>
+                <a:spcPct val="100000"/>
+              </a:lnSpc>
+              <a:spcBef>
+                <a:spcPct val="0"/>
+              </a:spcBef>
+              <a:spcAft>
+                <a:spcPct val="0"/>
+              </a:spcAft>
+              <a:buClrTx/>
+              <a:buSzTx/>
+              <a:buFontTx/>
+              <a:buNone/>
+              <a:tabLst/>
+            </a:pPr>
+            <a:r>
+              <a:rPr kumimoji="0" lang="de-DE" altLang="de-DE" sz="1200" b="0" i="0" u="none" strike="noStrike" cap="none" normalizeH="0" baseline="0">
+                <a:ln>
+                  <a:noFill/>
+                </a:ln>
+                <a:solidFill>
+                  <a:schemeClr val="tx1"/>
+                </a:solidFill>
+                <a:effectLst/>
+                <a:latin typeface="Arial" panose="020B0604020202020204" pitchFamily="34" charset="0"/>
+                <a:ea typeface="inherit"/>
+              </a:rPr>
+              <a:t>  </a:t>
+            </a:r>
+            <a:r>
+              <a:rPr kumimoji="0" lang="de-DE" altLang="de-DE" sz="1900" b="0" i="0" u="none" strike="noStrike" cap="none" normalizeH="0" baseline="0">
+                <a:ln>
+                  <a:noFill/>
+                </a:ln>
+                <a:solidFill>
+                  <a:schemeClr val="tx1"/>
+                </a:solidFill>
+                <a:effectLst/>
+                <a:latin typeface="Arial" panose="020B0604020202020204" pitchFamily="34" charset="0"/>
+                <a:ea typeface="inherit"/>
+              </a:rPr>
+              <a:t>     </a:t>
+            </a:r>
+            <a:endParaRPr kumimoji="0" lang="de-DE" altLang="de-DE" sz="1200" b="0" i="0" u="none" strike="noStrike" cap="none" normalizeH="0" baseline="0">
+              <a:ln>
+                <a:noFill/>
+              </a:ln>
+              <a:solidFill>
+                <a:schemeClr val="tx1"/>
+              </a:solidFill>
+              <a:effectLst/>
+              <a:latin typeface="Arial" panose="020B0604020202020204" pitchFamily="34" charset="0"/>
+              <a:ea typeface="inherit"/>
+            </a:endParaRPr>
+          </a:p>
+          <a:p>
+            <a:pPr marL="0" marR="0" lvl="0" indent="0" algn="l" defTabSz="914400" rtl="0" eaLnBrk="0" fontAlgn="base" latinLnBrk="0" hangingPunct="0">
+              <a:lnSpc>
+                <a:spcPct val="100000"/>
+              </a:lnSpc>
+              <a:spcBef>
+                <a:spcPct val="0"/>
+              </a:spcBef>
+              <a:spcAft>
+                <a:spcPct val="0"/>
+              </a:spcAft>
+              <a:buClrTx/>
+              <a:buSzTx/>
+              <a:buFontTx/>
+              <a:buNone/>
+              <a:tabLst/>
+            </a:pPr>
+            <a:endParaRPr kumimoji="0" lang="de-DE" altLang="de-DE" sz="1800" b="0" i="0" u="none" strike="noStrike" cap="none" normalizeH="0" baseline="0">
+              <a:ln>
+                <a:noFill/>
+              </a:ln>
+              <a:solidFill>
+                <a:schemeClr val="tx1"/>
+              </a:solidFill>
+              <a:effectLst/>
+              <a:latin typeface="Arial" panose="020B0604020202020204" pitchFamily="34" charset="0"/>
+            </a:endParaRPr>
+          </a:p>
+        </p:txBody>
+      </p:sp>
+      <p:sp>
+        <p:nvSpPr>
+          <p:cNvPr id="9" name="Rectangle 7">
+            <a:extLst>
+              <a:ext uri="{FF2B5EF4-FFF2-40B4-BE49-F238E27FC236}">
+                <a16:creationId xmlns:a16="http://schemas.microsoft.com/office/drawing/2014/main" id="{30870BC8-F8D4-0F9D-7F6E-5314E47D5E5B}"/>
+              </a:ext>
+            </a:extLst>
+          </p:cNvPr>
+          <p:cNvSpPr>
+            <a:spLocks noChangeArrowheads="1"/>
+          </p:cNvSpPr>
+          <p:nvPr/>
+        </p:nvSpPr>
+        <p:spPr bwMode="auto">
+          <a:xfrm>
+            <a:off x="152400" y="152400"/>
+            <a:ext cx="12192000" cy="0"/>
+          </a:xfrm>
+          <a:prstGeom prst="rect">
+            <a:avLst/>
+          </a:prstGeom>
+          <a:noFill/>
+          <a:ln>
+            <a:noFill/>
+          </a:ln>
+          <a:effectLst/>
+          <a:extLst>
+            <a:ext uri="{909E8E84-426E-40DD-AFC4-6F175D3DCCD1}">
+              <a14:hiddenFill xmlns:a14="http://schemas.microsoft.com/office/drawing/2010/main">
+                <a:solidFill>
+                  <a:schemeClr val="accent1"/>
+                </a:solidFill>
+              </a14:hiddenFill>
+            </a:ext>
+            <a:ext uri="{91240B29-F687-4F45-9708-019B960494DF}">
+              <a14:hiddenLine xmlns:a14="http://schemas.microsoft.com/office/drawing/2010/main" w="9525">
+                <a:solidFill>
+                  <a:schemeClr val="tx1"/>
+                </a:solidFill>
+                <a:miter lim="800000"/>
+                <a:headEnd/>
+                <a:tailEnd/>
+              </a14:hiddenLine>
+            </a:ext>
+            <a:ext uri="{AF507438-7753-43E0-B8FC-AC1667EBCBE1}">
+              <a14:hiddenEffects xmlns:a14="http://schemas.microsoft.com/office/drawing/2010/main">
+                <a:effectLst>
+                  <a:outerShdw dist="35921" dir="2700000" algn="ctr" rotWithShape="0">
+                    <a:schemeClr val="bg2"/>
+                  </a:outerShdw>
+                </a:effectLst>
+              </a14:hiddenEffects>
+            </a:ext>
+          </a:extLst>
+        </p:spPr>
+        <p:txBody>
+          <a:bodyPr vert="horz" wrap="none" lIns="0" tIns="0" rIns="0" bIns="0" numCol="1" anchor="ctr" anchorCtr="0" compatLnSpc="1">
+            <a:prstTxWarp prst="textNoShape">
+              <a:avLst/>
+            </a:prstTxWarp>
+            <a:spAutoFit/>
+          </a:bodyPr>
+          <a:lstStyle>
+            <a:lvl1pPr eaLnBrk="0" fontAlgn="base" hangingPunct="0">
+              <a:spcBef>
+                <a:spcPct val="0"/>
+              </a:spcBef>
+              <a:spcAft>
+                <a:spcPct val="0"/>
+              </a:spcAft>
+              <a:defRPr>
+                <a:solidFill>
+                  <a:schemeClr val="tx1"/>
+                </a:solidFill>
+                <a:latin typeface="Arial" panose="020B0604020202020204" pitchFamily="34" charset="0"/>
+              </a:defRPr>
+            </a:lvl1pPr>
+            <a:lvl2pPr eaLnBrk="0" fontAlgn="base" hangingPunct="0">
+              <a:spcBef>
+                <a:spcPct val="0"/>
+              </a:spcBef>
+              <a:spcAft>
+                <a:spcPct val="0"/>
+              </a:spcAft>
+              <a:defRPr>
+                <a:solidFill>
+                  <a:schemeClr val="tx1"/>
+                </a:solidFill>
+                <a:latin typeface="Arial" panose="020B0604020202020204" pitchFamily="34" charset="0"/>
+              </a:defRPr>
+            </a:lvl2pPr>
+            <a:lvl3pPr eaLnBrk="0" fontAlgn="base" hangingPunct="0">
+              <a:spcBef>
+                <a:spcPct val="0"/>
+              </a:spcBef>
+              <a:spcAft>
+                <a:spcPct val="0"/>
+              </a:spcAft>
+              <a:defRPr>
+                <a:solidFill>
+                  <a:schemeClr val="tx1"/>
+                </a:solidFill>
+                <a:latin typeface="Arial" panose="020B0604020202020204" pitchFamily="34" charset="0"/>
+              </a:defRPr>
+            </a:lvl3pPr>
+            <a:lvl4pPr eaLnBrk="0" fontAlgn="base" hangingPunct="0">
+              <a:spcBef>
+                <a:spcPct val="0"/>
+              </a:spcBef>
+              <a:spcAft>
+                <a:spcPct val="0"/>
+              </a:spcAft>
+              <a:defRPr>
+                <a:solidFill>
+                  <a:schemeClr val="tx1"/>
+                </a:solidFill>
+                <a:latin typeface="Arial" panose="020B0604020202020204" pitchFamily="34" charset="0"/>
+              </a:defRPr>
+            </a:lvl4pPr>
+            <a:lvl5pPr eaLnBrk="0" fontAlgn="base" hangingPunct="0">
+              <a:spcBef>
+                <a:spcPct val="0"/>
+              </a:spcBef>
+              <a:spcAft>
+                <a:spcPct val="0"/>
+              </a:spcAft>
+              <a:defRPr>
+                <a:solidFill>
+                  <a:schemeClr val="tx1"/>
+                </a:solidFill>
+                <a:latin typeface="Arial" panose="020B0604020202020204" pitchFamily="34" charset="0"/>
+              </a:defRPr>
+            </a:lvl5pPr>
+            <a:lvl6pPr eaLnBrk="0" fontAlgn="base" hangingPunct="0">
+              <a:spcBef>
+                <a:spcPct val="0"/>
+              </a:spcBef>
+              <a:spcAft>
+                <a:spcPct val="0"/>
+              </a:spcAft>
+              <a:defRPr>
+                <a:solidFill>
+                  <a:schemeClr val="tx1"/>
+                </a:solidFill>
+                <a:latin typeface="Arial" panose="020B0604020202020204" pitchFamily="34" charset="0"/>
+              </a:defRPr>
+            </a:lvl6pPr>
+            <a:lvl7pPr eaLnBrk="0" fontAlgn="base" hangingPunct="0">
+              <a:spcBef>
+                <a:spcPct val="0"/>
+              </a:spcBef>
+              <a:spcAft>
+                <a:spcPct val="0"/>
+              </a:spcAft>
+              <a:defRPr>
+                <a:solidFill>
+                  <a:schemeClr val="tx1"/>
+                </a:solidFill>
+                <a:latin typeface="Arial" panose="020B0604020202020204" pitchFamily="34" charset="0"/>
+              </a:defRPr>
+            </a:lvl7pPr>
+            <a:lvl8pPr eaLnBrk="0" fontAlgn="base" hangingPunct="0">
+              <a:spcBef>
+                <a:spcPct val="0"/>
+              </a:spcBef>
+              <a:spcAft>
+                <a:spcPct val="0"/>
+              </a:spcAft>
+              <a:defRPr>
+                <a:solidFill>
+                  <a:schemeClr val="tx1"/>
+                </a:solidFill>
+                <a:latin typeface="Arial" panose="020B0604020202020204" pitchFamily="34" charset="0"/>
+              </a:defRPr>
+            </a:lvl8pPr>
+            <a:lvl9pPr eaLnBrk="0" fontAlgn="base" hangingPunct="0">
+              <a:spcBef>
+                <a:spcPct val="0"/>
+              </a:spcBef>
+              <a:spcAft>
+                <a:spcPct val="0"/>
+              </a:spcAft>
+              <a:defRPr>
+                <a:solidFill>
+                  <a:schemeClr val="tx1"/>
+                </a:solidFill>
+                <a:latin typeface="Arial" panose="020B0604020202020204" pitchFamily="34" charset="0"/>
+              </a:defRPr>
+            </a:lvl9pPr>
+          </a:lstStyle>
+          <a:p>
+            <a:pPr marL="0" marR="0" lvl="0" indent="0" algn="l" defTabSz="914400" rtl="0" eaLnBrk="0" fontAlgn="base" latinLnBrk="0" hangingPunct="0">
+              <a:lnSpc>
+                <a:spcPct val="100000"/>
+              </a:lnSpc>
+              <a:spcBef>
+                <a:spcPct val="0"/>
+              </a:spcBef>
+              <a:spcAft>
+                <a:spcPct val="0"/>
+              </a:spcAft>
+              <a:buClrTx/>
+              <a:buSzTx/>
+              <a:buFontTx/>
+              <a:buAutoNum type="arabicPeriod" startAt="4"/>
+              <a:tabLst/>
+            </a:pPr>
+            <a:r>
+              <a:rPr kumimoji="0" lang="de-DE" altLang="de-DE" sz="1200" b="0" i="0" u="none" strike="noStrike" cap="none" normalizeH="0" baseline="0">
+                <a:ln>
+                  <a:noFill/>
+                </a:ln>
+                <a:solidFill>
+                  <a:schemeClr val="tx1"/>
+                </a:solidFill>
+                <a:effectLst/>
+                <a:latin typeface="Arial" panose="020B0604020202020204" pitchFamily="34" charset="0"/>
+                <a:ea typeface="inherit"/>
+              </a:rPr>
+              <a:t>[12:07]</a:t>
+            </a:r>
+          </a:p>
+          <a:p>
+            <a:pPr marL="0" marR="0" lvl="0" indent="0" algn="l" defTabSz="914400" rtl="0" eaLnBrk="0" fontAlgn="base" latinLnBrk="0" hangingPunct="0">
+              <a:lnSpc>
+                <a:spcPct val="100000"/>
+              </a:lnSpc>
+              <a:spcBef>
+                <a:spcPct val="0"/>
+              </a:spcBef>
+              <a:spcAft>
+                <a:spcPct val="0"/>
+              </a:spcAft>
+              <a:buClrTx/>
+              <a:buSzTx/>
+              <a:buFontTx/>
+              <a:buNone/>
+              <a:tabLst/>
+            </a:pPr>
+            <a:r>
+              <a:rPr kumimoji="0" lang="de-DE" altLang="de-DE" sz="1200" b="0" i="0" u="none" strike="noStrike" cap="none" normalizeH="0" baseline="0">
+                <a:ln>
+                  <a:noFill/>
+                </a:ln>
+                <a:solidFill>
+                  <a:schemeClr val="tx1"/>
+                </a:solidFill>
+                <a:effectLst/>
+                <a:latin typeface="Arial" panose="020B0604020202020204" pitchFamily="34" charset="0"/>
+                <a:ea typeface="inherit"/>
+              </a:rPr>
+              <a:t>  </a:t>
+            </a:r>
+            <a:r>
+              <a:rPr kumimoji="0" lang="de-DE" altLang="de-DE" sz="1900" b="0" i="0" u="none" strike="noStrike" cap="none" normalizeH="0" baseline="0">
+                <a:ln>
+                  <a:noFill/>
+                </a:ln>
+                <a:solidFill>
+                  <a:schemeClr val="tx1"/>
+                </a:solidFill>
+                <a:effectLst/>
+                <a:latin typeface="Arial" panose="020B0604020202020204" pitchFamily="34" charset="0"/>
+                <a:ea typeface="inherit"/>
+              </a:rPr>
+              <a:t>     </a:t>
+            </a:r>
+            <a:endParaRPr kumimoji="0" lang="de-DE" altLang="de-DE" sz="1200" b="0" i="0" u="none" strike="noStrike" cap="none" normalizeH="0" baseline="0">
+              <a:ln>
+                <a:noFill/>
+              </a:ln>
+              <a:solidFill>
+                <a:schemeClr val="tx1"/>
+              </a:solidFill>
+              <a:effectLst/>
+              <a:latin typeface="Arial" panose="020B0604020202020204" pitchFamily="34" charset="0"/>
+              <a:ea typeface="gg sans"/>
+            </a:endParaRPr>
+          </a:p>
+          <a:p>
+            <a:pPr marL="0" marR="0" lvl="0" indent="0" algn="l" defTabSz="914400" rtl="0" eaLnBrk="0" fontAlgn="base" latinLnBrk="0" hangingPunct="0">
+              <a:lnSpc>
+                <a:spcPct val="100000"/>
+              </a:lnSpc>
+              <a:spcBef>
+                <a:spcPct val="0"/>
+              </a:spcBef>
+              <a:spcAft>
+                <a:spcPct val="0"/>
+              </a:spcAft>
+              <a:buClrTx/>
+              <a:buSzTx/>
+              <a:buFontTx/>
+              <a:buNone/>
+              <a:tabLst/>
+            </a:pPr>
+            <a:endParaRPr kumimoji="0" lang="de-DE" altLang="de-DE" sz="1800" b="0" i="0" u="none" strike="noStrike" cap="none" normalizeH="0" baseline="0">
+              <a:ln>
+                <a:noFill/>
+              </a:ln>
+              <a:solidFill>
+                <a:schemeClr val="tx1"/>
+              </a:solidFill>
+              <a:effectLst/>
+              <a:latin typeface="Arial" panose="020B0604020202020204" pitchFamily="34" charset="0"/>
+            </a:endParaRPr>
+          </a:p>
+        </p:txBody>
+      </p:sp>
+      <p:sp>
+        <p:nvSpPr>
+          <p:cNvPr id="10" name="AutoShape 8" descr="Bild">
+            <a:extLst>
+              <a:ext uri="{FF2B5EF4-FFF2-40B4-BE49-F238E27FC236}">
+                <a16:creationId xmlns:a16="http://schemas.microsoft.com/office/drawing/2014/main" id="{C98C4F9D-E8DA-E4A8-BC16-8225727915CD}"/>
+              </a:ext>
+            </a:extLst>
+          </p:cNvPr>
+          <p:cNvSpPr>
+            <a:spLocks noChangeAspect="1" noChangeArrowheads="1"/>
+          </p:cNvSpPr>
+          <p:nvPr/>
+        </p:nvSpPr>
+        <p:spPr bwMode="auto">
+          <a:xfrm>
+            <a:off x="238125" y="-38100"/>
+            <a:ext cx="304800" cy="304800"/>
+          </a:xfrm>
+          <a:prstGeom prst="rect">
+            <a:avLst/>
+          </a:prstGeom>
+          <a:noFill/>
+          <a:extLst>
+            <a:ext uri="{909E8E84-426E-40DD-AFC4-6F175D3DCCD1}">
+              <a14:hiddenFill xmlns:a14="http://schemas.microsoft.com/office/drawing/2010/main">
+                <a:solidFill>
+                  <a:srgbClr val="FFFFFF"/>
+                </a:solidFill>
+              </a14:hiddenFill>
+            </a:ext>
+          </a:extLst>
+        </p:spPr>
+        <p:txBody>
+          <a:bodyPr vert="horz" wrap="square" lIns="91440" tIns="45720" rIns="91440" bIns="45720" numCol="1" anchor="t" anchorCtr="0" compatLnSpc="1">
+            <a:prstTxWarp prst="textNoShape">
+              <a:avLst/>
+            </a:prstTxWarp>
+          </a:bodyPr>
+          <a:lstStyle/>
+          <a:p>
+            <a:endParaRPr lang="en-US"/>
+          </a:p>
+        </p:txBody>
+      </p:sp>
+      <p:sp>
+        <p:nvSpPr>
+          <p:cNvPr id="11" name="AutoShape 4" descr="Bild">
+            <a:extLst>
+              <a:ext uri="{FF2B5EF4-FFF2-40B4-BE49-F238E27FC236}">
+                <a16:creationId xmlns:a16="http://schemas.microsoft.com/office/drawing/2014/main" id="{557C90F9-05DD-F738-64AD-98F682CC3F17}"/>
+              </a:ext>
+            </a:extLst>
+          </p:cNvPr>
+          <p:cNvSpPr>
+            <a:spLocks noChangeAspect="1" noChangeArrowheads="1"/>
+          </p:cNvSpPr>
+          <p:nvPr/>
+        </p:nvSpPr>
+        <p:spPr bwMode="auto">
+          <a:xfrm>
+            <a:off x="238125" y="-38100"/>
+            <a:ext cx="304800" cy="304800"/>
+          </a:xfrm>
+          <a:prstGeom prst="rect">
+            <a:avLst/>
+          </a:prstGeom>
+          <a:noFill/>
+          <a:extLst>
+            <a:ext uri="{909E8E84-426E-40DD-AFC4-6F175D3DCCD1}">
+              <a14:hiddenFill xmlns:a14="http://schemas.microsoft.com/office/drawing/2010/main">
+                <a:solidFill>
+                  <a:srgbClr val="FFFFFF"/>
+                </a:solidFill>
+              </a14:hiddenFill>
+            </a:ext>
+          </a:extLst>
+        </p:spPr>
+        <p:txBody>
+          <a:bodyPr vert="horz" wrap="square" lIns="91440" tIns="45720" rIns="91440" bIns="45720" numCol="1" anchor="t" anchorCtr="0" compatLnSpc="1">
+            <a:prstTxWarp prst="textNoShape">
+              <a:avLst/>
+            </a:prstTxWarp>
+          </a:bodyPr>
+          <a:lstStyle/>
+          <a:p>
+            <a:endParaRPr lang="en-US"/>
+          </a:p>
+        </p:txBody>
+      </p:sp>
+      <p:sp>
+        <p:nvSpPr>
+          <p:cNvPr id="12" name="AutoShape 2" descr="Bild">
+            <a:extLst>
+              <a:ext uri="{FF2B5EF4-FFF2-40B4-BE49-F238E27FC236}">
+                <a16:creationId xmlns:a16="http://schemas.microsoft.com/office/drawing/2014/main" id="{9C513C8F-21DA-EE5E-4BFC-BD1CD5549209}"/>
+              </a:ext>
+            </a:extLst>
+          </p:cNvPr>
+          <p:cNvSpPr>
+            <a:spLocks noChangeAspect="1" noChangeArrowheads="1"/>
+          </p:cNvSpPr>
+          <p:nvPr/>
+        </p:nvSpPr>
+        <p:spPr bwMode="auto">
+          <a:xfrm>
+            <a:off x="238125" y="98425"/>
+            <a:ext cx="304800" cy="304800"/>
+          </a:xfrm>
+          <a:prstGeom prst="rect">
+            <a:avLst/>
+          </a:prstGeom>
+          <a:noFill/>
+          <a:extLst>
+            <a:ext uri="{909E8E84-426E-40DD-AFC4-6F175D3DCCD1}">
+              <a14:hiddenFill xmlns:a14="http://schemas.microsoft.com/office/drawing/2010/main">
+                <a:solidFill>
+                  <a:srgbClr val="FFFFFF"/>
+                </a:solidFill>
+              </a14:hiddenFill>
+            </a:ext>
+          </a:extLst>
+        </p:spPr>
+        <p:txBody>
+          <a:bodyPr vert="horz" wrap="square" lIns="91440" tIns="45720" rIns="91440" bIns="45720" numCol="1" anchor="t" anchorCtr="0" compatLnSpc="1">
+            <a:prstTxWarp prst="textNoShape">
+              <a:avLst/>
+            </a:prstTxWarp>
+          </a:bodyPr>
+          <a:lstStyle/>
+          <a:p>
+            <a:endParaRPr lang="en-US"/>
+          </a:p>
+        </p:txBody>
+      </p:sp>
+      <p:sp>
+        <p:nvSpPr>
+          <p:cNvPr id="13" name="AutoShape 6" descr="Bild">
+            <a:extLst>
+              <a:ext uri="{FF2B5EF4-FFF2-40B4-BE49-F238E27FC236}">
+                <a16:creationId xmlns:a16="http://schemas.microsoft.com/office/drawing/2014/main" id="{1BB99A63-3AFA-4ED4-1B94-17BD6D44DD9C}"/>
+              </a:ext>
+            </a:extLst>
+          </p:cNvPr>
+          <p:cNvSpPr>
+            <a:spLocks noChangeAspect="1" noChangeArrowheads="1"/>
+          </p:cNvSpPr>
+          <p:nvPr/>
+        </p:nvSpPr>
+        <p:spPr bwMode="auto">
+          <a:xfrm>
+            <a:off x="238125" y="-38100"/>
+            <a:ext cx="304800" cy="304800"/>
+          </a:xfrm>
+          <a:prstGeom prst="rect">
+            <a:avLst/>
+          </a:prstGeom>
+          <a:noFill/>
+          <a:extLst>
+            <a:ext uri="{909E8E84-426E-40DD-AFC4-6F175D3DCCD1}">
+              <a14:hiddenFill xmlns:a14="http://schemas.microsoft.com/office/drawing/2010/main">
+                <a:solidFill>
+                  <a:srgbClr val="FFFFFF"/>
+                </a:solidFill>
+              </a14:hiddenFill>
+            </a:ext>
+          </a:extLst>
+        </p:spPr>
+        <p:txBody>
+          <a:bodyPr vert="horz" wrap="square" lIns="91440" tIns="45720" rIns="91440" bIns="45720" numCol="1" anchor="t" anchorCtr="0" compatLnSpc="1">
+            <a:prstTxWarp prst="textNoShape">
+              <a:avLst/>
+            </a:prstTxWarp>
+          </a:bodyPr>
+          <a:lstStyle/>
+          <a:p>
+            <a:endParaRPr lang="en-US"/>
+          </a:p>
+        </p:txBody>
+      </p:sp>
+      <p:sp>
+        <p:nvSpPr>
+          <p:cNvPr id="16" name="AutoShape 12">
+            <a:extLst>
+              <a:ext uri="{FF2B5EF4-FFF2-40B4-BE49-F238E27FC236}">
+                <a16:creationId xmlns:a16="http://schemas.microsoft.com/office/drawing/2014/main" id="{236E8BDC-BBB2-BFE6-2D69-A8E93C2934AB}"/>
+              </a:ext>
+            </a:extLst>
+          </p:cNvPr>
+          <p:cNvSpPr>
+            <a:spLocks noChangeAspect="1" noChangeArrowheads="1"/>
+          </p:cNvSpPr>
+          <p:nvPr/>
+        </p:nvSpPr>
+        <p:spPr bwMode="auto">
+          <a:xfrm>
+            <a:off x="5943600" y="3276600"/>
+            <a:ext cx="304800" cy="304800"/>
+          </a:xfrm>
+          <a:prstGeom prst="rect">
+            <a:avLst/>
+          </a:prstGeom>
+          <a:noFill/>
+          <a:extLst>
+            <a:ext uri="{909E8E84-426E-40DD-AFC4-6F175D3DCCD1}">
+              <a14:hiddenFill xmlns:a14="http://schemas.microsoft.com/office/drawing/2010/main">
+                <a:solidFill>
+                  <a:srgbClr val="FFFFFF"/>
+                </a:solidFill>
+              </a14:hiddenFill>
+            </a:ext>
+          </a:extLst>
+        </p:spPr>
+        <p:txBody>
+          <a:bodyPr vert="horz" wrap="square" lIns="91440" tIns="45720" rIns="91440" bIns="45720" numCol="1" anchor="t" anchorCtr="0" compatLnSpc="1">
+            <a:prstTxWarp prst="textNoShape">
+              <a:avLst/>
+            </a:prstTxWarp>
+          </a:bodyPr>
+          <a:lstStyle/>
+          <a:p>
+            <a:endParaRPr lang="en-US"/>
+          </a:p>
+        </p:txBody>
+      </p:sp>
+      <p:sp>
+        <p:nvSpPr>
+          <p:cNvPr id="19" name="AutoShape 14">
+            <a:extLst>
+              <a:ext uri="{FF2B5EF4-FFF2-40B4-BE49-F238E27FC236}">
+                <a16:creationId xmlns:a16="http://schemas.microsoft.com/office/drawing/2014/main" id="{25261259-5596-1AC9-3990-93F8ECF326B8}"/>
+              </a:ext>
+            </a:extLst>
+          </p:cNvPr>
+          <p:cNvSpPr>
+            <a:spLocks noChangeAspect="1" noChangeArrowheads="1"/>
+          </p:cNvSpPr>
+          <p:nvPr/>
+        </p:nvSpPr>
+        <p:spPr bwMode="auto">
+          <a:xfrm>
+            <a:off x="6096000" y="3429000"/>
+            <a:ext cx="304800" cy="304800"/>
+          </a:xfrm>
+          <a:prstGeom prst="rect">
+            <a:avLst/>
+          </a:prstGeom>
+          <a:noFill/>
+          <a:extLst>
+            <a:ext uri="{909E8E84-426E-40DD-AFC4-6F175D3DCCD1}">
+              <a14:hiddenFill xmlns:a14="http://schemas.microsoft.com/office/drawing/2010/main">
+                <a:solidFill>
+                  <a:srgbClr val="FFFFFF"/>
+                </a:solidFill>
+              </a14:hiddenFill>
+            </a:ext>
+          </a:extLst>
+        </p:spPr>
+        <p:txBody>
+          <a:bodyPr vert="horz" wrap="square" lIns="91440" tIns="45720" rIns="91440" bIns="45720" numCol="1" anchor="t" anchorCtr="0" compatLnSpc="1">
+            <a:prstTxWarp prst="textNoShape">
+              <a:avLst/>
+            </a:prstTxWarp>
+          </a:bodyPr>
+          <a:lstStyle/>
+          <a:p>
+            <a:endParaRPr lang="en-US"/>
+          </a:p>
+        </p:txBody>
+      </p:sp>
+      <p:sp>
+        <p:nvSpPr>
+          <p:cNvPr id="14" name="Inhaltsplatzhalter 13">
+            <a:extLst>
+              <a:ext uri="{FF2B5EF4-FFF2-40B4-BE49-F238E27FC236}">
+                <a16:creationId xmlns:a16="http://schemas.microsoft.com/office/drawing/2014/main" id="{AB0C23F6-B95C-61C2-847E-E8BEC6751E97}"/>
+              </a:ext>
+            </a:extLst>
+          </p:cNvPr>
+          <p:cNvSpPr>
+            <a:spLocks noGrp="1"/>
+          </p:cNvSpPr>
+          <p:nvPr>
+            <p:ph idx="1"/>
+          </p:nvPr>
+        </p:nvSpPr>
+        <p:spPr>
+          <a:xfrm>
+            <a:off x="210911" y="6381328"/>
+            <a:ext cx="11013193" cy="4175125"/>
+          </a:xfrm>
+        </p:spPr>
+        <p:txBody>
+          <a:bodyPr/>
+          <a:lstStyle/>
+          <a:p>
+            <a:endParaRPr lang="en-US" dirty="0"/>
+          </a:p>
+        </p:txBody>
+      </p:sp>
+      <p:sp>
+        <p:nvSpPr>
+          <p:cNvPr id="15" name="AutoShape 2">
+            <a:extLst>
+              <a:ext uri="{FF2B5EF4-FFF2-40B4-BE49-F238E27FC236}">
+                <a16:creationId xmlns:a16="http://schemas.microsoft.com/office/drawing/2014/main" id="{65E514FF-5204-7B8B-3840-AF74ED720EA0}"/>
+              </a:ext>
+            </a:extLst>
+          </p:cNvPr>
+          <p:cNvSpPr>
+            <a:spLocks noChangeAspect="1" noChangeArrowheads="1"/>
+          </p:cNvSpPr>
+          <p:nvPr/>
+        </p:nvSpPr>
+        <p:spPr bwMode="auto">
+          <a:xfrm>
+            <a:off x="6248400" y="3581400"/>
+            <a:ext cx="304800" cy="304800"/>
+          </a:xfrm>
+          <a:prstGeom prst="rect">
+            <a:avLst/>
+          </a:prstGeom>
+          <a:noFill/>
+          <a:extLst>
+            <a:ext uri="{909E8E84-426E-40DD-AFC4-6F175D3DCCD1}">
+              <a14:hiddenFill xmlns:a14="http://schemas.microsoft.com/office/drawing/2010/main">
+                <a:solidFill>
+                  <a:srgbClr val="FFFFFF"/>
+                </a:solidFill>
+              </a14:hiddenFill>
+            </a:ext>
+          </a:extLst>
+        </p:spPr>
+        <p:txBody>
+          <a:bodyPr vert="horz" wrap="square" lIns="91440" tIns="45720" rIns="91440" bIns="45720" numCol="1" anchor="t" anchorCtr="0" compatLnSpc="1">
+            <a:prstTxWarp prst="textNoShape">
+              <a:avLst/>
+            </a:prstTxWarp>
+          </a:bodyPr>
+          <a:lstStyle/>
+          <a:p>
+            <a:endParaRPr lang="en-US"/>
+          </a:p>
+        </p:txBody>
+      </p:sp>
+      <p:pic>
+        <p:nvPicPr>
+          <p:cNvPr id="17" name="Grafik 16">
+            <a:extLst>
+              <a:ext uri="{FF2B5EF4-FFF2-40B4-BE49-F238E27FC236}">
+                <a16:creationId xmlns:a16="http://schemas.microsoft.com/office/drawing/2014/main" id="{5BF50B71-F585-4D61-7D15-B5FA6D4D59D3}"/>
+              </a:ext>
+            </a:extLst>
+          </p:cNvPr>
+          <p:cNvPicPr>
+            <a:picLocks noChangeAspect="1"/>
+          </p:cNvPicPr>
+          <p:nvPr/>
+        </p:nvPicPr>
+        <p:blipFill>
+          <a:blip r:embed="rId2"/>
+          <a:stretch>
+            <a:fillRect/>
+          </a:stretch>
+        </p:blipFill>
+        <p:spPr>
+          <a:xfrm>
+            <a:off x="695400" y="2330921"/>
+            <a:ext cx="4922879" cy="1951412"/>
+          </a:xfrm>
+          <a:prstGeom prst="rect">
+            <a:avLst/>
+          </a:prstGeom>
+        </p:spPr>
+      </p:pic>
+      <p:pic>
+        <p:nvPicPr>
+          <p:cNvPr id="18" name="Grafik 17">
+            <a:extLst>
+              <a:ext uri="{FF2B5EF4-FFF2-40B4-BE49-F238E27FC236}">
+                <a16:creationId xmlns:a16="http://schemas.microsoft.com/office/drawing/2014/main" id="{B143F020-DF02-3DDC-ACCA-20BB77EF9EB1}"/>
+              </a:ext>
+            </a:extLst>
+          </p:cNvPr>
+          <p:cNvPicPr>
+            <a:picLocks noChangeAspect="1"/>
+          </p:cNvPicPr>
+          <p:nvPr/>
+        </p:nvPicPr>
+        <p:blipFill>
+          <a:blip r:embed="rId3"/>
+          <a:stretch>
+            <a:fillRect/>
+          </a:stretch>
+        </p:blipFill>
+        <p:spPr>
+          <a:xfrm>
+            <a:off x="5974940" y="2251396"/>
+            <a:ext cx="5281140" cy="2004236"/>
+          </a:xfrm>
+          <a:prstGeom prst="rect">
+            <a:avLst/>
+          </a:prstGeom>
+        </p:spPr>
+      </p:pic>
+      <p:pic>
+        <p:nvPicPr>
+          <p:cNvPr id="20" name="Grafik 19">
+            <a:extLst>
+              <a:ext uri="{FF2B5EF4-FFF2-40B4-BE49-F238E27FC236}">
+                <a16:creationId xmlns:a16="http://schemas.microsoft.com/office/drawing/2014/main" id="{5C60A4D4-266B-6A56-2984-018E209558E5}"/>
+              </a:ext>
+            </a:extLst>
+          </p:cNvPr>
+          <p:cNvPicPr>
+            <a:picLocks noChangeAspect="1"/>
+          </p:cNvPicPr>
+          <p:nvPr/>
+        </p:nvPicPr>
+        <p:blipFill>
+          <a:blip r:embed="rId4"/>
+          <a:stretch>
+            <a:fillRect/>
+          </a:stretch>
+        </p:blipFill>
+        <p:spPr>
+          <a:xfrm>
+            <a:off x="695400" y="4365104"/>
+            <a:ext cx="4470673" cy="1688354"/>
+          </a:xfrm>
+          <a:prstGeom prst="rect">
+            <a:avLst/>
+          </a:prstGeom>
+        </p:spPr>
+      </p:pic>
+      <p:pic>
+        <p:nvPicPr>
+          <p:cNvPr id="21" name="Grafik 20">
+            <a:extLst>
+              <a:ext uri="{FF2B5EF4-FFF2-40B4-BE49-F238E27FC236}">
+                <a16:creationId xmlns:a16="http://schemas.microsoft.com/office/drawing/2014/main" id="{E74DF068-7BF7-9DC4-DDCF-6E56A2969F79}"/>
+              </a:ext>
+            </a:extLst>
+          </p:cNvPr>
+          <p:cNvPicPr>
+            <a:picLocks noChangeAspect="1"/>
+          </p:cNvPicPr>
+          <p:nvPr/>
+        </p:nvPicPr>
+        <p:blipFill>
+          <a:blip r:embed="rId5"/>
+          <a:stretch>
+            <a:fillRect/>
+          </a:stretch>
+        </p:blipFill>
+        <p:spPr>
+          <a:xfrm>
+            <a:off x="6096000" y="4255632"/>
+            <a:ext cx="5281140" cy="2006315"/>
+          </a:xfrm>
+          <a:prstGeom prst="rect">
+            <a:avLst/>
+          </a:prstGeom>
+        </p:spPr>
+      </p:pic>
+    </p:spTree>
+    <p:extLst>
+      <p:ext uri="{BB962C8B-B14F-4D97-AF65-F5344CB8AC3E}">
+        <p14:creationId xmlns:p14="http://schemas.microsoft.com/office/powerpoint/2010/main" val="3868664382"/>
+      </p:ext>
+    </p:extLst>
+  </p:cSld>
+  <p:clrMapOvr>
+    <a:masterClrMapping/>
+  </p:clrMapOvr>
+</p:sld>
+</file>
+
+<file path=ppt/slides/slide16.xml><?xml version="1.0" encoding="utf-8"?>
+<p:sld xmlns:a="http://schemas.openxmlformats.org/drawingml/2006/main" xmlns:r="http://schemas.openxmlformats.org/officeDocument/2006/relationships" xmlns:p="http://schemas.openxmlformats.org/presentationml/2006/main">
+  <p:cSld>
+    <p:spTree>
+      <p:nvGrpSpPr>
+        <p:cNvPr id="1" name="">
+          <a:extLst>
+            <a:ext uri="{FF2B5EF4-FFF2-40B4-BE49-F238E27FC236}">
+              <a16:creationId xmlns:a16="http://schemas.microsoft.com/office/drawing/2014/main" id="{5F4A68C2-724C-629D-2532-E40E859B625E}"/>
+            </a:ext>
+          </a:extLst>
+        </p:cNvPr>
+        <p:cNvGrpSpPr/>
+        <p:nvPr/>
+      </p:nvGrpSpPr>
+      <p:grpSpPr>
+        <a:xfrm>
+          <a:off x="0" y="0"/>
+          <a:ext cx="0" cy="0"/>
+          <a:chOff x="0" y="0"/>
+          <a:chExt cx="0" cy="0"/>
+        </a:xfrm>
+      </p:grpSpPr>
+      <p:sp>
+        <p:nvSpPr>
+          <p:cNvPr id="7" name="Title 6">
+            <a:extLst>
+              <a:ext uri="{FF2B5EF4-FFF2-40B4-BE49-F238E27FC236}">
+                <a16:creationId xmlns:a16="http://schemas.microsoft.com/office/drawing/2014/main" id="{41F6E147-5A0B-9B6D-2915-441E05995B76}"/>
+              </a:ext>
+            </a:extLst>
+          </p:cNvPr>
+          <p:cNvSpPr>
+            <a:spLocks noGrp="1"/>
+          </p:cNvSpPr>
+          <p:nvPr>
+            <p:ph type="title"/>
+          </p:nvPr>
+        </p:nvSpPr>
+        <p:spPr/>
+        <p:txBody>
+          <a:bodyPr/>
+          <a:lstStyle/>
+          <a:p>
+            <a:r>
+              <a:rPr lang="en-GB" dirty="0"/>
+              <a:t>Conclusion</a:t>
+            </a:r>
+          </a:p>
+        </p:txBody>
+      </p:sp>
+      <p:sp>
+        <p:nvSpPr>
+          <p:cNvPr id="4" name="Date Placeholder 3">
+            <a:extLst>
+              <a:ext uri="{FF2B5EF4-FFF2-40B4-BE49-F238E27FC236}">
+                <a16:creationId xmlns:a16="http://schemas.microsoft.com/office/drawing/2014/main" id="{EC998EC9-BE61-E317-84B6-50D11D0BC04E}"/>
+              </a:ext>
+            </a:extLst>
+          </p:cNvPr>
+          <p:cNvSpPr>
+            <a:spLocks noGrp="1"/>
+          </p:cNvSpPr>
+          <p:nvPr>
+            <p:ph type="dt" sz="half" idx="10"/>
+          </p:nvPr>
+        </p:nvSpPr>
+        <p:spPr/>
+        <p:txBody>
+          <a:bodyPr/>
+          <a:lstStyle/>
+          <a:p>
+            <a:fld id="{3CAC52EE-1A92-4CB4-BCAA-EDE3CF50CF3F}" type="datetime1">
+              <a:rPr lang="de-DE" smtClean="0"/>
+              <a:t>07.07.2025</a:t>
+            </a:fld>
+            <a:endParaRPr lang="de-CH" dirty="0"/>
+          </a:p>
+        </p:txBody>
+      </p:sp>
+      <p:sp>
+        <p:nvSpPr>
+          <p:cNvPr id="5" name="Footer Placeholder 4">
+            <a:extLst>
+              <a:ext uri="{FF2B5EF4-FFF2-40B4-BE49-F238E27FC236}">
+                <a16:creationId xmlns:a16="http://schemas.microsoft.com/office/drawing/2014/main" id="{B8DACFB1-7D12-88AB-E540-C4404BF612AC}"/>
+              </a:ext>
+            </a:extLst>
+          </p:cNvPr>
+          <p:cNvSpPr>
+            <a:spLocks noGrp="1"/>
+          </p:cNvSpPr>
+          <p:nvPr>
+            <p:ph type="ftr" sz="quarter" idx="11"/>
+          </p:nvPr>
+        </p:nvSpPr>
+        <p:spPr/>
+        <p:txBody>
+          <a:bodyPr/>
+          <a:lstStyle/>
+          <a:p>
+            <a:r>
+              <a:rPr lang="en-US"/>
+              <a:t>Institute For Sensor and Electronics</a:t>
+            </a:r>
+            <a:endParaRPr lang="de-CH" dirty="0"/>
+          </a:p>
+        </p:txBody>
+      </p:sp>
+      <p:sp>
+        <p:nvSpPr>
+          <p:cNvPr id="6" name="Slide Number Placeholder 5">
+            <a:extLst>
+              <a:ext uri="{FF2B5EF4-FFF2-40B4-BE49-F238E27FC236}">
+                <a16:creationId xmlns:a16="http://schemas.microsoft.com/office/drawing/2014/main" id="{1347F6D5-DD91-65E7-37A3-3FF6F6DDE6AC}"/>
+              </a:ext>
+            </a:extLst>
+          </p:cNvPr>
+          <p:cNvSpPr>
+            <a:spLocks noGrp="1"/>
+          </p:cNvSpPr>
+          <p:nvPr>
+            <p:ph type="sldNum" sz="quarter" idx="12"/>
+          </p:nvPr>
+        </p:nvSpPr>
+        <p:spPr/>
+        <p:txBody>
+          <a:bodyPr/>
+          <a:lstStyle/>
+          <a:p>
+            <a:fld id="{442AD375-037F-43D0-B059-5172DA06796A}" type="slidenum">
+              <a:rPr lang="de-CH" smtClean="0"/>
+              <a:pPr/>
+              <a:t>16</a:t>
+            </a:fld>
+            <a:endParaRPr lang="de-CH" dirty="0"/>
+          </a:p>
+        </p:txBody>
+      </p:sp>
+    </p:spTree>
+    <p:extLst>
+      <p:ext uri="{BB962C8B-B14F-4D97-AF65-F5344CB8AC3E}">
+        <p14:creationId xmlns:p14="http://schemas.microsoft.com/office/powerpoint/2010/main" val="1981396437"/>
+      </p:ext>
+    </p:extLst>
+  </p:cSld>
+  <p:clrMapOvr>
+    <a:masterClrMapping/>
+  </p:clrMapOvr>
+</p:sld>
+</file>
+
+<file path=ppt/slides/slide17.xml><?xml version="1.0" encoding="utf-8"?>
+<p:sld xmlns:a="http://schemas.openxmlformats.org/drawingml/2006/main" xmlns:r="http://schemas.openxmlformats.org/officeDocument/2006/relationships" xmlns:p="http://schemas.openxmlformats.org/presentationml/2006/main">
+  <p:cSld>
+    <p:spTree>
+      <p:nvGrpSpPr>
+        <p:cNvPr id="1" name="">
+          <a:extLst>
+            <a:ext uri="{FF2B5EF4-FFF2-40B4-BE49-F238E27FC236}">
+              <a16:creationId xmlns:a16="http://schemas.microsoft.com/office/drawing/2014/main" id="{2891AFDD-599D-621B-C03E-E935E63977BF}"/>
+            </a:ext>
+          </a:extLst>
+        </p:cNvPr>
+        <p:cNvGrpSpPr/>
+        <p:nvPr/>
+      </p:nvGrpSpPr>
+      <p:grpSpPr>
+        <a:xfrm>
+          <a:off x="0" y="0"/>
+          <a:ext cx="0" cy="0"/>
+          <a:chOff x="0" y="0"/>
+          <a:chExt cx="0" cy="0"/>
+        </a:xfrm>
+      </p:grpSpPr>
+      <p:sp>
+        <p:nvSpPr>
+          <p:cNvPr id="2" name="Titel 1">
+            <a:extLst>
+              <a:ext uri="{FF2B5EF4-FFF2-40B4-BE49-F238E27FC236}">
+                <a16:creationId xmlns:a16="http://schemas.microsoft.com/office/drawing/2014/main" id="{33ADDFD8-849E-C395-48CB-19439416A146}"/>
+              </a:ext>
+            </a:extLst>
+          </p:cNvPr>
+          <p:cNvSpPr>
+            <a:spLocks noGrp="1"/>
+          </p:cNvSpPr>
+          <p:nvPr>
+            <p:ph type="title"/>
+          </p:nvPr>
+        </p:nvSpPr>
+        <p:spPr>
+          <a:xfrm>
+            <a:off x="408076" y="1170372"/>
+            <a:ext cx="11012400" cy="984885"/>
+          </a:xfrm>
+        </p:spPr>
+        <p:txBody>
+          <a:bodyPr/>
+          <a:lstStyle/>
+          <a:p>
+            <a:r>
+              <a:rPr lang="en-GB" dirty="0"/>
+              <a:t>Challenges</a:t>
+            </a:r>
+            <a:br>
+              <a:rPr lang="en-GB" dirty="0"/>
+            </a:br>
+            <a:endParaRPr lang="en-US" dirty="0"/>
+          </a:p>
+        </p:txBody>
+      </p:sp>
+      <p:sp>
+        <p:nvSpPr>
+          <p:cNvPr id="4" name="Datumsplatzhalter 3">
+            <a:extLst>
+              <a:ext uri="{FF2B5EF4-FFF2-40B4-BE49-F238E27FC236}">
+                <a16:creationId xmlns:a16="http://schemas.microsoft.com/office/drawing/2014/main" id="{3FD32A27-04F6-5A7B-FEBD-0D75CC897B9F}"/>
+              </a:ext>
+            </a:extLst>
+          </p:cNvPr>
+          <p:cNvSpPr>
+            <a:spLocks noGrp="1"/>
+          </p:cNvSpPr>
+          <p:nvPr>
+            <p:ph type="dt" sz="half" idx="10"/>
+          </p:nvPr>
+        </p:nvSpPr>
+        <p:spPr/>
+        <p:txBody>
+          <a:bodyPr/>
+          <a:lstStyle/>
+          <a:p>
+            <a:fld id="{B2DD1E4E-1107-499B-BB00-8AA0260A0EFB}" type="datetime1">
+              <a:rPr lang="de-DE" smtClean="0"/>
+              <a:t>07.07.2025</a:t>
+            </a:fld>
+            <a:endParaRPr lang="de-CH" dirty="0"/>
+          </a:p>
+        </p:txBody>
+      </p:sp>
+      <p:sp>
+        <p:nvSpPr>
+          <p:cNvPr id="5" name="Fußzeilenplatzhalter 4">
+            <a:extLst>
+              <a:ext uri="{FF2B5EF4-FFF2-40B4-BE49-F238E27FC236}">
+                <a16:creationId xmlns:a16="http://schemas.microsoft.com/office/drawing/2014/main" id="{B5376D4D-728E-941B-10EB-EACC2E79FEEC}"/>
+              </a:ext>
+            </a:extLst>
+          </p:cNvPr>
+          <p:cNvSpPr>
+            <a:spLocks noGrp="1"/>
+          </p:cNvSpPr>
+          <p:nvPr>
+            <p:ph type="ftr" sz="quarter" idx="11"/>
+          </p:nvPr>
+        </p:nvSpPr>
+        <p:spPr/>
+        <p:txBody>
+          <a:bodyPr/>
+          <a:lstStyle/>
+          <a:p>
+            <a:r>
+              <a:rPr lang="en-US"/>
+              <a:t>Institute For Sensor and Electronics</a:t>
+            </a:r>
+            <a:endParaRPr lang="de-CH" dirty="0"/>
+          </a:p>
+        </p:txBody>
+      </p:sp>
+      <p:sp>
+        <p:nvSpPr>
+          <p:cNvPr id="6" name="Foliennummernplatzhalter 5">
+            <a:extLst>
+              <a:ext uri="{FF2B5EF4-FFF2-40B4-BE49-F238E27FC236}">
+                <a16:creationId xmlns:a16="http://schemas.microsoft.com/office/drawing/2014/main" id="{22FF9FF3-47C2-8087-4562-E4C0FB340E9E}"/>
+              </a:ext>
+            </a:extLst>
+          </p:cNvPr>
+          <p:cNvSpPr>
+            <a:spLocks noGrp="1"/>
+          </p:cNvSpPr>
+          <p:nvPr>
+            <p:ph type="sldNum" sz="quarter" idx="12"/>
+          </p:nvPr>
+        </p:nvSpPr>
+        <p:spPr/>
+        <p:txBody>
+          <a:bodyPr/>
+          <a:lstStyle/>
+          <a:p>
+            <a:fld id="{442AD375-037F-43D0-B059-5172DA06796A}" type="slidenum">
+              <a:rPr lang="de-CH" smtClean="0"/>
+              <a:pPr/>
+              <a:t>17</a:t>
+            </a:fld>
+            <a:endParaRPr lang="de-CH" dirty="0"/>
+          </a:p>
+        </p:txBody>
+      </p:sp>
+      <p:sp>
+        <p:nvSpPr>
+          <p:cNvPr id="8" name="Inhaltsplatzhalter 7">
+            <a:extLst>
+              <a:ext uri="{FF2B5EF4-FFF2-40B4-BE49-F238E27FC236}">
+                <a16:creationId xmlns:a16="http://schemas.microsoft.com/office/drawing/2014/main" id="{38460B99-1BE0-63A9-27E1-F76BCF1E71E5}"/>
+              </a:ext>
+            </a:extLst>
+          </p:cNvPr>
+          <p:cNvSpPr>
+            <a:spLocks noGrp="1"/>
+          </p:cNvSpPr>
+          <p:nvPr>
+            <p:ph idx="1"/>
+          </p:nvPr>
+        </p:nvSpPr>
+        <p:spPr/>
+        <p:txBody>
+          <a:bodyPr/>
+          <a:lstStyle/>
+          <a:p>
+            <a:pPr marL="0" indent="0">
+              <a:buNone/>
+            </a:pPr>
+            <a:r>
+              <a:rPr lang="en-US" dirty="0"/>
+              <a:t>-Understanding the task</a:t>
+            </a:r>
+          </a:p>
+          <a:p>
+            <a:pPr marL="0" indent="0">
+              <a:buNone/>
+            </a:pPr>
+            <a:endParaRPr lang="en-US" dirty="0"/>
+          </a:p>
+          <a:p>
+            <a:pPr marL="0" indent="0">
+              <a:buNone/>
+            </a:pPr>
+            <a:endParaRPr lang="en-US" dirty="0"/>
+          </a:p>
+          <a:p>
+            <a:pPr marL="0" indent="0">
+              <a:buNone/>
+            </a:pPr>
+            <a:endParaRPr lang="en-US" dirty="0"/>
+          </a:p>
+          <a:p>
+            <a:pPr marL="0" indent="0">
+              <a:buNone/>
+            </a:pPr>
+            <a:r>
+              <a:rPr lang="en-US" dirty="0"/>
+              <a:t>-Simulating an extended Kalman filter</a:t>
+            </a:r>
+          </a:p>
+          <a:p>
+            <a:pPr marL="0" indent="0">
+              <a:buNone/>
+            </a:pPr>
+            <a:r>
+              <a:rPr lang="en-US" dirty="0"/>
+              <a:t>-Using a real sensor to compare the simulation with a real life scenario</a:t>
+            </a:r>
+          </a:p>
+          <a:p>
+            <a:pPr marL="0" indent="0">
+              <a:buNone/>
+            </a:pPr>
+            <a:endParaRPr lang="en-US" dirty="0"/>
+          </a:p>
+          <a:p>
+            <a:pPr marL="0" indent="0">
+              <a:buNone/>
+            </a:pPr>
+            <a:endParaRPr lang="en-US" dirty="0"/>
+          </a:p>
+          <a:p>
+            <a:pPr marL="0" indent="0">
+              <a:buNone/>
+            </a:pPr>
+            <a:endParaRPr lang="en-US" dirty="0"/>
+          </a:p>
+          <a:p>
+            <a:pPr marL="0" indent="0">
+              <a:buNone/>
+            </a:pPr>
+            <a:endParaRPr lang="en-US" dirty="0"/>
+          </a:p>
+        </p:txBody>
+      </p:sp>
+      <p:sp>
+        <p:nvSpPr>
+          <p:cNvPr id="9" name="Titel 1">
+            <a:extLst>
+              <a:ext uri="{FF2B5EF4-FFF2-40B4-BE49-F238E27FC236}">
+                <a16:creationId xmlns:a16="http://schemas.microsoft.com/office/drawing/2014/main" id="{74E23369-1919-DB76-8889-A107CA3315D3}"/>
+              </a:ext>
+            </a:extLst>
+          </p:cNvPr>
+          <p:cNvSpPr txBox="1">
+            <a:spLocks/>
+          </p:cNvSpPr>
+          <p:nvPr/>
+        </p:nvSpPr>
+        <p:spPr>
+          <a:xfrm>
+            <a:off x="408074" y="2715100"/>
+            <a:ext cx="11012400" cy="984885"/>
+          </a:xfrm>
+          <a:prstGeom prst="rect">
+            <a:avLst/>
+          </a:prstGeom>
+        </p:spPr>
+        <p:txBody>
+          <a:bodyPr vert="horz" wrap="square" lIns="0" tIns="0" rIns="0" bIns="0" rtlCol="0" anchor="t">
+            <a:spAutoFit/>
+          </a:bodyPr>
+          <a:lstStyle>
+            <a:lvl1pPr algn="l" defTabSz="914400" rtl="0" eaLnBrk="1" latinLnBrk="0" hangingPunct="1">
+              <a:lnSpc>
+                <a:spcPct val="100000"/>
+              </a:lnSpc>
+              <a:spcBef>
+                <a:spcPct val="0"/>
+              </a:spcBef>
+              <a:buNone/>
+              <a:defRPr sz="3200" kern="1200">
+                <a:solidFill>
+                  <a:schemeClr val="tx1"/>
+                </a:solidFill>
+                <a:latin typeface="+mj-lt"/>
+                <a:ea typeface="+mj-ea"/>
+                <a:cs typeface="+mj-cs"/>
+              </a:defRPr>
+            </a:lvl1pPr>
+          </a:lstStyle>
+          <a:p>
+            <a:r>
+              <a:rPr lang="en-GB" dirty="0"/>
+              <a:t>Future work</a:t>
+            </a:r>
+            <a:br>
+              <a:rPr lang="en-GB" dirty="0"/>
+            </a:br>
+            <a:endParaRPr lang="en-US" dirty="0"/>
+          </a:p>
+        </p:txBody>
+      </p:sp>
+    </p:spTree>
+    <p:extLst>
+      <p:ext uri="{BB962C8B-B14F-4D97-AF65-F5344CB8AC3E}">
+        <p14:creationId xmlns:p14="http://schemas.microsoft.com/office/powerpoint/2010/main" val="2215536634"/>
+      </p:ext>
+    </p:extLst>
+  </p:cSld>
+  <p:clrMapOvr>
+    <a:masterClrMapping/>
+  </p:clrMapOvr>
+</p:sld>
+</file>
+
+<file path=ppt/slides/slide18.xml><?xml version="1.0" encoding="utf-8"?>
+<p:sld xmlns:a="http://schemas.openxmlformats.org/drawingml/2006/main" xmlns:r="http://schemas.openxmlformats.org/officeDocument/2006/relationships" xmlns:p="http://schemas.openxmlformats.org/presentationml/2006/main">
+  <p:cSld>
+    <p:spTree>
+      <p:nvGrpSpPr>
+        <p:cNvPr id="1" name=""/>
+        <p:cNvGrpSpPr/>
+        <p:nvPr/>
+      </p:nvGrpSpPr>
+      <p:grpSpPr>
+        <a:xfrm>
+          <a:off x="0" y="0"/>
+          <a:ext cx="0" cy="0"/>
+          <a:chOff x="0" y="0"/>
+          <a:chExt cx="0" cy="0"/>
+        </a:xfrm>
+      </p:grpSpPr>
+      <p:sp>
+        <p:nvSpPr>
+          <p:cNvPr id="2" name="Titel 1">
+            <a:extLst>
+              <a:ext uri="{FF2B5EF4-FFF2-40B4-BE49-F238E27FC236}">
+                <a16:creationId xmlns:a16="http://schemas.microsoft.com/office/drawing/2014/main" id="{169F2742-70D0-CF37-2C65-08E28AF0C072}"/>
+              </a:ext>
+            </a:extLst>
+          </p:cNvPr>
+          <p:cNvSpPr>
+            <a:spLocks noGrp="1"/>
+          </p:cNvSpPr>
+          <p:nvPr>
+            <p:ph type="title"/>
+          </p:nvPr>
+        </p:nvSpPr>
+        <p:spPr/>
+        <p:txBody>
+          <a:bodyPr/>
+          <a:lstStyle/>
+          <a:p>
+            <a:r>
+              <a:rPr lang="en-US" dirty="0"/>
+              <a:t>Conclusion</a:t>
+            </a:r>
+          </a:p>
+        </p:txBody>
+      </p:sp>
+      <p:sp>
+        <p:nvSpPr>
+          <p:cNvPr id="3" name="Inhaltsplatzhalter 2">
+            <a:extLst>
+              <a:ext uri="{FF2B5EF4-FFF2-40B4-BE49-F238E27FC236}">
+                <a16:creationId xmlns:a16="http://schemas.microsoft.com/office/drawing/2014/main" id="{362FFED1-6256-8725-4286-0CED47BB283D}"/>
+              </a:ext>
+            </a:extLst>
+          </p:cNvPr>
+          <p:cNvSpPr>
+            <a:spLocks noGrp="1"/>
+          </p:cNvSpPr>
+          <p:nvPr>
+            <p:ph idx="1"/>
+          </p:nvPr>
+        </p:nvSpPr>
+        <p:spPr/>
+        <p:txBody>
+          <a:bodyPr/>
+          <a:lstStyle/>
+          <a:p>
+            <a:r>
+              <a:rPr lang="en-US" dirty="0"/>
+              <a:t>The Kalman filter is broadly usable for noisy signals that can be predicted by a model</a:t>
+            </a:r>
+          </a:p>
+          <a:p>
+            <a:r>
+              <a:rPr lang="en-US" dirty="0"/>
+              <a:t>The parameters have a big influence on the performance</a:t>
+            </a:r>
+          </a:p>
+        </p:txBody>
+      </p:sp>
+      <p:sp>
+        <p:nvSpPr>
+          <p:cNvPr id="4" name="Datumsplatzhalter 3">
+            <a:extLst>
+              <a:ext uri="{FF2B5EF4-FFF2-40B4-BE49-F238E27FC236}">
+                <a16:creationId xmlns:a16="http://schemas.microsoft.com/office/drawing/2014/main" id="{5395BA6A-5E75-7479-E22A-3943FCC0DD73}"/>
+              </a:ext>
+            </a:extLst>
+          </p:cNvPr>
+          <p:cNvSpPr>
+            <a:spLocks noGrp="1"/>
+          </p:cNvSpPr>
+          <p:nvPr>
+            <p:ph type="dt" sz="half" idx="10"/>
+          </p:nvPr>
+        </p:nvSpPr>
+        <p:spPr/>
+        <p:txBody>
+          <a:bodyPr/>
+          <a:lstStyle/>
+          <a:p>
+            <a:fld id="{B2DD1E4E-1107-499B-BB00-8AA0260A0EFB}" type="datetime1">
+              <a:rPr lang="de-DE" smtClean="0"/>
+              <a:t>07.07.2025</a:t>
+            </a:fld>
+            <a:endParaRPr lang="de-CH" dirty="0"/>
+          </a:p>
+        </p:txBody>
+      </p:sp>
+      <p:sp>
+        <p:nvSpPr>
+          <p:cNvPr id="5" name="Fußzeilenplatzhalter 4">
+            <a:extLst>
+              <a:ext uri="{FF2B5EF4-FFF2-40B4-BE49-F238E27FC236}">
+                <a16:creationId xmlns:a16="http://schemas.microsoft.com/office/drawing/2014/main" id="{E2A0ABD8-A0A1-1547-4917-5F4798FB4A70}"/>
+              </a:ext>
+            </a:extLst>
+          </p:cNvPr>
+          <p:cNvSpPr>
+            <a:spLocks noGrp="1"/>
+          </p:cNvSpPr>
+          <p:nvPr>
+            <p:ph type="ftr" sz="quarter" idx="11"/>
+          </p:nvPr>
+        </p:nvSpPr>
+        <p:spPr/>
+        <p:txBody>
+          <a:bodyPr/>
+          <a:lstStyle/>
+          <a:p>
+            <a:r>
+              <a:rPr lang="en-US"/>
+              <a:t>Institute For Sensor and Electronics</a:t>
+            </a:r>
+            <a:endParaRPr lang="de-CH" dirty="0"/>
+          </a:p>
+        </p:txBody>
+      </p:sp>
+      <p:sp>
+        <p:nvSpPr>
+          <p:cNvPr id="6" name="Foliennummernplatzhalter 5">
+            <a:extLst>
+              <a:ext uri="{FF2B5EF4-FFF2-40B4-BE49-F238E27FC236}">
+                <a16:creationId xmlns:a16="http://schemas.microsoft.com/office/drawing/2014/main" id="{721A577B-D665-BEEF-3082-4DF62551F0BD}"/>
+              </a:ext>
+            </a:extLst>
+          </p:cNvPr>
+          <p:cNvSpPr>
+            <a:spLocks noGrp="1"/>
+          </p:cNvSpPr>
+          <p:nvPr>
+            <p:ph type="sldNum" sz="quarter" idx="12"/>
+          </p:nvPr>
+        </p:nvSpPr>
+        <p:spPr/>
+        <p:txBody>
+          <a:bodyPr/>
+          <a:lstStyle/>
+          <a:p>
+            <a:fld id="{442AD375-037F-43D0-B059-5172DA06796A}" type="slidenum">
+              <a:rPr lang="de-CH" smtClean="0"/>
+              <a:pPr/>
+              <a:t>18</a:t>
+            </a:fld>
+            <a:endParaRPr lang="de-CH" dirty="0"/>
+          </a:p>
+        </p:txBody>
+      </p:sp>
+    </p:spTree>
+    <p:extLst>
+      <p:ext uri="{BB962C8B-B14F-4D97-AF65-F5344CB8AC3E}">
+        <p14:creationId xmlns:p14="http://schemas.microsoft.com/office/powerpoint/2010/main" val="375000769"/>
+      </p:ext>
+    </p:extLst>
+  </p:cSld>
+  <p:clrMapOvr>
+    <a:masterClrMapping/>
+  </p:clrMapOvr>
+</p:sld>
+</file>
+
+<file path=ppt/slides/slide19.xml><?xml version="1.0" encoding="utf-8"?>
+<p:sld xmlns:a="http://schemas.openxmlformats.org/drawingml/2006/main" xmlns:r="http://schemas.openxmlformats.org/officeDocument/2006/relationships" xmlns:p="http://schemas.openxmlformats.org/presentationml/2006/main">
+  <p:cSld>
+    <p:spTree>
+      <p:nvGrpSpPr>
+        <p:cNvPr id="1" name="">
+          <a:extLst>
+            <a:ext uri="{FF2B5EF4-FFF2-40B4-BE49-F238E27FC236}">
+              <a16:creationId xmlns:a16="http://schemas.microsoft.com/office/drawing/2014/main" id="{EA5613B1-D4D7-905C-33C4-BF16C7AB9517}"/>
+            </a:ext>
+          </a:extLst>
+        </p:cNvPr>
+        <p:cNvGrpSpPr/>
+        <p:nvPr/>
+      </p:nvGrpSpPr>
+      <p:grpSpPr>
+        <a:xfrm>
+          <a:off x="0" y="0"/>
+          <a:ext cx="0" cy="0"/>
+          <a:chOff x="0" y="0"/>
+          <a:chExt cx="0" cy="0"/>
+        </a:xfrm>
+      </p:grpSpPr>
+      <p:sp>
+        <p:nvSpPr>
+          <p:cNvPr id="7" name="Title 6">
+            <a:extLst>
+              <a:ext uri="{FF2B5EF4-FFF2-40B4-BE49-F238E27FC236}">
+                <a16:creationId xmlns:a16="http://schemas.microsoft.com/office/drawing/2014/main" id="{83D2A79B-3E71-F4B0-86B1-10B46BF36F85}"/>
+              </a:ext>
+            </a:extLst>
+          </p:cNvPr>
+          <p:cNvSpPr>
+            <a:spLocks noGrp="1"/>
+          </p:cNvSpPr>
+          <p:nvPr>
+            <p:ph type="title"/>
+          </p:nvPr>
+        </p:nvSpPr>
+        <p:spPr/>
+        <p:txBody>
+          <a:bodyPr/>
+          <a:lstStyle/>
+          <a:p>
+            <a:r>
+              <a:rPr lang="en-GB" dirty="0"/>
+              <a:t>Discussion</a:t>
+            </a:r>
+          </a:p>
+        </p:txBody>
+      </p:sp>
+      <p:sp>
+        <p:nvSpPr>
+          <p:cNvPr id="4" name="Date Placeholder 3">
+            <a:extLst>
+              <a:ext uri="{FF2B5EF4-FFF2-40B4-BE49-F238E27FC236}">
+                <a16:creationId xmlns:a16="http://schemas.microsoft.com/office/drawing/2014/main" id="{AFC25046-854E-FC73-EED2-AFCFFA10D8BE}"/>
+              </a:ext>
+            </a:extLst>
+          </p:cNvPr>
+          <p:cNvSpPr>
+            <a:spLocks noGrp="1"/>
+          </p:cNvSpPr>
+          <p:nvPr>
+            <p:ph type="dt" sz="half" idx="10"/>
+          </p:nvPr>
+        </p:nvSpPr>
+        <p:spPr/>
+        <p:txBody>
+          <a:bodyPr/>
+          <a:lstStyle/>
+          <a:p>
+            <a:fld id="{3CAC52EE-1A92-4CB4-BCAA-EDE3CF50CF3F}" type="datetime1">
+              <a:rPr lang="de-DE" smtClean="0"/>
+              <a:t>07.07.2025</a:t>
+            </a:fld>
+            <a:endParaRPr lang="de-CH" dirty="0"/>
+          </a:p>
+        </p:txBody>
+      </p:sp>
+      <p:sp>
+        <p:nvSpPr>
+          <p:cNvPr id="5" name="Footer Placeholder 4">
+            <a:extLst>
+              <a:ext uri="{FF2B5EF4-FFF2-40B4-BE49-F238E27FC236}">
+                <a16:creationId xmlns:a16="http://schemas.microsoft.com/office/drawing/2014/main" id="{5DB0ECA4-FCB7-F04A-77BC-FFCB4C8C1965}"/>
+              </a:ext>
+            </a:extLst>
+          </p:cNvPr>
+          <p:cNvSpPr>
+            <a:spLocks noGrp="1"/>
+          </p:cNvSpPr>
+          <p:nvPr>
+            <p:ph type="ftr" sz="quarter" idx="11"/>
+          </p:nvPr>
+        </p:nvSpPr>
+        <p:spPr/>
+        <p:txBody>
+          <a:bodyPr/>
+          <a:lstStyle/>
+          <a:p>
+            <a:r>
+              <a:rPr lang="en-US"/>
+              <a:t>Institute For Sensor and Electronics</a:t>
+            </a:r>
+            <a:endParaRPr lang="de-CH" dirty="0"/>
+          </a:p>
+        </p:txBody>
+      </p:sp>
+      <p:sp>
+        <p:nvSpPr>
+          <p:cNvPr id="6" name="Slide Number Placeholder 5">
+            <a:extLst>
+              <a:ext uri="{FF2B5EF4-FFF2-40B4-BE49-F238E27FC236}">
+                <a16:creationId xmlns:a16="http://schemas.microsoft.com/office/drawing/2014/main" id="{FF2A7A12-F7FC-6F21-3339-F322BAED9523}"/>
+              </a:ext>
+            </a:extLst>
+          </p:cNvPr>
+          <p:cNvSpPr>
+            <a:spLocks noGrp="1"/>
+          </p:cNvSpPr>
+          <p:nvPr>
+            <p:ph type="sldNum" sz="quarter" idx="12"/>
+          </p:nvPr>
+        </p:nvSpPr>
+        <p:spPr/>
+        <p:txBody>
+          <a:bodyPr/>
+          <a:lstStyle/>
+          <a:p>
+            <a:fld id="{442AD375-037F-43D0-B059-5172DA06796A}" type="slidenum">
+              <a:rPr lang="de-CH" smtClean="0"/>
+              <a:pPr/>
+              <a:t>19</a:t>
+            </a:fld>
+            <a:endParaRPr lang="de-CH" dirty="0"/>
+          </a:p>
+        </p:txBody>
+      </p:sp>
+    </p:spTree>
+    <p:extLst>
+      <p:ext uri="{BB962C8B-B14F-4D97-AF65-F5344CB8AC3E}">
+        <p14:creationId xmlns:p14="http://schemas.microsoft.com/office/powerpoint/2010/main" val="2232369142"/>
+      </p:ext>
+    </p:extLst>
+  </p:cSld>
+  <p:clrMapOvr>
+    <a:masterClrMapping/>
+  </p:clrMapOvr>
 </p:sld>
 </file>
 
@@ -4895,9 +10901,8 @@
           <a:p>
             <a:r>
               <a:rPr lang="de-DE" dirty="0"/>
-              <a:t>12.05.2025</a:t>
-            </a:r>
-            <a:endParaRPr lang="de-CH" dirty="0"/>
+              <a:t>07.07.2025</a:t>
+            </a:r>
           </a:p>
         </p:txBody>
       </p:sp>
@@ -4992,25 +10997,8 @@
                 <a:effectLst/>
                 <a:latin typeface="Segoe UI" panose="020B0502040204020203" pitchFamily="34" charset="0"/>
               </a:rPr>
-              <a:t>Name </a:t>
-            </a:r>
-            <a:r>
-              <a:rPr lang="de-CH" b="1" i="0" dirty="0" err="1">
-                <a:solidFill>
-                  <a:srgbClr val="252424"/>
-                </a:solidFill>
-                <a:effectLst/>
-                <a:latin typeface="Segoe UI" panose="020B0502040204020203" pitchFamily="34" charset="0"/>
-              </a:rPr>
-              <a:t>Surname</a:t>
-            </a:r>
-            <a:endParaRPr lang="de-CH" b="1" i="0" dirty="0">
-              <a:solidFill>
-                <a:srgbClr val="252424"/>
-              </a:solidFill>
-              <a:effectLst/>
-              <a:latin typeface="Segoe UI" panose="020B0502040204020203" pitchFamily="34" charset="0"/>
-            </a:endParaRPr>
+              <a:t>Florian Meier</a:t>
+            </a:r>
           </a:p>
         </p:txBody>
       </p:sp>
@@ -5042,16 +11030,7 @@
                 </a:solidFill>
                 <a:latin typeface="Arial" panose="020B0604020202020204" pitchFamily="34" charset="0"/>
               </a:rPr>
-              <a:t>My </a:t>
-            </a:r>
-            <a:r>
-              <a:rPr lang="de-CH" sz="1800" dirty="0" err="1">
-                <a:solidFill>
-                  <a:srgbClr val="000000"/>
-                </a:solidFill>
-                <a:latin typeface="Arial" panose="020B0604020202020204" pitchFamily="34" charset="0"/>
-              </a:rPr>
-              <a:t>project</a:t>
+              <a:t>Project 4: KALM</a:t>
             </a:r>
             <a:endParaRPr lang="de-CH" dirty="0"/>
           </a:p>
@@ -5158,6 +11137,180 @@
     <p:extLst>
       <p:ext uri="{BB962C8B-B14F-4D97-AF65-F5344CB8AC3E}">
         <p14:creationId xmlns:p14="http://schemas.microsoft.com/office/powerpoint/2010/main" val="246504645"/>
+      </p:ext>
+    </p:extLst>
+  </p:cSld>
+  <p:clrMapOvr>
+    <a:masterClrMapping/>
+  </p:clrMapOvr>
+</p:sld>
+</file>
+
+<file path=ppt/slides/slide20.xml><?xml version="1.0" encoding="utf-8"?>
+<p:sld xmlns:a="http://schemas.openxmlformats.org/drawingml/2006/main" xmlns:r="http://schemas.openxmlformats.org/officeDocument/2006/relationships" xmlns:p="http://schemas.openxmlformats.org/presentationml/2006/main">
+  <p:cSld>
+    <p:spTree>
+      <p:nvGrpSpPr>
+        <p:cNvPr id="1" name=""/>
+        <p:cNvGrpSpPr/>
+        <p:nvPr/>
+      </p:nvGrpSpPr>
+      <p:grpSpPr>
+        <a:xfrm>
+          <a:off x="0" y="0"/>
+          <a:ext cx="0" cy="0"/>
+          <a:chOff x="0" y="0"/>
+          <a:chExt cx="0" cy="0"/>
+        </a:xfrm>
+      </p:grpSpPr>
+      <p:sp>
+        <p:nvSpPr>
+          <p:cNvPr id="2" name="Titel 1">
+            <a:extLst>
+              <a:ext uri="{FF2B5EF4-FFF2-40B4-BE49-F238E27FC236}">
+                <a16:creationId xmlns:a16="http://schemas.microsoft.com/office/drawing/2014/main" id="{6FC01769-031A-6AC1-B050-ED2477938CEF}"/>
+              </a:ext>
+            </a:extLst>
+          </p:cNvPr>
+          <p:cNvSpPr>
+            <a:spLocks noGrp="1"/>
+          </p:cNvSpPr>
+          <p:nvPr>
+            <p:ph type="title"/>
+          </p:nvPr>
+        </p:nvSpPr>
+        <p:spPr/>
+        <p:txBody>
+          <a:bodyPr/>
+          <a:lstStyle/>
+          <a:p>
+            <a:r>
+              <a:rPr lang="en-US" dirty="0"/>
+              <a:t>Sources</a:t>
+            </a:r>
+          </a:p>
+        </p:txBody>
+      </p:sp>
+      <p:sp>
+        <p:nvSpPr>
+          <p:cNvPr id="3" name="Inhaltsplatzhalter 2">
+            <a:extLst>
+              <a:ext uri="{FF2B5EF4-FFF2-40B4-BE49-F238E27FC236}">
+                <a16:creationId xmlns:a16="http://schemas.microsoft.com/office/drawing/2014/main" id="{1642B5B5-F5F5-8B34-02A6-4D1AB8BD2886}"/>
+              </a:ext>
+            </a:extLst>
+          </p:cNvPr>
+          <p:cNvSpPr>
+            <a:spLocks noGrp="1"/>
+          </p:cNvSpPr>
+          <p:nvPr>
+            <p:ph idx="1"/>
+          </p:nvPr>
+        </p:nvSpPr>
+        <p:spPr/>
+        <p:txBody>
+          <a:bodyPr/>
+          <a:lstStyle/>
+          <a:p>
+            <a:r>
+              <a:rPr lang="en-US" dirty="0"/>
+              <a:t>Picture Page 8: https://en.wikipedia.org/wiki/Kalman_filter#:~:text=In%20statistics%20and%20control%20theory,those%20based%20on%20a%20single</a:t>
+            </a:r>
+          </a:p>
+        </p:txBody>
+      </p:sp>
+      <p:sp>
+        <p:nvSpPr>
+          <p:cNvPr id="4" name="Datumsplatzhalter 3">
+            <a:extLst>
+              <a:ext uri="{FF2B5EF4-FFF2-40B4-BE49-F238E27FC236}">
+                <a16:creationId xmlns:a16="http://schemas.microsoft.com/office/drawing/2014/main" id="{CB6465A6-093E-A263-0F14-EE3E4769C89E}"/>
+              </a:ext>
+            </a:extLst>
+          </p:cNvPr>
+          <p:cNvSpPr>
+            <a:spLocks noGrp="1"/>
+          </p:cNvSpPr>
+          <p:nvPr>
+            <p:ph type="dt" sz="half" idx="10"/>
+          </p:nvPr>
+        </p:nvSpPr>
+        <p:spPr/>
+        <p:txBody>
+          <a:bodyPr/>
+          <a:lstStyle/>
+          <a:p>
+            <a:fld id="{B2DD1E4E-1107-499B-BB00-8AA0260A0EFB}" type="datetime1">
+              <a:rPr lang="de-DE" smtClean="0"/>
+              <a:t>07.07.2025</a:t>
+            </a:fld>
+            <a:endParaRPr lang="de-CH" dirty="0"/>
+          </a:p>
+        </p:txBody>
+      </p:sp>
+      <p:sp>
+        <p:nvSpPr>
+          <p:cNvPr id="5" name="Fußzeilenplatzhalter 4">
+            <a:extLst>
+              <a:ext uri="{FF2B5EF4-FFF2-40B4-BE49-F238E27FC236}">
+                <a16:creationId xmlns:a16="http://schemas.microsoft.com/office/drawing/2014/main" id="{6E04D102-07BD-1C6D-8D3F-3C54E0CE9256}"/>
+              </a:ext>
+            </a:extLst>
+          </p:cNvPr>
+          <p:cNvSpPr>
+            <a:spLocks noGrp="1"/>
+          </p:cNvSpPr>
+          <p:nvPr>
+            <p:ph type="ftr" sz="quarter" idx="11"/>
+          </p:nvPr>
+        </p:nvSpPr>
+        <p:spPr/>
+        <p:txBody>
+          <a:bodyPr/>
+          <a:lstStyle/>
+          <a:p>
+            <a:r>
+              <a:rPr lang="en-US"/>
+              <a:t>Institute For Sensor and Electronics</a:t>
+            </a:r>
+            <a:endParaRPr lang="de-CH" dirty="0"/>
+          </a:p>
+        </p:txBody>
+      </p:sp>
+      <p:sp>
+        <p:nvSpPr>
+          <p:cNvPr id="6" name="Foliennummernplatzhalter 5">
+            <a:extLst>
+              <a:ext uri="{FF2B5EF4-FFF2-40B4-BE49-F238E27FC236}">
+                <a16:creationId xmlns:a16="http://schemas.microsoft.com/office/drawing/2014/main" id="{15BC4C99-DDCC-460E-9CD0-A4B5402149B4}"/>
+              </a:ext>
+            </a:extLst>
+          </p:cNvPr>
+          <p:cNvSpPr>
+            <a:spLocks noGrp="1"/>
+          </p:cNvSpPr>
+          <p:nvPr>
+            <p:ph type="sldNum" sz="quarter" idx="12"/>
+          </p:nvPr>
+        </p:nvSpPr>
+        <p:spPr/>
+        <p:txBody>
+          <a:bodyPr/>
+          <a:lstStyle/>
+          <a:p>
+            <a:fld id="{442AD375-037F-43D0-B059-5172DA06796A}" type="slidenum">
+              <a:rPr lang="de-CH" smtClean="0"/>
+              <a:pPr/>
+              <a:t>20</a:t>
+            </a:fld>
+            <a:endParaRPr lang="de-CH" dirty="0"/>
+          </a:p>
+        </p:txBody>
+      </p:sp>
+    </p:spTree>
+    <p:extLst>
+      <p:ext uri="{BB962C8B-B14F-4D97-AF65-F5344CB8AC3E}">
+        <p14:creationId xmlns:p14="http://schemas.microsoft.com/office/powerpoint/2010/main" val="3987420019"/>
       </p:ext>
     </p:extLst>
   </p:cSld>
@@ -5301,7 +11454,74 @@
           <a:p>
             <a:r>
               <a:rPr lang="en-GB" dirty="0"/>
-              <a:t>I - …</a:t>
+              <a:t>I - Introduction</a:t>
+            </a:r>
+          </a:p>
+          <a:p>
+            <a:pPr>
+              <a:lnSpc>
+                <a:spcPct val="100000"/>
+              </a:lnSpc>
+            </a:pPr>
+            <a:r>
+              <a:rPr lang="en-GB" i="1" dirty="0">
+                <a:solidFill>
+                  <a:schemeClr val="bg1">
+                    <a:lumMod val="50000"/>
+                  </a:schemeClr>
+                </a:solidFill>
+              </a:rPr>
+              <a:t>The problem</a:t>
+            </a:r>
+          </a:p>
+          <a:p>
+            <a:pPr>
+              <a:lnSpc>
+                <a:spcPct val="100000"/>
+              </a:lnSpc>
+            </a:pPr>
+            <a:r>
+              <a:rPr lang="en-GB" i="1" dirty="0">
+                <a:solidFill>
+                  <a:schemeClr val="bg1">
+                    <a:lumMod val="50000"/>
+                  </a:schemeClr>
+                </a:solidFill>
+              </a:rPr>
+              <a:t>What is a Kalman filter</a:t>
+            </a:r>
+          </a:p>
+        </p:txBody>
+      </p:sp>
+      <p:sp>
+        <p:nvSpPr>
+          <p:cNvPr id="4" name="Text Placeholder 3">
+            <a:extLst>
+              <a:ext uri="{FF2B5EF4-FFF2-40B4-BE49-F238E27FC236}">
+                <a16:creationId xmlns:a16="http://schemas.microsoft.com/office/drawing/2014/main" id="{7491B610-C9DB-5310-CC21-081DFDB976F9}"/>
+              </a:ext>
+            </a:extLst>
+          </p:cNvPr>
+          <p:cNvSpPr>
+            <a:spLocks noGrp="1"/>
+          </p:cNvSpPr>
+          <p:nvPr>
+            <p:ph type="body" sz="quarter" idx="29"/>
+          </p:nvPr>
+        </p:nvSpPr>
+        <p:spPr>
+          <a:xfrm>
+            <a:off x="6481971" y="2232336"/>
+            <a:ext cx="4501128" cy="1523200"/>
+          </a:xfrm>
+        </p:spPr>
+        <p:txBody>
+          <a:bodyPr/>
+          <a:lstStyle/>
+          <a:p>
+            <a:r>
+              <a:rPr lang="en-GB" dirty="0"/>
+              <a:t>III – Practical Application</a:t>
             </a:r>
           </a:p>
           <a:p>
@@ -5326,7 +11546,7 @@
                   </a:schemeClr>
                 </a:solidFill>
               </a:rPr>
-              <a:t>…</a:t>
+              <a:t>The tracking of a moving car</a:t>
             </a:r>
           </a:p>
           <a:p>
@@ -5343,48 +11563,31 @@
                   </a:schemeClr>
                 </a:solidFill>
               </a:rPr>
-              <a:t>…</a:t>
-            </a:r>
-          </a:p>
-          <a:p>
-            <a:pPr>
-              <a:lnSpc>
-                <a:spcPct val="100000"/>
-              </a:lnSpc>
-            </a:pPr>
-            <a:r>
-              <a:rPr lang="en-GB" i="1" dirty="0">
-                <a:solidFill>
-                  <a:schemeClr val="bg1">
-                    <a:lumMod val="50000"/>
-                  </a:schemeClr>
-                </a:solidFill>
-              </a:rPr>
-              <a:t>…</a:t>
-            </a:r>
-          </a:p>
-        </p:txBody>
-      </p:sp>
-      <p:sp>
-        <p:nvSpPr>
-          <p:cNvPr id="4" name="Text Placeholder 3">
-            <a:extLst>
-              <a:ext uri="{FF2B5EF4-FFF2-40B4-BE49-F238E27FC236}">
-                <a16:creationId xmlns:a16="http://schemas.microsoft.com/office/drawing/2014/main" id="{7491B610-C9DB-5310-CC21-081DFDB976F9}"/>
-              </a:ext>
-            </a:extLst>
-          </p:cNvPr>
-          <p:cNvSpPr>
-            <a:spLocks noGrp="1"/>
-          </p:cNvSpPr>
-          <p:nvPr>
-            <p:ph type="body" sz="quarter" idx="29"/>
+              <a:t>The effects of convergence parameters</a:t>
+            </a:r>
+          </a:p>
+        </p:txBody>
+      </p:sp>
+      <p:sp>
+        <p:nvSpPr>
+          <p:cNvPr id="5" name="Text Placeholder 4">
+            <a:extLst>
+              <a:ext uri="{FF2B5EF4-FFF2-40B4-BE49-F238E27FC236}">
+                <a16:creationId xmlns:a16="http://schemas.microsoft.com/office/drawing/2014/main" id="{4F4AE0B3-F622-B7CA-8462-B506671BBC1F}"/>
+              </a:ext>
+            </a:extLst>
+          </p:cNvPr>
+          <p:cNvSpPr>
+            <a:spLocks noGrp="1"/>
+          </p:cNvSpPr>
+          <p:nvPr>
+            <p:ph type="body" sz="quarter" idx="30"/>
           </p:nvPr>
         </p:nvSpPr>
         <p:spPr>
           <a:xfrm>
-            <a:off x="6481971" y="2232336"/>
-            <a:ext cx="4501128" cy="1523200"/>
+            <a:off x="937950" y="4408612"/>
+            <a:ext cx="4501128" cy="1632677"/>
           </a:xfrm>
         </p:spPr>
         <p:txBody>
@@ -5393,7 +11596,7 @@
           <a:p>
             <a:r>
               <a:rPr lang="en-GB" dirty="0"/>
-              <a:t>III - …</a:t>
+              <a:t>II – Theoretical Foundation</a:t>
             </a:r>
           </a:p>
           <a:p>
@@ -5418,7 +11621,7 @@
                   </a:schemeClr>
                 </a:solidFill>
               </a:rPr>
-              <a:t>…</a:t>
+              <a:t>Kalman Filter: Functionality</a:t>
             </a:r>
           </a:p>
           <a:p>
@@ -5435,47 +11638,30 @@
                   </a:schemeClr>
                 </a:solidFill>
               </a:rPr>
-              <a:t>…</a:t>
-            </a:r>
-          </a:p>
-          <a:p>
-            <a:pPr>
-              <a:lnSpc>
-                <a:spcPct val="100000"/>
-              </a:lnSpc>
-            </a:pPr>
-            <a:r>
-              <a:rPr lang="en-GB" i="1" dirty="0">
-                <a:solidFill>
-                  <a:schemeClr val="bg1">
-                    <a:lumMod val="50000"/>
-                  </a:schemeClr>
-                </a:solidFill>
-              </a:rPr>
-              <a:t>…</a:t>
-            </a:r>
-          </a:p>
-        </p:txBody>
-      </p:sp>
-      <p:sp>
-        <p:nvSpPr>
-          <p:cNvPr id="5" name="Text Placeholder 4">
-            <a:extLst>
-              <a:ext uri="{FF2B5EF4-FFF2-40B4-BE49-F238E27FC236}">
-                <a16:creationId xmlns:a16="http://schemas.microsoft.com/office/drawing/2014/main" id="{4F4AE0B3-F622-B7CA-8462-B506671BBC1F}"/>
-              </a:ext>
-            </a:extLst>
-          </p:cNvPr>
-          <p:cNvSpPr>
-            <a:spLocks noGrp="1"/>
-          </p:cNvSpPr>
-          <p:nvPr>
-            <p:ph type="body" sz="quarter" idx="30"/>
+              <a:t>Kalman Filter: Convergence</a:t>
+            </a:r>
+          </a:p>
+        </p:txBody>
+      </p:sp>
+      <p:sp>
+        <p:nvSpPr>
+          <p:cNvPr id="6" name="Text Placeholder 5">
+            <a:extLst>
+              <a:ext uri="{FF2B5EF4-FFF2-40B4-BE49-F238E27FC236}">
+                <a16:creationId xmlns:a16="http://schemas.microsoft.com/office/drawing/2014/main" id="{BCFAB47B-157D-E2BF-B8E5-19E4698619FA}"/>
+              </a:ext>
+            </a:extLst>
+          </p:cNvPr>
+          <p:cNvSpPr>
+            <a:spLocks noGrp="1"/>
+          </p:cNvSpPr>
+          <p:nvPr>
+            <p:ph type="body" sz="quarter" idx="31"/>
           </p:nvPr>
         </p:nvSpPr>
         <p:spPr>
           <a:xfrm>
-            <a:off x="937950" y="4408612"/>
+            <a:off x="6481971" y="4408612"/>
             <a:ext cx="4501128" cy="1632677"/>
           </a:xfrm>
         </p:spPr>
@@ -5485,7 +11671,7 @@
           <a:p>
             <a:r>
               <a:rPr lang="en-GB" dirty="0"/>
-              <a:t>II - …</a:t>
+              <a:t>IV - Conclusion</a:t>
             </a:r>
           </a:p>
           <a:p>
@@ -5510,7 +11696,7 @@
                   </a:schemeClr>
                 </a:solidFill>
               </a:rPr>
-              <a:t>…</a:t>
+              <a:t>Challenges</a:t>
             </a:r>
           </a:p>
           <a:p>
@@ -5527,7 +11713,7 @@
                   </a:schemeClr>
                 </a:solidFill>
               </a:rPr>
-              <a:t>…</a:t>
+              <a:t>Future Work</a:t>
             </a:r>
           </a:p>
           <a:p>
@@ -5544,99 +11730,7 @@
                   </a:schemeClr>
                 </a:solidFill>
               </a:rPr>
-              <a:t>…</a:t>
-            </a:r>
-          </a:p>
-        </p:txBody>
-      </p:sp>
-      <p:sp>
-        <p:nvSpPr>
-          <p:cNvPr id="6" name="Text Placeholder 5">
-            <a:extLst>
-              <a:ext uri="{FF2B5EF4-FFF2-40B4-BE49-F238E27FC236}">
-                <a16:creationId xmlns:a16="http://schemas.microsoft.com/office/drawing/2014/main" id="{BCFAB47B-157D-E2BF-B8E5-19E4698619FA}"/>
-              </a:ext>
-            </a:extLst>
-          </p:cNvPr>
-          <p:cNvSpPr>
-            <a:spLocks noGrp="1"/>
-          </p:cNvSpPr>
-          <p:nvPr>
-            <p:ph type="body" sz="quarter" idx="31"/>
-          </p:nvPr>
-        </p:nvSpPr>
-        <p:spPr>
-          <a:xfrm>
-            <a:off x="6481971" y="4408612"/>
-            <a:ext cx="4501128" cy="1632677"/>
-          </a:xfrm>
-        </p:spPr>
-        <p:txBody>
-          <a:bodyPr/>
-          <a:lstStyle/>
-          <a:p>
-            <a:r>
-              <a:rPr lang="en-GB" dirty="0"/>
-              <a:t>IV - …</a:t>
-            </a:r>
-          </a:p>
-          <a:p>
-            <a:pPr>
-              <a:lnSpc>
-                <a:spcPct val="100000"/>
-              </a:lnSpc>
-            </a:pPr>
-            <a:endParaRPr lang="en-GB" dirty="0"/>
-          </a:p>
-          <a:p>
-            <a:pPr>
-              <a:lnSpc>
-                <a:spcPct val="100000"/>
-              </a:lnSpc>
-            </a:pPr>
-            <a:r>
-              <a:rPr lang="en-GB" i="1" dirty="0">
-                <a:solidFill>
-                  <a:schemeClr val="bg1">
-                    <a:lumMod val="50000"/>
-                  </a:schemeClr>
-                </a:solidFill>
-              </a:rPr>
-              <a:t>…</a:t>
-            </a:r>
-          </a:p>
-          <a:p>
-            <a:pPr>
-              <a:lnSpc>
-                <a:spcPct val="100000"/>
-              </a:lnSpc>
-            </a:pPr>
-            <a:r>
-              <a:rPr lang="en-GB" i="1" dirty="0">
-                <a:solidFill>
-                  <a:schemeClr val="bg1">
-                    <a:lumMod val="50000"/>
-                  </a:schemeClr>
-                </a:solidFill>
-              </a:rPr>
-              <a:t>…</a:t>
-            </a:r>
-          </a:p>
-          <a:p>
-            <a:pPr>
-              <a:lnSpc>
-                <a:spcPct val="100000"/>
-              </a:lnSpc>
-            </a:pPr>
-            <a:r>
-              <a:rPr lang="en-GB" i="1" dirty="0">
-                <a:solidFill>
-                  <a:schemeClr val="bg1">
-                    <a:lumMod val="50000"/>
-                  </a:schemeClr>
-                </a:solidFill>
-              </a:rPr>
-              <a:t>…</a:t>
+              <a:t>Conclusion</a:t>
             </a:r>
           </a:p>
         </p:txBody>
@@ -5692,7 +11786,11 @@
           <a:bodyPr/>
           <a:lstStyle/>
           <a:p>
-            <a:endParaRPr lang="de-CH"/>
+            <a:r>
+              <a:rPr lang="de-CH" dirty="0" err="1"/>
+              <a:t>Introduction</a:t>
+            </a:r>
+            <a:endParaRPr lang="de-CH" dirty="0"/>
           </a:p>
         </p:txBody>
       </p:sp>
@@ -5719,7 +11817,7 @@
           <a:p>
             <a:fld id="{3CAC52EE-1A92-4CB4-BCAA-EDE3CF50CF3F}" type="datetime1">
               <a:rPr lang="de-DE" smtClean="0"/>
-              <a:t>26.05.2025</a:t>
+              <a:t>07.07.2025</a:t>
             </a:fld>
             <a:endParaRPr lang="de-CH" dirty="0"/>
           </a:p>
@@ -5835,7 +11933,15 @@
           <a:bodyPr/>
           <a:lstStyle/>
           <a:p>
-            <a:endParaRPr lang="de-CH"/>
+            <a:r>
+              <a:rPr lang="de-CH" dirty="0"/>
+              <a:t>The </a:t>
+            </a:r>
+            <a:r>
+              <a:rPr lang="de-CH" dirty="0" err="1"/>
+              <a:t>problem</a:t>
+            </a:r>
+            <a:endParaRPr lang="de-CH" dirty="0"/>
           </a:p>
         </p:txBody>
       </p:sp>
@@ -5860,6 +11966,249 @@
           <a:bodyPr/>
           <a:lstStyle/>
           <a:p>
+            <a:pPr>
+              <a:buFontTx/>
+              <a:buChar char="-"/>
+            </a:pPr>
+            <a:r>
+              <a:rPr lang="de-CH" dirty="0"/>
+              <a:t>Sensor </a:t>
+            </a:r>
+            <a:r>
+              <a:rPr lang="de-CH" dirty="0" err="1"/>
+              <a:t>data</a:t>
+            </a:r>
+            <a:r>
+              <a:rPr lang="de-CH" dirty="0"/>
+              <a:t> </a:t>
+            </a:r>
+            <a:r>
+              <a:rPr lang="de-CH" dirty="0" err="1"/>
+              <a:t>consisting</a:t>
+            </a:r>
+            <a:r>
+              <a:rPr lang="de-CH" dirty="0"/>
+              <a:t> </a:t>
+            </a:r>
+            <a:r>
+              <a:rPr lang="de-CH" dirty="0" err="1"/>
+              <a:t>of</a:t>
+            </a:r>
+            <a:r>
+              <a:rPr lang="de-CH" dirty="0"/>
+              <a:t> </a:t>
+            </a:r>
+            <a:r>
+              <a:rPr lang="de-CH" dirty="0" err="1"/>
+              <a:t>random</a:t>
+            </a:r>
+            <a:r>
+              <a:rPr lang="de-CH" dirty="0"/>
+              <a:t> </a:t>
+            </a:r>
+            <a:r>
+              <a:rPr lang="de-CH" dirty="0" err="1"/>
+              <a:t>movement</a:t>
+            </a:r>
+            <a:endParaRPr lang="de-CH" dirty="0"/>
+          </a:p>
+          <a:p>
+            <a:pPr lvl="2">
+              <a:buFontTx/>
+              <a:buChar char="-"/>
+            </a:pPr>
+            <a:r>
+              <a:rPr lang="de-CH" dirty="0" err="1"/>
+              <a:t>Example</a:t>
+            </a:r>
+            <a:r>
+              <a:rPr lang="de-CH" dirty="0"/>
+              <a:t>: Tracking a </a:t>
+            </a:r>
+            <a:r>
+              <a:rPr lang="de-CH" dirty="0" err="1"/>
+              <a:t>driving</a:t>
+            </a:r>
+            <a:r>
+              <a:rPr lang="de-CH" dirty="0"/>
+              <a:t> </a:t>
+            </a:r>
+            <a:r>
+              <a:rPr lang="de-CH" dirty="0" err="1"/>
+              <a:t>car</a:t>
+            </a:r>
+            <a:endParaRPr lang="de-CH" dirty="0"/>
+          </a:p>
+          <a:p>
+            <a:pPr>
+              <a:buFontTx/>
+              <a:buChar char="-"/>
+            </a:pPr>
+            <a:r>
+              <a:rPr lang="de-CH" dirty="0"/>
+              <a:t>Signal </a:t>
+            </a:r>
+            <a:r>
+              <a:rPr lang="de-CH" dirty="0" err="1"/>
+              <a:t>heavily</a:t>
+            </a:r>
+            <a:r>
+              <a:rPr lang="de-CH" dirty="0"/>
+              <a:t> </a:t>
+            </a:r>
+            <a:r>
+              <a:rPr lang="de-CH" dirty="0" err="1"/>
+              <a:t>influenced</a:t>
+            </a:r>
+            <a:r>
+              <a:rPr lang="de-CH" dirty="0"/>
+              <a:t> </a:t>
+            </a:r>
+            <a:r>
+              <a:rPr lang="de-CH" dirty="0" err="1"/>
+              <a:t>by</a:t>
+            </a:r>
+            <a:r>
+              <a:rPr lang="de-CH" dirty="0"/>
+              <a:t> </a:t>
+            </a:r>
+            <a:r>
+              <a:rPr lang="de-CH" dirty="0" err="1"/>
+              <a:t>varying</a:t>
+            </a:r>
+            <a:r>
+              <a:rPr lang="de-CH" dirty="0"/>
+              <a:t> </a:t>
+            </a:r>
+            <a:r>
+              <a:rPr lang="de-CH" dirty="0" err="1"/>
+              <a:t>noise</a:t>
+            </a:r>
+            <a:endParaRPr lang="de-CH" dirty="0"/>
+          </a:p>
+          <a:p>
+            <a:pPr lvl="2">
+              <a:buFontTx/>
+              <a:buChar char="-"/>
+            </a:pPr>
+            <a:r>
+              <a:rPr lang="de-CH" dirty="0" err="1"/>
+              <a:t>Weather</a:t>
+            </a:r>
+            <a:r>
+              <a:rPr lang="de-CH" dirty="0"/>
+              <a:t>, </a:t>
+            </a:r>
+            <a:r>
+              <a:rPr lang="de-CH" dirty="0" err="1"/>
+              <a:t>electromagnetic</a:t>
+            </a:r>
+            <a:r>
+              <a:rPr lang="de-CH" dirty="0"/>
+              <a:t> </a:t>
+            </a:r>
+            <a:r>
+              <a:rPr lang="de-CH" dirty="0" err="1"/>
+              <a:t>pollution</a:t>
+            </a:r>
+            <a:endParaRPr lang="de-CH" dirty="0"/>
+          </a:p>
+          <a:p>
+            <a:pPr marL="268287" lvl="2" indent="0">
+              <a:buNone/>
+            </a:pPr>
+            <a:endParaRPr lang="de-CH" dirty="0"/>
+          </a:p>
+          <a:p>
+            <a:pPr marL="0" indent="0">
+              <a:buNone/>
+            </a:pPr>
+            <a:r>
+              <a:rPr lang="de-CH" b="1" dirty="0" err="1"/>
+              <a:t>How</a:t>
+            </a:r>
+            <a:r>
+              <a:rPr lang="de-CH" b="1" dirty="0"/>
+              <a:t> do </a:t>
+            </a:r>
+            <a:r>
+              <a:rPr lang="de-CH" b="1" dirty="0" err="1"/>
+              <a:t>you</a:t>
+            </a:r>
+            <a:r>
+              <a:rPr lang="de-CH" b="1" dirty="0"/>
+              <a:t> </a:t>
+            </a:r>
+            <a:r>
+              <a:rPr lang="de-CH" b="1" dirty="0" err="1"/>
+              <a:t>get</a:t>
+            </a:r>
+            <a:r>
+              <a:rPr lang="de-CH" b="1" dirty="0"/>
+              <a:t> a </a:t>
+            </a:r>
+            <a:r>
+              <a:rPr lang="de-CH" b="1" dirty="0" err="1"/>
+              <a:t>consistenly</a:t>
+            </a:r>
+            <a:r>
+              <a:rPr lang="de-CH" b="1" dirty="0"/>
+              <a:t> </a:t>
+            </a:r>
+            <a:r>
+              <a:rPr lang="de-CH" b="1" dirty="0" err="1"/>
+              <a:t>clear</a:t>
+            </a:r>
+            <a:r>
+              <a:rPr lang="de-CH" b="1" dirty="0"/>
+              <a:t> </a:t>
+            </a:r>
+            <a:r>
+              <a:rPr lang="de-CH" b="1" dirty="0" err="1"/>
+              <a:t>reading</a:t>
+            </a:r>
+            <a:r>
+              <a:rPr lang="de-CH" b="1" dirty="0"/>
+              <a:t> </a:t>
+            </a:r>
+            <a:r>
+              <a:rPr lang="de-CH" b="1" dirty="0" err="1"/>
+              <a:t>of</a:t>
+            </a:r>
+            <a:r>
+              <a:rPr lang="de-CH" b="1" dirty="0"/>
+              <a:t> </a:t>
+            </a:r>
+            <a:r>
+              <a:rPr lang="de-CH" b="1" dirty="0" err="1"/>
+              <a:t>the</a:t>
+            </a:r>
+            <a:r>
+              <a:rPr lang="de-CH" b="1" dirty="0"/>
+              <a:t> </a:t>
+            </a:r>
+            <a:r>
+              <a:rPr lang="de-CH" b="1" dirty="0" err="1"/>
+              <a:t>actual</a:t>
+            </a:r>
+            <a:r>
+              <a:rPr lang="de-CH" b="1" dirty="0"/>
+              <a:t> </a:t>
+            </a:r>
+            <a:r>
+              <a:rPr lang="de-CH" b="1" dirty="0" err="1"/>
+              <a:t>values</a:t>
+            </a:r>
+            <a:r>
+              <a:rPr lang="de-CH" b="1" dirty="0"/>
+              <a:t>?</a:t>
+            </a:r>
+          </a:p>
+          <a:p>
+            <a:pPr>
+              <a:buFontTx/>
+              <a:buChar char="-"/>
+            </a:pPr>
             <a:endParaRPr lang="de-CH" dirty="0"/>
           </a:p>
         </p:txBody>
@@ -5887,7 +12236,7 @@
           <a:p>
             <a:fld id="{E5DBBF47-BFE4-482E-ACDC-02638A5F301F}" type="datetime1">
               <a:rPr lang="de-DE" smtClean="0"/>
-              <a:t>26.05.2025</a:t>
+              <a:t>07.07.2025</a:t>
             </a:fld>
             <a:endParaRPr lang="de-CH" dirty="0"/>
           </a:p>
@@ -5956,6 +12305,887 @@
     <p:extLst>
       <p:ext uri="{BB962C8B-B14F-4D97-AF65-F5344CB8AC3E}">
         <p14:creationId xmlns:p14="http://schemas.microsoft.com/office/powerpoint/2010/main" val="2425458185"/>
+      </p:ext>
+    </p:extLst>
+  </p:cSld>
+  <p:clrMapOvr>
+    <a:masterClrMapping/>
+  </p:clrMapOvr>
+</p:sld>
+</file>
+
+<file path=ppt/slides/slide6.xml><?xml version="1.0" encoding="utf-8"?>
+<p:sld xmlns:a="http://schemas.openxmlformats.org/drawingml/2006/main" xmlns:r="http://schemas.openxmlformats.org/officeDocument/2006/relationships" xmlns:p="http://schemas.openxmlformats.org/presentationml/2006/main">
+  <p:cSld>
+    <p:spTree>
+      <p:nvGrpSpPr>
+        <p:cNvPr id="1" name=""/>
+        <p:cNvGrpSpPr/>
+        <p:nvPr/>
+      </p:nvGrpSpPr>
+      <p:grpSpPr>
+        <a:xfrm>
+          <a:off x="0" y="0"/>
+          <a:ext cx="0" cy="0"/>
+          <a:chOff x="0" y="0"/>
+          <a:chExt cx="0" cy="0"/>
+        </a:xfrm>
+      </p:grpSpPr>
+      <p:sp>
+        <p:nvSpPr>
+          <p:cNvPr id="2" name="Titel 1">
+            <a:extLst>
+              <a:ext uri="{FF2B5EF4-FFF2-40B4-BE49-F238E27FC236}">
+                <a16:creationId xmlns:a16="http://schemas.microsoft.com/office/drawing/2014/main" id="{C6C45673-39FA-9D99-0E7E-BBA9BFA58BD8}"/>
+              </a:ext>
+            </a:extLst>
+          </p:cNvPr>
+          <p:cNvSpPr>
+            <a:spLocks noGrp="1"/>
+          </p:cNvSpPr>
+          <p:nvPr>
+            <p:ph type="title"/>
+          </p:nvPr>
+        </p:nvSpPr>
+        <p:spPr/>
+        <p:txBody>
+          <a:bodyPr/>
+          <a:lstStyle/>
+          <a:p>
+            <a:r>
+              <a:rPr lang="en-US" dirty="0"/>
+              <a:t>The solution</a:t>
+            </a:r>
+          </a:p>
+        </p:txBody>
+      </p:sp>
+      <p:sp>
+        <p:nvSpPr>
+          <p:cNvPr id="3" name="Inhaltsplatzhalter 2">
+            <a:extLst>
+              <a:ext uri="{FF2B5EF4-FFF2-40B4-BE49-F238E27FC236}">
+                <a16:creationId xmlns:a16="http://schemas.microsoft.com/office/drawing/2014/main" id="{071ECB0B-DFDF-5CAE-6895-C9BE0802FD6E}"/>
+              </a:ext>
+            </a:extLst>
+          </p:cNvPr>
+          <p:cNvSpPr>
+            <a:spLocks noGrp="1"/>
+          </p:cNvSpPr>
+          <p:nvPr>
+            <p:ph idx="1"/>
+          </p:nvPr>
+        </p:nvSpPr>
+        <p:spPr/>
+        <p:txBody>
+          <a:bodyPr/>
+          <a:lstStyle/>
+          <a:p>
+            <a:r>
+              <a:rPr lang="en-US" dirty="0"/>
+              <a:t>A </a:t>
+            </a:r>
+            <a:r>
+              <a:rPr lang="en-US" b="1" dirty="0"/>
+              <a:t>Kalman filter</a:t>
+            </a:r>
+            <a:r>
+              <a:rPr lang="en-US" dirty="0"/>
+              <a:t>(also known as </a:t>
+            </a:r>
+            <a:r>
+              <a:rPr lang="en-US" b="1" dirty="0"/>
+              <a:t>linear quadratic estimation)</a:t>
+            </a:r>
+            <a:endParaRPr lang="en-US" dirty="0"/>
+          </a:p>
+          <a:p>
+            <a:endParaRPr lang="en-US" dirty="0"/>
+          </a:p>
+          <a:p>
+            <a:pPr marL="0" indent="0">
+              <a:buNone/>
+            </a:pPr>
+            <a:r>
+              <a:rPr lang="en-US" b="1" dirty="0"/>
+              <a:t>What is a Kalman filter?</a:t>
+            </a:r>
+          </a:p>
+          <a:p>
+            <a:pPr marL="0" indent="0">
+              <a:buNone/>
+            </a:pPr>
+            <a:endParaRPr lang="en-US" b="1" dirty="0"/>
+          </a:p>
+          <a:p>
+            <a:pPr marL="0" indent="0">
+              <a:buNone/>
+            </a:pPr>
+            <a:r>
+              <a:rPr lang="en-US" dirty="0"/>
+              <a:t>The Kalman filter combines:</a:t>
+            </a:r>
+          </a:p>
+          <a:p>
+            <a:pPr marL="0" indent="0">
+              <a:buNone/>
+            </a:pPr>
+            <a:r>
+              <a:rPr lang="en-US" dirty="0"/>
+              <a:t>A model how the system evolves over time</a:t>
+            </a:r>
+          </a:p>
+          <a:p>
+            <a:pPr marL="0" indent="0">
+              <a:buNone/>
+            </a:pPr>
+            <a:r>
+              <a:rPr lang="en-US" dirty="0"/>
+              <a:t>A model of how observations relate to the system </a:t>
+            </a:r>
+          </a:p>
+          <a:p>
+            <a:pPr marL="0" indent="0">
+              <a:buNone/>
+            </a:pPr>
+            <a:r>
+              <a:rPr lang="en-US" dirty="0"/>
+              <a:t>Noisy observations</a:t>
+            </a:r>
+          </a:p>
+          <a:p>
+            <a:pPr marL="0" indent="0">
+              <a:buNone/>
+            </a:pPr>
+            <a:endParaRPr lang="en-US" dirty="0"/>
+          </a:p>
+          <a:p>
+            <a:pPr marL="0" indent="0">
+              <a:buNone/>
+            </a:pPr>
+            <a:r>
+              <a:rPr lang="en-US" dirty="0"/>
+              <a:t>To estimate the true state of a system over time</a:t>
+            </a:r>
+          </a:p>
+        </p:txBody>
+      </p:sp>
+      <p:sp>
+        <p:nvSpPr>
+          <p:cNvPr id="4" name="Datumsplatzhalter 3">
+            <a:extLst>
+              <a:ext uri="{FF2B5EF4-FFF2-40B4-BE49-F238E27FC236}">
+                <a16:creationId xmlns:a16="http://schemas.microsoft.com/office/drawing/2014/main" id="{DC160A36-06A6-0331-F1AF-AD864511E410}"/>
+              </a:ext>
+            </a:extLst>
+          </p:cNvPr>
+          <p:cNvSpPr>
+            <a:spLocks noGrp="1"/>
+          </p:cNvSpPr>
+          <p:nvPr>
+            <p:ph type="dt" sz="half" idx="10"/>
+          </p:nvPr>
+        </p:nvSpPr>
+        <p:spPr/>
+        <p:txBody>
+          <a:bodyPr/>
+          <a:lstStyle/>
+          <a:p>
+            <a:fld id="{B2DD1E4E-1107-499B-BB00-8AA0260A0EFB}" type="datetime1">
+              <a:rPr lang="de-DE" smtClean="0"/>
+              <a:t>07.07.2025</a:t>
+            </a:fld>
+            <a:endParaRPr lang="de-CH" dirty="0"/>
+          </a:p>
+        </p:txBody>
+      </p:sp>
+      <p:sp>
+        <p:nvSpPr>
+          <p:cNvPr id="5" name="Fußzeilenplatzhalter 4">
+            <a:extLst>
+              <a:ext uri="{FF2B5EF4-FFF2-40B4-BE49-F238E27FC236}">
+                <a16:creationId xmlns:a16="http://schemas.microsoft.com/office/drawing/2014/main" id="{859A8952-F825-FA1B-F385-CC86C02946F9}"/>
+              </a:ext>
+            </a:extLst>
+          </p:cNvPr>
+          <p:cNvSpPr>
+            <a:spLocks noGrp="1"/>
+          </p:cNvSpPr>
+          <p:nvPr>
+            <p:ph type="ftr" sz="quarter" idx="11"/>
+          </p:nvPr>
+        </p:nvSpPr>
+        <p:spPr/>
+        <p:txBody>
+          <a:bodyPr/>
+          <a:lstStyle/>
+          <a:p>
+            <a:r>
+              <a:rPr lang="en-US"/>
+              <a:t>Institute For Sensor and Electronics</a:t>
+            </a:r>
+            <a:endParaRPr lang="de-CH" dirty="0"/>
+          </a:p>
+        </p:txBody>
+      </p:sp>
+      <p:sp>
+        <p:nvSpPr>
+          <p:cNvPr id="6" name="Foliennummernplatzhalter 5">
+            <a:extLst>
+              <a:ext uri="{FF2B5EF4-FFF2-40B4-BE49-F238E27FC236}">
+                <a16:creationId xmlns:a16="http://schemas.microsoft.com/office/drawing/2014/main" id="{BF772E28-818C-3624-5C1E-97C192805762}"/>
+              </a:ext>
+            </a:extLst>
+          </p:cNvPr>
+          <p:cNvSpPr>
+            <a:spLocks noGrp="1"/>
+          </p:cNvSpPr>
+          <p:nvPr>
+            <p:ph type="sldNum" sz="quarter" idx="12"/>
+          </p:nvPr>
+        </p:nvSpPr>
+        <p:spPr/>
+        <p:txBody>
+          <a:bodyPr/>
+          <a:lstStyle/>
+          <a:p>
+            <a:fld id="{442AD375-037F-43D0-B059-5172DA06796A}" type="slidenum">
+              <a:rPr lang="de-CH" smtClean="0"/>
+              <a:pPr/>
+              <a:t>6</a:t>
+            </a:fld>
+            <a:endParaRPr lang="de-CH" dirty="0"/>
+          </a:p>
+        </p:txBody>
+      </p:sp>
+    </p:spTree>
+    <p:extLst>
+      <p:ext uri="{BB962C8B-B14F-4D97-AF65-F5344CB8AC3E}">
+        <p14:creationId xmlns:p14="http://schemas.microsoft.com/office/powerpoint/2010/main" val="2935309254"/>
+      </p:ext>
+    </p:extLst>
+  </p:cSld>
+  <p:clrMapOvr>
+    <a:masterClrMapping/>
+  </p:clrMapOvr>
+</p:sld>
+</file>
+
+<file path=ppt/slides/slide7.xml><?xml version="1.0" encoding="utf-8"?>
+<p:sld xmlns:a="http://schemas.openxmlformats.org/drawingml/2006/main" xmlns:r="http://schemas.openxmlformats.org/officeDocument/2006/relationships" xmlns:p="http://schemas.openxmlformats.org/presentationml/2006/main">
+  <p:cSld>
+    <p:spTree>
+      <p:nvGrpSpPr>
+        <p:cNvPr id="1" name="">
+          <a:extLst>
+            <a:ext uri="{FF2B5EF4-FFF2-40B4-BE49-F238E27FC236}">
+              <a16:creationId xmlns:a16="http://schemas.microsoft.com/office/drawing/2014/main" id="{E2FADDE8-16C8-D3E4-DD0E-3C66ACB5E98C}"/>
+            </a:ext>
+          </a:extLst>
+        </p:cNvPr>
+        <p:cNvGrpSpPr/>
+        <p:nvPr/>
+      </p:nvGrpSpPr>
+      <p:grpSpPr>
+        <a:xfrm>
+          <a:off x="0" y="0"/>
+          <a:ext cx="0" cy="0"/>
+          <a:chOff x="0" y="0"/>
+          <a:chExt cx="0" cy="0"/>
+        </a:xfrm>
+      </p:grpSpPr>
+      <p:sp>
+        <p:nvSpPr>
+          <p:cNvPr id="7" name="Title 6">
+            <a:extLst>
+              <a:ext uri="{FF2B5EF4-FFF2-40B4-BE49-F238E27FC236}">
+                <a16:creationId xmlns:a16="http://schemas.microsoft.com/office/drawing/2014/main" id="{77169A84-5FC1-FD1C-1000-EED6B1F73513}"/>
+              </a:ext>
+            </a:extLst>
+          </p:cNvPr>
+          <p:cNvSpPr>
+            <a:spLocks noGrp="1"/>
+          </p:cNvSpPr>
+          <p:nvPr>
+            <p:ph type="title"/>
+          </p:nvPr>
+        </p:nvSpPr>
+        <p:spPr/>
+        <p:txBody>
+          <a:bodyPr/>
+          <a:lstStyle/>
+          <a:p>
+            <a:r>
+              <a:rPr lang="de-CH" dirty="0" err="1"/>
+              <a:t>Theoretical</a:t>
+            </a:r>
+            <a:r>
+              <a:rPr lang="de-CH" dirty="0"/>
+              <a:t> </a:t>
+            </a:r>
+            <a:r>
+              <a:rPr lang="de-CH" dirty="0" err="1"/>
+              <a:t>Foundation</a:t>
+            </a:r>
+            <a:endParaRPr lang="de-CH" dirty="0"/>
+          </a:p>
+        </p:txBody>
+      </p:sp>
+      <p:sp>
+        <p:nvSpPr>
+          <p:cNvPr id="4" name="Date Placeholder 3">
+            <a:extLst>
+              <a:ext uri="{FF2B5EF4-FFF2-40B4-BE49-F238E27FC236}">
+                <a16:creationId xmlns:a16="http://schemas.microsoft.com/office/drawing/2014/main" id="{ACDD7B7E-D78C-A23E-D0E8-50C5745EF311}"/>
+              </a:ext>
+            </a:extLst>
+          </p:cNvPr>
+          <p:cNvSpPr>
+            <a:spLocks noGrp="1"/>
+          </p:cNvSpPr>
+          <p:nvPr>
+            <p:ph type="dt" sz="half" idx="10"/>
+          </p:nvPr>
+        </p:nvSpPr>
+        <p:spPr/>
+        <p:txBody>
+          <a:bodyPr/>
+          <a:lstStyle/>
+          <a:p>
+            <a:fld id="{3CAC52EE-1A92-4CB4-BCAA-EDE3CF50CF3F}" type="datetime1">
+              <a:rPr lang="de-DE" smtClean="0"/>
+              <a:t>07.07.2025</a:t>
+            </a:fld>
+            <a:endParaRPr lang="de-CH" dirty="0"/>
+          </a:p>
+        </p:txBody>
+      </p:sp>
+      <p:sp>
+        <p:nvSpPr>
+          <p:cNvPr id="5" name="Footer Placeholder 4">
+            <a:extLst>
+              <a:ext uri="{FF2B5EF4-FFF2-40B4-BE49-F238E27FC236}">
+                <a16:creationId xmlns:a16="http://schemas.microsoft.com/office/drawing/2014/main" id="{25FD5946-4671-F2B5-80DA-780F875D38EE}"/>
+              </a:ext>
+            </a:extLst>
+          </p:cNvPr>
+          <p:cNvSpPr>
+            <a:spLocks noGrp="1"/>
+          </p:cNvSpPr>
+          <p:nvPr>
+            <p:ph type="ftr" sz="quarter" idx="11"/>
+          </p:nvPr>
+        </p:nvSpPr>
+        <p:spPr/>
+        <p:txBody>
+          <a:bodyPr/>
+          <a:lstStyle/>
+          <a:p>
+            <a:r>
+              <a:rPr lang="en-US"/>
+              <a:t>Institute For Sensor and Electronics</a:t>
+            </a:r>
+            <a:endParaRPr lang="de-CH" dirty="0"/>
+          </a:p>
+        </p:txBody>
+      </p:sp>
+      <p:sp>
+        <p:nvSpPr>
+          <p:cNvPr id="6" name="Slide Number Placeholder 5">
+            <a:extLst>
+              <a:ext uri="{FF2B5EF4-FFF2-40B4-BE49-F238E27FC236}">
+                <a16:creationId xmlns:a16="http://schemas.microsoft.com/office/drawing/2014/main" id="{B6A4320D-AB32-08FC-F310-5C59DBC40B28}"/>
+              </a:ext>
+            </a:extLst>
+          </p:cNvPr>
+          <p:cNvSpPr>
+            <a:spLocks noGrp="1"/>
+          </p:cNvSpPr>
+          <p:nvPr>
+            <p:ph type="sldNum" sz="quarter" idx="12"/>
+          </p:nvPr>
+        </p:nvSpPr>
+        <p:spPr/>
+        <p:txBody>
+          <a:bodyPr/>
+          <a:lstStyle/>
+          <a:p>
+            <a:fld id="{442AD375-037F-43D0-B059-5172DA06796A}" type="slidenum">
+              <a:rPr lang="de-CH" smtClean="0"/>
+              <a:pPr/>
+              <a:t>7</a:t>
+            </a:fld>
+            <a:endParaRPr lang="de-CH" dirty="0"/>
+          </a:p>
+        </p:txBody>
+      </p:sp>
+    </p:spTree>
+    <p:extLst>
+      <p:ext uri="{BB962C8B-B14F-4D97-AF65-F5344CB8AC3E}">
+        <p14:creationId xmlns:p14="http://schemas.microsoft.com/office/powerpoint/2010/main" val="16486674"/>
+      </p:ext>
+    </p:extLst>
+  </p:cSld>
+  <p:clrMapOvr>
+    <a:masterClrMapping/>
+  </p:clrMapOvr>
+</p:sld>
+</file>
+
+<file path=ppt/slides/slide8.xml><?xml version="1.0" encoding="utf-8"?>
+<p:sld xmlns:a="http://schemas.openxmlformats.org/drawingml/2006/main" xmlns:r="http://schemas.openxmlformats.org/officeDocument/2006/relationships" xmlns:p="http://schemas.openxmlformats.org/presentationml/2006/main">
+  <p:cSld>
+    <p:spTree>
+      <p:nvGrpSpPr>
+        <p:cNvPr id="1" name=""/>
+        <p:cNvGrpSpPr/>
+        <p:nvPr/>
+      </p:nvGrpSpPr>
+      <p:grpSpPr>
+        <a:xfrm>
+          <a:off x="0" y="0"/>
+          <a:ext cx="0" cy="0"/>
+          <a:chOff x="0" y="0"/>
+          <a:chExt cx="0" cy="0"/>
+        </a:xfrm>
+      </p:grpSpPr>
+      <p:sp>
+        <p:nvSpPr>
+          <p:cNvPr id="2" name="Titel 1">
+            <a:extLst>
+              <a:ext uri="{FF2B5EF4-FFF2-40B4-BE49-F238E27FC236}">
+                <a16:creationId xmlns:a16="http://schemas.microsoft.com/office/drawing/2014/main" id="{259AF527-EDBF-0FEE-66D0-2A7838D919DA}"/>
+              </a:ext>
+            </a:extLst>
+          </p:cNvPr>
+          <p:cNvSpPr>
+            <a:spLocks noGrp="1"/>
+          </p:cNvSpPr>
+          <p:nvPr>
+            <p:ph type="title"/>
+          </p:nvPr>
+        </p:nvSpPr>
+        <p:spPr>
+          <a:xfrm>
+            <a:off x="408076" y="1170372"/>
+            <a:ext cx="11012400" cy="984885"/>
+          </a:xfrm>
+        </p:spPr>
+        <p:txBody>
+          <a:bodyPr/>
+          <a:lstStyle/>
+          <a:p>
+            <a:r>
+              <a:rPr lang="en-GB" dirty="0"/>
+              <a:t>Kalman Filter: Functionality</a:t>
+            </a:r>
+            <a:br>
+              <a:rPr lang="en-GB" i="1" dirty="0">
+                <a:solidFill>
+                  <a:schemeClr val="bg1">
+                    <a:lumMod val="50000"/>
+                  </a:schemeClr>
+                </a:solidFill>
+              </a:rPr>
+            </a:br>
+            <a:endParaRPr lang="en-US" dirty="0"/>
+          </a:p>
+        </p:txBody>
+      </p:sp>
+      <p:pic>
+        <p:nvPicPr>
+          <p:cNvPr id="7" name="Inhaltsplatzhalter 6">
+            <a:extLst>
+              <a:ext uri="{FF2B5EF4-FFF2-40B4-BE49-F238E27FC236}">
+                <a16:creationId xmlns:a16="http://schemas.microsoft.com/office/drawing/2014/main" id="{176E29A1-0F4B-F074-37FB-99D6DF9D6E0B}"/>
+              </a:ext>
+            </a:extLst>
+          </p:cNvPr>
+          <p:cNvPicPr>
+            <a:picLocks noGrp="1" noChangeAspect="1"/>
+          </p:cNvPicPr>
+          <p:nvPr>
+            <p:ph idx="1"/>
+          </p:nvPr>
+        </p:nvPicPr>
+        <p:blipFill>
+          <a:blip r:embed="rId2"/>
+          <a:stretch>
+            <a:fillRect/>
+          </a:stretch>
+        </p:blipFill>
+        <p:spPr>
+          <a:xfrm>
+            <a:off x="2008377" y="2060848"/>
+            <a:ext cx="7939151" cy="4033089"/>
+          </a:xfrm>
+          <a:prstGeom prst="rect">
+            <a:avLst/>
+          </a:prstGeom>
+        </p:spPr>
+      </p:pic>
+      <p:sp>
+        <p:nvSpPr>
+          <p:cNvPr id="4" name="Datumsplatzhalter 3">
+            <a:extLst>
+              <a:ext uri="{FF2B5EF4-FFF2-40B4-BE49-F238E27FC236}">
+                <a16:creationId xmlns:a16="http://schemas.microsoft.com/office/drawing/2014/main" id="{0741729A-015F-0450-4AD3-D7187D037392}"/>
+              </a:ext>
+            </a:extLst>
+          </p:cNvPr>
+          <p:cNvSpPr>
+            <a:spLocks noGrp="1"/>
+          </p:cNvSpPr>
+          <p:nvPr>
+            <p:ph type="dt" sz="half" idx="10"/>
+          </p:nvPr>
+        </p:nvSpPr>
+        <p:spPr/>
+        <p:txBody>
+          <a:bodyPr/>
+          <a:lstStyle/>
+          <a:p>
+            <a:fld id="{B2DD1E4E-1107-499B-BB00-8AA0260A0EFB}" type="datetime1">
+              <a:rPr lang="de-DE" smtClean="0"/>
+              <a:t>07.07.2025</a:t>
+            </a:fld>
+            <a:endParaRPr lang="de-CH" dirty="0"/>
+          </a:p>
+        </p:txBody>
+      </p:sp>
+      <p:sp>
+        <p:nvSpPr>
+          <p:cNvPr id="5" name="Fußzeilenplatzhalter 4">
+            <a:extLst>
+              <a:ext uri="{FF2B5EF4-FFF2-40B4-BE49-F238E27FC236}">
+                <a16:creationId xmlns:a16="http://schemas.microsoft.com/office/drawing/2014/main" id="{B594DDDE-161B-49DB-D3B1-31C2DC5DDEDF}"/>
+              </a:ext>
+            </a:extLst>
+          </p:cNvPr>
+          <p:cNvSpPr>
+            <a:spLocks noGrp="1"/>
+          </p:cNvSpPr>
+          <p:nvPr>
+            <p:ph type="ftr" sz="quarter" idx="11"/>
+          </p:nvPr>
+        </p:nvSpPr>
+        <p:spPr/>
+        <p:txBody>
+          <a:bodyPr/>
+          <a:lstStyle/>
+          <a:p>
+            <a:r>
+              <a:rPr lang="en-US"/>
+              <a:t>Institute For Sensor and Electronics</a:t>
+            </a:r>
+            <a:endParaRPr lang="de-CH" dirty="0"/>
+          </a:p>
+        </p:txBody>
+      </p:sp>
+      <p:sp>
+        <p:nvSpPr>
+          <p:cNvPr id="6" name="Foliennummernplatzhalter 5">
+            <a:extLst>
+              <a:ext uri="{FF2B5EF4-FFF2-40B4-BE49-F238E27FC236}">
+                <a16:creationId xmlns:a16="http://schemas.microsoft.com/office/drawing/2014/main" id="{68A5A8D4-AA43-C975-718B-E62A9EC0991A}"/>
+              </a:ext>
+            </a:extLst>
+          </p:cNvPr>
+          <p:cNvSpPr>
+            <a:spLocks noGrp="1"/>
+          </p:cNvSpPr>
+          <p:nvPr>
+            <p:ph type="sldNum" sz="quarter" idx="12"/>
+          </p:nvPr>
+        </p:nvSpPr>
+        <p:spPr/>
+        <p:txBody>
+          <a:bodyPr/>
+          <a:lstStyle/>
+          <a:p>
+            <a:fld id="{442AD375-037F-43D0-B059-5172DA06796A}" type="slidenum">
+              <a:rPr lang="de-CH" smtClean="0"/>
+              <a:pPr/>
+              <a:t>8</a:t>
+            </a:fld>
+            <a:endParaRPr lang="de-CH" dirty="0"/>
+          </a:p>
+        </p:txBody>
+      </p:sp>
+    </p:spTree>
+    <p:extLst>
+      <p:ext uri="{BB962C8B-B14F-4D97-AF65-F5344CB8AC3E}">
+        <p14:creationId xmlns:p14="http://schemas.microsoft.com/office/powerpoint/2010/main" val="2290914037"/>
+      </p:ext>
+    </p:extLst>
+  </p:cSld>
+  <p:clrMapOvr>
+    <a:masterClrMapping/>
+  </p:clrMapOvr>
+</p:sld>
+</file>
+
+<file path=ppt/slides/slide9.xml><?xml version="1.0" encoding="utf-8"?>
+<p:sld xmlns:a="http://schemas.openxmlformats.org/drawingml/2006/main" xmlns:r="http://schemas.openxmlformats.org/officeDocument/2006/relationships" xmlns:p="http://schemas.openxmlformats.org/presentationml/2006/main">
+  <p:cSld>
+    <p:spTree>
+      <p:nvGrpSpPr>
+        <p:cNvPr id="1" name=""/>
+        <p:cNvGrpSpPr/>
+        <p:nvPr/>
+      </p:nvGrpSpPr>
+      <p:grpSpPr>
+        <a:xfrm>
+          <a:off x="0" y="0"/>
+          <a:ext cx="0" cy="0"/>
+          <a:chOff x="0" y="0"/>
+          <a:chExt cx="0" cy="0"/>
+        </a:xfrm>
+      </p:grpSpPr>
+      <p:sp>
+        <p:nvSpPr>
+          <p:cNvPr id="2" name="Titel 1">
+            <a:extLst>
+              <a:ext uri="{FF2B5EF4-FFF2-40B4-BE49-F238E27FC236}">
+                <a16:creationId xmlns:a16="http://schemas.microsoft.com/office/drawing/2014/main" id="{8D31D849-202A-5FBF-393C-17A8293CA9B1}"/>
+              </a:ext>
+            </a:extLst>
+          </p:cNvPr>
+          <p:cNvSpPr>
+            <a:spLocks noGrp="1"/>
+          </p:cNvSpPr>
+          <p:nvPr>
+            <p:ph type="title"/>
+          </p:nvPr>
+        </p:nvSpPr>
+        <p:spPr/>
+        <p:txBody>
+          <a:bodyPr/>
+          <a:lstStyle/>
+          <a:p>
+            <a:r>
+              <a:rPr lang="en-GB" dirty="0"/>
+              <a:t>Kalman Filter: Convergence</a:t>
+            </a:r>
+            <a:endParaRPr lang="en-US" dirty="0"/>
+          </a:p>
+        </p:txBody>
+      </p:sp>
+      <p:sp>
+        <p:nvSpPr>
+          <p:cNvPr id="3" name="Inhaltsplatzhalter 2">
+            <a:extLst>
+              <a:ext uri="{FF2B5EF4-FFF2-40B4-BE49-F238E27FC236}">
+                <a16:creationId xmlns:a16="http://schemas.microsoft.com/office/drawing/2014/main" id="{00D21041-A1CD-8C6E-6D72-C180E1CE60A4}"/>
+              </a:ext>
+            </a:extLst>
+          </p:cNvPr>
+          <p:cNvSpPr>
+            <a:spLocks noGrp="1"/>
+          </p:cNvSpPr>
+          <p:nvPr>
+            <p:ph idx="1"/>
+          </p:nvPr>
+        </p:nvSpPr>
+        <p:spPr/>
+        <p:txBody>
+          <a:bodyPr/>
+          <a:lstStyle/>
+          <a:p>
+            <a:r>
+              <a:rPr lang="de-CH" dirty="0"/>
+              <a:t>Measurement Noise </a:t>
+            </a:r>
+            <a:r>
+              <a:rPr lang="de-CH" dirty="0" err="1"/>
+              <a:t>Covariance</a:t>
+            </a:r>
+            <a:r>
+              <a:rPr lang="de-CH" dirty="0"/>
+              <a:t> (R)</a:t>
+            </a:r>
+          </a:p>
+          <a:p>
+            <a:pPr lvl="2"/>
+            <a:r>
+              <a:rPr lang="en-US" dirty="0"/>
+              <a:t>Higher R → Trust the measurement less</a:t>
+            </a:r>
+          </a:p>
+          <a:p>
+            <a:pPr lvl="2"/>
+            <a:r>
+              <a:rPr lang="en-US" dirty="0"/>
+              <a:t>Lower R → Trust the measurement more</a:t>
+            </a:r>
+          </a:p>
+          <a:p>
+            <a:pPr marL="268287" lvl="2" indent="0">
+              <a:buNone/>
+            </a:pPr>
+            <a:endParaRPr lang="en-US" dirty="0"/>
+          </a:p>
+          <a:p>
+            <a:r>
+              <a:rPr lang="en-US" dirty="0"/>
+              <a:t>Process Noise Covariance (Q)</a:t>
+            </a:r>
+          </a:p>
+          <a:p>
+            <a:pPr lvl="2"/>
+            <a:r>
+              <a:rPr lang="en-US" dirty="0"/>
+              <a:t>Higher Q → Trust the model less, adapt faster to changes</a:t>
+            </a:r>
+          </a:p>
+          <a:p>
+            <a:pPr lvl="2"/>
+            <a:r>
+              <a:rPr lang="en-US" dirty="0"/>
+              <a:t>Lower Q → Trust the model more, respond slower</a:t>
+            </a:r>
+          </a:p>
+          <a:p>
+            <a:pPr marL="268287" lvl="2" indent="0">
+              <a:buNone/>
+            </a:pPr>
+            <a:endParaRPr lang="en-US" dirty="0"/>
+          </a:p>
+          <a:p>
+            <a:r>
+              <a:rPr lang="en-US" dirty="0"/>
+              <a:t>Initial State Estimate (x₀) and Error Covariance (P₀)</a:t>
+            </a:r>
+          </a:p>
+          <a:p>
+            <a:pPr lvl="2"/>
+            <a:r>
+              <a:rPr lang="en-US" dirty="0"/>
+              <a:t>Set </a:t>
+            </a:r>
+            <a:r>
+              <a:rPr lang="en-US" b="1" dirty="0"/>
+              <a:t>x₀</a:t>
+            </a:r>
+            <a:r>
+              <a:rPr lang="en-US" dirty="0"/>
+              <a:t> as close as possible to the true state</a:t>
+            </a:r>
+          </a:p>
+          <a:p>
+            <a:pPr lvl="2"/>
+            <a:r>
+              <a:rPr lang="en-US" dirty="0"/>
+              <a:t>Set </a:t>
+            </a:r>
+            <a:r>
+              <a:rPr lang="en-US" b="1" dirty="0"/>
+              <a:t>P₀</a:t>
+            </a:r>
+            <a:r>
+              <a:rPr lang="en-US" dirty="0"/>
+              <a:t> high if uncertain about the initial estimate or low if confident</a:t>
+            </a:r>
+          </a:p>
+          <a:p>
+            <a:pPr marL="268287" lvl="2" indent="0">
+              <a:buNone/>
+            </a:pPr>
+            <a:endParaRPr lang="en-US" dirty="0"/>
+          </a:p>
+        </p:txBody>
+      </p:sp>
+      <p:sp>
+        <p:nvSpPr>
+          <p:cNvPr id="4" name="Datumsplatzhalter 3">
+            <a:extLst>
+              <a:ext uri="{FF2B5EF4-FFF2-40B4-BE49-F238E27FC236}">
+                <a16:creationId xmlns:a16="http://schemas.microsoft.com/office/drawing/2014/main" id="{7A38D4AB-9406-218C-F5AD-36FD52CB2129}"/>
+              </a:ext>
+            </a:extLst>
+          </p:cNvPr>
+          <p:cNvSpPr>
+            <a:spLocks noGrp="1"/>
+          </p:cNvSpPr>
+          <p:nvPr>
+            <p:ph type="dt" sz="half" idx="10"/>
+          </p:nvPr>
+        </p:nvSpPr>
+        <p:spPr/>
+        <p:txBody>
+          <a:bodyPr/>
+          <a:lstStyle/>
+          <a:p>
+            <a:fld id="{B2DD1E4E-1107-499B-BB00-8AA0260A0EFB}" type="datetime1">
+              <a:rPr lang="de-DE" smtClean="0"/>
+              <a:t>07.07.2025</a:t>
+            </a:fld>
+            <a:endParaRPr lang="de-CH" dirty="0"/>
+          </a:p>
+        </p:txBody>
+      </p:sp>
+      <p:sp>
+        <p:nvSpPr>
+          <p:cNvPr id="5" name="Fußzeilenplatzhalter 4">
+            <a:extLst>
+              <a:ext uri="{FF2B5EF4-FFF2-40B4-BE49-F238E27FC236}">
+                <a16:creationId xmlns:a16="http://schemas.microsoft.com/office/drawing/2014/main" id="{81A54760-4EC6-3AEE-7F38-A85D654AAF87}"/>
+              </a:ext>
+            </a:extLst>
+          </p:cNvPr>
+          <p:cNvSpPr>
+            <a:spLocks noGrp="1"/>
+          </p:cNvSpPr>
+          <p:nvPr>
+            <p:ph type="ftr" sz="quarter" idx="11"/>
+          </p:nvPr>
+        </p:nvSpPr>
+        <p:spPr/>
+        <p:txBody>
+          <a:bodyPr/>
+          <a:lstStyle/>
+          <a:p>
+            <a:r>
+              <a:rPr lang="en-US"/>
+              <a:t>Institute For Sensor and Electronics</a:t>
+            </a:r>
+            <a:endParaRPr lang="de-CH" dirty="0"/>
+          </a:p>
+        </p:txBody>
+      </p:sp>
+      <p:sp>
+        <p:nvSpPr>
+          <p:cNvPr id="6" name="Foliennummernplatzhalter 5">
+            <a:extLst>
+              <a:ext uri="{FF2B5EF4-FFF2-40B4-BE49-F238E27FC236}">
+                <a16:creationId xmlns:a16="http://schemas.microsoft.com/office/drawing/2014/main" id="{FC08CB22-4DA5-1FCC-53A1-B962D9ABF265}"/>
+              </a:ext>
+            </a:extLst>
+          </p:cNvPr>
+          <p:cNvSpPr>
+            <a:spLocks noGrp="1"/>
+          </p:cNvSpPr>
+          <p:nvPr>
+            <p:ph type="sldNum" sz="quarter" idx="12"/>
+          </p:nvPr>
+        </p:nvSpPr>
+        <p:spPr/>
+        <p:txBody>
+          <a:bodyPr/>
+          <a:lstStyle/>
+          <a:p>
+            <a:fld id="{442AD375-037F-43D0-B059-5172DA06796A}" type="slidenum">
+              <a:rPr lang="de-CH" smtClean="0"/>
+              <a:pPr/>
+              <a:t>9</a:t>
+            </a:fld>
+            <a:endParaRPr lang="de-CH" dirty="0"/>
+          </a:p>
+        </p:txBody>
+      </p:sp>
+    </p:spTree>
+    <p:extLst>
+      <p:ext uri="{BB962C8B-B14F-4D97-AF65-F5344CB8AC3E}">
+        <p14:creationId xmlns:p14="http://schemas.microsoft.com/office/powerpoint/2010/main" val="2582365205"/>
       </p:ext>
     </p:extLst>
   </p:cSld>
@@ -6814,7 +14044,7 @@
 
 <file path=ppt/webextensions/taskpanes.xml><?xml version="1.0" encoding="utf-8"?>
 <wetp:taskpanes xmlns:wetp="http://schemas.microsoft.com/office/webextensions/taskpanes/2010/11">
-  <wetp:taskpane dockstate="right" visibility="0" width="525" row="0">
+  <wetp:taskpane dockstate="right" visibility="0" width="350" row="0">
     <wetp:webextensionref xmlns:r="http://schemas.openxmlformats.org/officeDocument/2006/relationships" r:id="rId1"/>
   </wetp:taskpane>
 </wetp:taskpanes>
@@ -6835,21 +14065,12 @@
 </file>
 
 <file path=customXml/item1.xml><?xml version="1.0" encoding="utf-8"?>
-<?mso-contentType ?>
-<FormTemplates xmlns="http://schemas.microsoft.com/sharepoint/v3/contenttype/forms">
-  <Display>DocumentLibraryForm</Display>
-  <Edit>DocumentLibraryForm</Edit>
-  <New>DocumentLibraryForm</New>
-</FormTemplates>
-</file>
-
-<file path=customXml/item2.xml><?xml version="1.0" encoding="utf-8"?>
 <p:properties xmlns:p="http://schemas.microsoft.com/office/2006/metadata/properties" xmlns:xsi="http://www.w3.org/2001/XMLSchema-instance" xmlns:pc="http://schemas.microsoft.com/office/infopath/2007/PartnerControls">
   <documentManagement/>
 </p:properties>
 </file>
 
-<file path=customXml/item3.xml><?xml version="1.0" encoding="utf-8"?>
+<file path=customXml/item2.xml><?xml version="1.0" encoding="utf-8"?>
 <ct:contentTypeSchema xmlns:ct="http://schemas.microsoft.com/office/2006/metadata/contentType" xmlns:ma="http://schemas.microsoft.com/office/2006/metadata/properties/metaAttributes" ct:_="" ma:_="" ma:contentTypeName="Dokument" ma:contentTypeID="0x010100F336E6A137EBA04CAA14C83E6B567E6E" ma:contentTypeVersion="4" ma:contentTypeDescription="Ein neues Dokument erstellen." ma:contentTypeScope="" ma:versionID="506964d69c7fa676f2673ca1c565f571">
   <xsd:schema xmlns:xsd="http://www.w3.org/2001/XMLSchema" xmlns:xs="http://www.w3.org/2001/XMLSchema" xmlns:p="http://schemas.microsoft.com/office/2006/metadata/properties" xmlns:ns2="5019f46e-7630-4c10-8bcc-ae747be1e2f1" targetNamespace="http://schemas.microsoft.com/office/2006/metadata/properties" ma:root="true" ma:fieldsID="6f33e12c5860b9710acc1ab8237e07cc" ns2:_="">
     <xsd:import namespace="5019f46e-7630-4c10-8bcc-ae747be1e2f1"/>
@@ -6993,15 +14214,16 @@
 </ct:contentTypeSchema>
 </file>
 
-<file path=customXml/itemProps1.xml><?xml version="1.0" encoding="utf-8"?>
-<ds:datastoreItem xmlns:ds="http://schemas.openxmlformats.org/officeDocument/2006/customXml" ds:itemID="{4B6B7BE2-63AD-4C37-AC44-F0E4FC348E24}">
-  <ds:schemaRefs>
-    <ds:schemaRef ds:uri="http://schemas.microsoft.com/sharepoint/v3/contenttype/forms"/>
-  </ds:schemaRefs>
-</ds:datastoreItem>
+<file path=customXml/item3.xml><?xml version="1.0" encoding="utf-8"?>
+<?mso-contentType ?>
+<FormTemplates xmlns="http://schemas.microsoft.com/sharepoint/v3/contenttype/forms">
+  <Display>DocumentLibraryForm</Display>
+  <Edit>DocumentLibraryForm</Edit>
+  <New>DocumentLibraryForm</New>
+</FormTemplates>
 </file>
 
-<file path=customXml/itemProps2.xml><?xml version="1.0" encoding="utf-8"?>
+<file path=customXml/itemProps1.xml><?xml version="1.0" encoding="utf-8"?>
 <ds:datastoreItem xmlns:ds="http://schemas.openxmlformats.org/officeDocument/2006/customXml" ds:itemID="{5626B806-0237-4942-A1FD-5C97285908C2}">
   <ds:schemaRefs>
     <ds:schemaRef ds:uri="http://purl.org/dc/dcmitype/"/>
@@ -7018,7 +14240,7 @@
 </ds:datastoreItem>
 </file>
 
-<file path=customXml/itemProps3.xml><?xml version="1.0" encoding="utf-8"?>
+<file path=customXml/itemProps2.xml><?xml version="1.0" encoding="utf-8"?>
 <ds:datastoreItem xmlns:ds="http://schemas.openxmlformats.org/officeDocument/2006/customXml" ds:itemID="{E53FC72E-3252-48C8-88DD-D79C2930A3EF}">
   <ds:schemaRefs>
     <ds:schemaRef ds:uri="http://schemas.microsoft.com/office/2006/metadata/contentType"/>
@@ -7034,4 +14256,12 @@
     <ds:schemaRef ds:uri="http://schemas.microsoft.com/internal/obd"/>
   </ds:schemaRefs>
 </ds:datastoreItem>
+</file>
+
+<file path=customXml/itemProps3.xml><?xml version="1.0" encoding="utf-8"?>
+<ds:datastoreItem xmlns:ds="http://schemas.openxmlformats.org/officeDocument/2006/customXml" ds:itemID="{4B6B7BE2-63AD-4C37-AC44-F0E4FC348E24}">
+  <ds:schemaRefs>
+    <ds:schemaRef ds:uri="http://schemas.microsoft.com/sharepoint/v3/contenttype/forms"/>
+  </ds:schemaRefs>
+</ds:datastoreItem>
 </file>